--- a/slides/1st_stage/F_information_systems.pptx
+++ b/slides/1st_stage/F_information_systems.pptx
@@ -6474,7 +6474,49 @@
         <p:spPr>
           <a:xfrm>
             <a:off x="502920" y="1691640"/>
-            <a:ext cx="1737360" cy="310896"/>
+            <a:ext cx="6766560" cy="868680"/>
+          </a:xfrm>
+          <a:prstGeom prst="rect">
+            <a:avLst/>
+          </a:prstGeom>
+          <a:noFill/>
+          <a:ln/>
+        </p:spPr>
+        <p:txBody>
+          <a:bodyPr wrap="square" lIns="0" tIns="0" rIns="0" bIns="0" rtlCol="0" anchor="ctr"/>
+          <a:lstStyle/>
+          <a:p>
+            <a:pPr indent="0" marL="0">
+              <a:lnSpc>
+                <a:spcPct val="130000"/>
+              </a:lnSpc>
+              <a:buNone/>
+            </a:pPr>
+            <a:r>
+              <a:rPr lang="en-US" sz="1000" dirty="0">
+                <a:solidFill>
+                  <a:srgbClr val="8A8A8A"/>
+                </a:solidFill>
+                <a:latin typeface="Yu Gothic" pitchFamily="34" charset="0"/>
+                <a:ea typeface="Yu Gothic" pitchFamily="34" charset="-122"/>
+                <a:cs typeface="Yu Gothic" pitchFamily="34" charset="-120"/>
+              </a:rPr>
+              <a:t>正規化はデータの重複や更新時の矛盾を防ぐため、表を第1正規形から第3正規形へと段階的に整理する手続き。右図のとおり、後の段階に進むほどより厳密な条件をクリアする必要がある。</a:t>
+            </a:r>
+            <a:endParaRPr lang="en-US" sz="1000" dirty="0"/>
+          </a:p>
+        </p:txBody>
+      </p:sp>
+      <p:sp>
+        <p:nvSpPr>
+          <p:cNvPr id="9" name="Text 7"/>
+          <p:cNvSpPr txBox="1"/>
+          <p:nvPr/>
+        </p:nvSpPr>
+        <p:spPr>
+          <a:xfrm>
+            <a:off x="502920" y="2651760"/>
+            <a:ext cx="1691640" cy="329184"/>
           </a:xfrm>
           <a:prstGeom prst="rect">
             <a:avLst/>
@@ -6490,7 +6532,7 @@
               <a:buNone/>
             </a:pPr>
             <a:r>
-              <a:rPr lang="en-US" sz="1050" b="1" dirty="0">
+              <a:rPr lang="en-US" sz="950" b="1" dirty="0">
                 <a:solidFill>
                   <a:srgbClr val="171717"/>
                 </a:solidFill>
@@ -6500,19 +6542,19 @@
               </a:rPr>
               <a:t>第1正規形</a:t>
             </a:r>
-            <a:endParaRPr lang="en-US" sz="1050" dirty="0"/>
-          </a:p>
-        </p:txBody>
-      </p:sp>
-      <p:sp>
-        <p:nvSpPr>
-          <p:cNvPr id="9" name="Shape 7"/>
+            <a:endParaRPr lang="en-US" sz="950" dirty="0"/>
+          </a:p>
+        </p:txBody>
+      </p:sp>
+      <p:sp>
+        <p:nvSpPr>
+          <p:cNvPr id="10" name="Shape 8"/>
           <p:cNvSpPr/>
           <p:nvPr/>
         </p:nvSpPr>
         <p:spPr>
           <a:xfrm>
-            <a:off x="2221992" y="1691640"/>
+            <a:off x="2176272" y="2651760"/>
             <a:ext cx="0" cy="256032"/>
           </a:xfrm>
           <a:prstGeom prst="line">
@@ -6529,14 +6571,14 @@
       </p:sp>
       <p:sp>
         <p:nvSpPr>
-          <p:cNvPr id="10" name="Text 8"/>
-          <p:cNvSpPr txBox="1"/>
-          <p:nvPr/>
-        </p:nvSpPr>
-        <p:spPr>
-          <a:xfrm>
-            <a:off x="2377440" y="1691640"/>
-            <a:ext cx="9326880" cy="310896"/>
+          <p:cNvPr id="11" name="Text 9"/>
+          <p:cNvSpPr txBox="1"/>
+          <p:nvPr/>
+        </p:nvSpPr>
+        <p:spPr>
+          <a:xfrm>
+            <a:off x="2331720" y="2651760"/>
+            <a:ext cx="4937760" cy="329184"/>
           </a:xfrm>
           <a:prstGeom prst="rect">
             <a:avLst/>
@@ -6552,7 +6594,7 @@
               <a:buNone/>
             </a:pPr>
             <a:r>
-              <a:rPr lang="en-US" sz="1050" dirty="0">
+              <a:rPr lang="en-US" sz="950" dirty="0">
                 <a:solidFill>
                   <a:srgbClr val="8A8A8A"/>
                 </a:solidFill>
@@ -6562,20 +6604,20 @@
               </a:rPr>
               <a:t>各セルに単一の値のみ。繰り返し項目がない</a:t>
             </a:r>
-            <a:endParaRPr lang="en-US" sz="1050" dirty="0"/>
-          </a:p>
-        </p:txBody>
-      </p:sp>
-      <p:sp>
-        <p:nvSpPr>
-          <p:cNvPr id="11" name="Text 9"/>
-          <p:cNvSpPr txBox="1"/>
-          <p:nvPr/>
-        </p:nvSpPr>
-        <p:spPr>
-          <a:xfrm>
-            <a:off x="502920" y="2020824"/>
-            <a:ext cx="1737360" cy="310896"/>
+            <a:endParaRPr lang="en-US" sz="950" dirty="0"/>
+          </a:p>
+        </p:txBody>
+      </p:sp>
+      <p:sp>
+        <p:nvSpPr>
+          <p:cNvPr id="12" name="Text 10"/>
+          <p:cNvSpPr txBox="1"/>
+          <p:nvPr/>
+        </p:nvSpPr>
+        <p:spPr>
+          <a:xfrm>
+            <a:off x="502920" y="2999232"/>
+            <a:ext cx="1691640" cy="329184"/>
           </a:xfrm>
           <a:prstGeom prst="rect">
             <a:avLst/>
@@ -6591,7 +6633,7 @@
               <a:buNone/>
             </a:pPr>
             <a:r>
-              <a:rPr lang="en-US" sz="1050" b="1" dirty="0">
+              <a:rPr lang="en-US" sz="950" b="1" dirty="0">
                 <a:solidFill>
                   <a:srgbClr val="171717"/>
                 </a:solidFill>
@@ -6601,19 +6643,19 @@
               </a:rPr>
               <a:t>第2正規形</a:t>
             </a:r>
-            <a:endParaRPr lang="en-US" sz="1050" dirty="0"/>
-          </a:p>
-        </p:txBody>
-      </p:sp>
-      <p:sp>
-        <p:nvSpPr>
-          <p:cNvPr id="12" name="Shape 10"/>
+            <a:endParaRPr lang="en-US" sz="950" dirty="0"/>
+          </a:p>
+        </p:txBody>
+      </p:sp>
+      <p:sp>
+        <p:nvSpPr>
+          <p:cNvPr id="13" name="Shape 11"/>
           <p:cNvSpPr/>
           <p:nvPr/>
         </p:nvSpPr>
         <p:spPr>
           <a:xfrm>
-            <a:off x="2221992" y="2020824"/>
+            <a:off x="2176272" y="2999232"/>
             <a:ext cx="0" cy="256032"/>
           </a:xfrm>
           <a:prstGeom prst="line">
@@ -6630,14 +6672,14 @@
       </p:sp>
       <p:sp>
         <p:nvSpPr>
-          <p:cNvPr id="13" name="Text 11"/>
-          <p:cNvSpPr txBox="1"/>
-          <p:nvPr/>
-        </p:nvSpPr>
-        <p:spPr>
-          <a:xfrm>
-            <a:off x="2377440" y="2020824"/>
-            <a:ext cx="9326880" cy="310896"/>
+          <p:cNvPr id="14" name="Text 12"/>
+          <p:cNvSpPr txBox="1"/>
+          <p:nvPr/>
+        </p:nvSpPr>
+        <p:spPr>
+          <a:xfrm>
+            <a:off x="2331720" y="2999232"/>
+            <a:ext cx="4937760" cy="329184"/>
           </a:xfrm>
           <a:prstGeom prst="rect">
             <a:avLst/>
@@ -6653,7 +6695,7 @@
               <a:buNone/>
             </a:pPr>
             <a:r>
-              <a:rPr lang="en-US" sz="1050" dirty="0">
+              <a:rPr lang="en-US" sz="950" dirty="0">
                 <a:solidFill>
                   <a:srgbClr val="8A8A8A"/>
                 </a:solidFill>
@@ -6663,20 +6705,20 @@
               </a:rPr>
               <a:t>非キー属性が主キーの一部にのみ依存する状態（部分関数従属）がない</a:t>
             </a:r>
-            <a:endParaRPr lang="en-US" sz="1050" dirty="0"/>
-          </a:p>
-        </p:txBody>
-      </p:sp>
-      <p:sp>
-        <p:nvSpPr>
-          <p:cNvPr id="14" name="Text 12"/>
-          <p:cNvSpPr txBox="1"/>
-          <p:nvPr/>
-        </p:nvSpPr>
-        <p:spPr>
-          <a:xfrm>
-            <a:off x="502920" y="2350008"/>
-            <a:ext cx="1737360" cy="310896"/>
+            <a:endParaRPr lang="en-US" sz="950" dirty="0"/>
+          </a:p>
+        </p:txBody>
+      </p:sp>
+      <p:sp>
+        <p:nvSpPr>
+          <p:cNvPr id="15" name="Text 13"/>
+          <p:cNvSpPr txBox="1"/>
+          <p:nvPr/>
+        </p:nvSpPr>
+        <p:spPr>
+          <a:xfrm>
+            <a:off x="502920" y="3346704"/>
+            <a:ext cx="1691640" cy="329184"/>
           </a:xfrm>
           <a:prstGeom prst="rect">
             <a:avLst/>
@@ -6692,7 +6734,7 @@
               <a:buNone/>
             </a:pPr>
             <a:r>
-              <a:rPr lang="en-US" sz="1050" b="1" dirty="0">
+              <a:rPr lang="en-US" sz="950" b="1" dirty="0">
                 <a:solidFill>
                   <a:srgbClr val="171717"/>
                 </a:solidFill>
@@ -6702,19 +6744,19 @@
               </a:rPr>
               <a:t>第3正規形</a:t>
             </a:r>
-            <a:endParaRPr lang="en-US" sz="1050" dirty="0"/>
-          </a:p>
-        </p:txBody>
-      </p:sp>
-      <p:sp>
-        <p:nvSpPr>
-          <p:cNvPr id="15" name="Shape 13"/>
+            <a:endParaRPr lang="en-US" sz="950" dirty="0"/>
+          </a:p>
+        </p:txBody>
+      </p:sp>
+      <p:sp>
+        <p:nvSpPr>
+          <p:cNvPr id="16" name="Shape 14"/>
           <p:cNvSpPr/>
           <p:nvPr/>
         </p:nvSpPr>
         <p:spPr>
           <a:xfrm>
-            <a:off x="2221992" y="2350008"/>
+            <a:off x="2176272" y="3346704"/>
             <a:ext cx="0" cy="256032"/>
           </a:xfrm>
           <a:prstGeom prst="line">
@@ -6731,14 +6773,14 @@
       </p:sp>
       <p:sp>
         <p:nvSpPr>
-          <p:cNvPr id="16" name="Text 14"/>
-          <p:cNvSpPr txBox="1"/>
-          <p:nvPr/>
-        </p:nvSpPr>
-        <p:spPr>
-          <a:xfrm>
-            <a:off x="2377440" y="2350008"/>
-            <a:ext cx="9326880" cy="310896"/>
+          <p:cNvPr id="17" name="Text 15"/>
+          <p:cNvSpPr txBox="1"/>
+          <p:nvPr/>
+        </p:nvSpPr>
+        <p:spPr>
+          <a:xfrm>
+            <a:off x="2331720" y="3346704"/>
+            <a:ext cx="4937760" cy="329184"/>
           </a:xfrm>
           <a:prstGeom prst="rect">
             <a:avLst/>
@@ -6754,7 +6796,7 @@
               <a:buNone/>
             </a:pPr>
             <a:r>
-              <a:rPr lang="en-US" sz="1050" dirty="0">
+              <a:rPr lang="en-US" sz="950" dirty="0">
                 <a:solidFill>
                   <a:srgbClr val="8A8A8A"/>
                 </a:solidFill>
@@ -6764,20 +6806,20 @@
               </a:rPr>
               <a:t>非キー属性同士が間接的に決まる関係（推移的関数従属）がない</a:t>
             </a:r>
-            <a:endParaRPr lang="en-US" sz="1050" dirty="0"/>
-          </a:p>
-        </p:txBody>
-      </p:sp>
-      <p:sp>
-        <p:nvSpPr>
-          <p:cNvPr id="17" name="Text 15"/>
-          <p:cNvSpPr txBox="1"/>
-          <p:nvPr/>
-        </p:nvSpPr>
-        <p:spPr>
-          <a:xfrm>
-            <a:off x="502920" y="2679192"/>
-            <a:ext cx="1737360" cy="310896"/>
+            <a:endParaRPr lang="en-US" sz="950" dirty="0"/>
+          </a:p>
+        </p:txBody>
+      </p:sp>
+      <p:sp>
+        <p:nvSpPr>
+          <p:cNvPr id="18" name="Text 16"/>
+          <p:cNvSpPr txBox="1"/>
+          <p:nvPr/>
+        </p:nvSpPr>
+        <p:spPr>
+          <a:xfrm>
+            <a:off x="502920" y="3694176"/>
+            <a:ext cx="1691640" cy="329184"/>
           </a:xfrm>
           <a:prstGeom prst="rect">
             <a:avLst/>
@@ -6793,7 +6835,7 @@
               <a:buNone/>
             </a:pPr>
             <a:r>
-              <a:rPr lang="en-US" sz="1050" b="1" dirty="0">
+              <a:rPr lang="en-US" sz="950" b="1" dirty="0">
                 <a:solidFill>
                   <a:srgbClr val="171717"/>
                 </a:solidFill>
@@ -6803,19 +6845,19 @@
               </a:rPr>
               <a:t>ACID特性</a:t>
             </a:r>
-            <a:endParaRPr lang="en-US" sz="1050" dirty="0"/>
-          </a:p>
-        </p:txBody>
-      </p:sp>
-      <p:sp>
-        <p:nvSpPr>
-          <p:cNvPr id="18" name="Shape 16"/>
+            <a:endParaRPr lang="en-US" sz="950" dirty="0"/>
+          </a:p>
+        </p:txBody>
+      </p:sp>
+      <p:sp>
+        <p:nvSpPr>
+          <p:cNvPr id="19" name="Shape 17"/>
           <p:cNvSpPr/>
           <p:nvPr/>
         </p:nvSpPr>
         <p:spPr>
           <a:xfrm>
-            <a:off x="2221992" y="2679192"/>
+            <a:off x="2176272" y="3694176"/>
             <a:ext cx="0" cy="256032"/>
           </a:xfrm>
           <a:prstGeom prst="line">
@@ -6832,14 +6874,14 @@
       </p:sp>
       <p:sp>
         <p:nvSpPr>
-          <p:cNvPr id="19" name="Text 17"/>
-          <p:cNvSpPr txBox="1"/>
-          <p:nvPr/>
-        </p:nvSpPr>
-        <p:spPr>
-          <a:xfrm>
-            <a:off x="2377440" y="2679192"/>
-            <a:ext cx="9326880" cy="310896"/>
+          <p:cNvPr id="20" name="Text 18"/>
+          <p:cNvSpPr txBox="1"/>
+          <p:nvPr/>
+        </p:nvSpPr>
+        <p:spPr>
+          <a:xfrm>
+            <a:off x="2331720" y="3694176"/>
+            <a:ext cx="4937760" cy="329184"/>
           </a:xfrm>
           <a:prstGeom prst="rect">
             <a:avLst/>
@@ -6855,7 +6897,7 @@
               <a:buNone/>
             </a:pPr>
             <a:r>
-              <a:rPr lang="en-US" sz="1050" dirty="0">
+              <a:rPr lang="en-US" sz="950" dirty="0">
                 <a:solidFill>
                   <a:srgbClr val="8A8A8A"/>
                 </a:solidFill>
@@ -6865,20 +6907,20 @@
               </a:rPr>
               <a:t>原子性・一貫性・独立性・永続性。トランザクションが満たすべき4性質</a:t>
             </a:r>
-            <a:endParaRPr lang="en-US" sz="1050" dirty="0"/>
-          </a:p>
-        </p:txBody>
-      </p:sp>
-      <p:sp>
-        <p:nvSpPr>
-          <p:cNvPr id="20" name="Shape 18"/>
+            <a:endParaRPr lang="en-US" sz="950" dirty="0"/>
+          </a:p>
+        </p:txBody>
+      </p:sp>
+      <p:sp>
+        <p:nvSpPr>
+          <p:cNvPr id="21" name="Shape 19"/>
           <p:cNvSpPr/>
           <p:nvPr/>
         </p:nvSpPr>
         <p:spPr>
           <a:xfrm>
-            <a:off x="502920" y="3081528"/>
-            <a:ext cx="11201400" cy="0"/>
+            <a:off x="502920" y="4114800"/>
+            <a:ext cx="6766560" cy="0"/>
           </a:xfrm>
           <a:prstGeom prst="line">
             <a:avLst/>
@@ -6894,14 +6936,14 @@
       </p:sp>
       <p:sp>
         <p:nvSpPr>
-          <p:cNvPr id="21" name="Text 19"/>
-          <p:cNvSpPr txBox="1"/>
-          <p:nvPr/>
-        </p:nvSpPr>
-        <p:spPr>
-          <a:xfrm>
-            <a:off x="502920" y="3154680"/>
-            <a:ext cx="11201400" cy="457200"/>
+          <p:cNvPr id="22" name="Text 20"/>
+          <p:cNvSpPr txBox="1"/>
+          <p:nvPr/>
+        </p:nvSpPr>
+        <p:spPr>
+          <a:xfrm>
+            <a:off x="502920" y="4187952"/>
+            <a:ext cx="6766560" cy="457200"/>
           </a:xfrm>
           <a:prstGeom prst="rect">
             <a:avLst/>
@@ -6953,7 +6995,427 @@
       </p:sp>
       <p:sp>
         <p:nvSpPr>
-          <p:cNvPr id="22" name="Shape 20"/>
+          <p:cNvPr id="23" name="Shape 21"/>
+          <p:cNvSpPr/>
+          <p:nvPr/>
+        </p:nvSpPr>
+        <p:spPr>
+          <a:xfrm>
+            <a:off x="7543800" y="1737360"/>
+            <a:ext cx="3703320" cy="1085088"/>
+          </a:xfrm>
+          <a:prstGeom prst="rect">
+            <a:avLst/>
+          </a:prstGeom>
+          <a:solidFill>
+            <a:srgbClr val="F4F4F4"/>
+          </a:solidFill>
+          <a:ln w="12700">
+            <a:solidFill>
+              <a:srgbClr val="E6E6E6"/>
+            </a:solidFill>
+            <a:prstDash val="solid"/>
+          </a:ln>
+        </p:spPr>
+      </p:sp>
+      <p:sp>
+        <p:nvSpPr>
+          <p:cNvPr id="24" name="Text 22"/>
+          <p:cNvSpPr txBox="1"/>
+          <p:nvPr/>
+        </p:nvSpPr>
+        <p:spPr>
+          <a:xfrm>
+            <a:off x="7543800" y="1737360"/>
+            <a:ext cx="3703320" cy="1085088"/>
+          </a:xfrm>
+          <a:prstGeom prst="rect">
+            <a:avLst/>
+          </a:prstGeom>
+          <a:noFill/>
+          <a:ln/>
+        </p:spPr>
+        <p:txBody>
+          <a:bodyPr wrap="square" lIns="0" tIns="0" rIns="0" bIns="0" rtlCol="0" anchor="ctr"/>
+          <a:lstStyle/>
+          <a:p>
+            <a:pPr algn="ctr" indent="0" marL="0">
+              <a:lnSpc>
+                <a:spcPct val="115000"/>
+              </a:lnSpc>
+              <a:buNone/>
+            </a:pPr>
+            <a:r>
+              <a:rPr lang="en-US" sz="900" b="1" dirty="0">
+                <a:solidFill>
+                  <a:srgbClr val="FF3B1F"/>
+                </a:solidFill>
+                <a:latin typeface="Consolas" pitchFamily="34" charset="0"/>
+                <a:ea typeface="Consolas" pitchFamily="34" charset="-122"/>
+                <a:cs typeface="Consolas" pitchFamily="34" charset="-120"/>
+              </a:rPr>
+              <a:t>1NF
+</a:t>
+            </a:r>
+            <a:endParaRPr lang="en-US" sz="900" dirty="0"/>
+          </a:p>
+          <a:p>
+            <a:pPr algn="ctr" indent="0" marL="0">
+              <a:lnSpc>
+                <a:spcPct val="115000"/>
+              </a:lnSpc>
+              <a:buNone/>
+            </a:pPr>
+            <a:r>
+              <a:rPr lang="en-US" sz="1600" b="1" dirty="0">
+                <a:solidFill>
+                  <a:srgbClr val="171717"/>
+                </a:solidFill>
+                <a:latin typeface="Yu Gothic" pitchFamily="34" charset="0"/>
+                <a:ea typeface="Yu Gothic" pitchFamily="34" charset="-122"/>
+                <a:cs typeface="Yu Gothic" pitchFamily="34" charset="-120"/>
+              </a:rPr>
+              <a:t>第1正規形</a:t>
+            </a:r>
+            <a:pPr algn="ctr" indent="0" marL="0">
+              <a:lnSpc>
+                <a:spcPct val="115000"/>
+              </a:lnSpc>
+              <a:buNone/>
+            </a:pPr>
+            <a:endParaRPr lang="en-US" sz="900" dirty="0"/>
+          </a:p>
+          <a:p>
+            <a:pPr algn="ctr" indent="0" marL="0">
+              <a:lnSpc>
+                <a:spcPct val="115000"/>
+              </a:lnSpc>
+              <a:buNone/>
+            </a:pPr>
+            <a:r>
+              <a:rPr lang="en-US" sz="1000" b="1" dirty="0">
+                <a:solidFill>
+                  <a:srgbClr val="FF3B1F"/>
+                </a:solidFill>
+                <a:latin typeface="Yu Gothic" pitchFamily="34" charset="0"/>
+                <a:ea typeface="Yu Gothic" pitchFamily="34" charset="-122"/>
+                <a:cs typeface="Yu Gothic" pitchFamily="34" charset="-120"/>
+              </a:rPr>
+              <a:t>繰り返し項目を排除</a:t>
+            </a:r>
+            <a:endParaRPr lang="en-US" sz="900" dirty="0"/>
+          </a:p>
+        </p:txBody>
+      </p:sp>
+      <p:sp>
+        <p:nvSpPr>
+          <p:cNvPr id="25" name="Text 23"/>
+          <p:cNvSpPr txBox="1"/>
+          <p:nvPr/>
+        </p:nvSpPr>
+        <p:spPr>
+          <a:xfrm>
+            <a:off x="7543800" y="2822448"/>
+            <a:ext cx="3703320" cy="201168"/>
+          </a:xfrm>
+          <a:prstGeom prst="rect">
+            <a:avLst/>
+          </a:prstGeom>
+          <a:noFill/>
+          <a:ln/>
+        </p:spPr>
+        <p:txBody>
+          <a:bodyPr wrap="square" lIns="0" tIns="0" rIns="0" bIns="0" rtlCol="0" anchor="ctr"/>
+          <a:lstStyle/>
+          <a:p>
+            <a:pPr algn="ctr" indent="0" marL="0">
+              <a:buNone/>
+            </a:pPr>
+            <a:r>
+              <a:rPr lang="en-US" sz="1300" dirty="0">
+                <a:solidFill>
+                  <a:srgbClr val="8A8A8A"/>
+                </a:solidFill>
+                <a:latin typeface="Yu Gothic" pitchFamily="34" charset="0"/>
+                <a:ea typeface="Yu Gothic" pitchFamily="34" charset="-122"/>
+                <a:cs typeface="Yu Gothic" pitchFamily="34" charset="-120"/>
+              </a:rPr>
+              <a:t>↓</a:t>
+            </a:r>
+            <a:endParaRPr lang="en-US" sz="1300" dirty="0"/>
+          </a:p>
+        </p:txBody>
+      </p:sp>
+      <p:sp>
+        <p:nvSpPr>
+          <p:cNvPr id="26" name="Shape 24"/>
+          <p:cNvSpPr/>
+          <p:nvPr/>
+        </p:nvSpPr>
+        <p:spPr>
+          <a:xfrm>
+            <a:off x="7543800" y="3023616"/>
+            <a:ext cx="3703320" cy="1085088"/>
+          </a:xfrm>
+          <a:prstGeom prst="rect">
+            <a:avLst/>
+          </a:prstGeom>
+          <a:solidFill>
+            <a:srgbClr val="F4F4F4"/>
+          </a:solidFill>
+          <a:ln w="12700">
+            <a:solidFill>
+              <a:srgbClr val="E6E6E6"/>
+            </a:solidFill>
+            <a:prstDash val="solid"/>
+          </a:ln>
+        </p:spPr>
+      </p:sp>
+      <p:sp>
+        <p:nvSpPr>
+          <p:cNvPr id="27" name="Text 25"/>
+          <p:cNvSpPr txBox="1"/>
+          <p:nvPr/>
+        </p:nvSpPr>
+        <p:spPr>
+          <a:xfrm>
+            <a:off x="7543800" y="3023616"/>
+            <a:ext cx="3703320" cy="1085088"/>
+          </a:xfrm>
+          <a:prstGeom prst="rect">
+            <a:avLst/>
+          </a:prstGeom>
+          <a:noFill/>
+          <a:ln/>
+        </p:spPr>
+        <p:txBody>
+          <a:bodyPr wrap="square" lIns="0" tIns="0" rIns="0" bIns="0" rtlCol="0" anchor="ctr"/>
+          <a:lstStyle/>
+          <a:p>
+            <a:pPr algn="ctr" indent="0" marL="0">
+              <a:lnSpc>
+                <a:spcPct val="115000"/>
+              </a:lnSpc>
+              <a:buNone/>
+            </a:pPr>
+            <a:r>
+              <a:rPr lang="en-US" sz="900" b="1" dirty="0">
+                <a:solidFill>
+                  <a:srgbClr val="FF3B1F"/>
+                </a:solidFill>
+                <a:latin typeface="Consolas" pitchFamily="34" charset="0"/>
+                <a:ea typeface="Consolas" pitchFamily="34" charset="-122"/>
+                <a:cs typeface="Consolas" pitchFamily="34" charset="-120"/>
+              </a:rPr>
+              <a:t>2NF
+</a:t>
+            </a:r>
+            <a:endParaRPr lang="en-US" sz="900" dirty="0"/>
+          </a:p>
+          <a:p>
+            <a:pPr algn="ctr" indent="0" marL="0">
+              <a:lnSpc>
+                <a:spcPct val="115000"/>
+              </a:lnSpc>
+              <a:buNone/>
+            </a:pPr>
+            <a:r>
+              <a:rPr lang="en-US" sz="1600" b="1" dirty="0">
+                <a:solidFill>
+                  <a:srgbClr val="171717"/>
+                </a:solidFill>
+                <a:latin typeface="Yu Gothic" pitchFamily="34" charset="0"/>
+                <a:ea typeface="Yu Gothic" pitchFamily="34" charset="-122"/>
+                <a:cs typeface="Yu Gothic" pitchFamily="34" charset="-120"/>
+              </a:rPr>
+              <a:t>第2正規形</a:t>
+            </a:r>
+            <a:pPr algn="ctr" indent="0" marL="0">
+              <a:lnSpc>
+                <a:spcPct val="115000"/>
+              </a:lnSpc>
+              <a:buNone/>
+            </a:pPr>
+            <a:endParaRPr lang="en-US" sz="900" dirty="0"/>
+          </a:p>
+          <a:p>
+            <a:pPr algn="ctr" indent="0" marL="0">
+              <a:lnSpc>
+                <a:spcPct val="115000"/>
+              </a:lnSpc>
+              <a:buNone/>
+            </a:pPr>
+            <a:r>
+              <a:rPr lang="en-US" sz="1000" b="1" dirty="0">
+                <a:solidFill>
+                  <a:srgbClr val="FF3B1F"/>
+                </a:solidFill>
+                <a:latin typeface="Yu Gothic" pitchFamily="34" charset="0"/>
+                <a:ea typeface="Yu Gothic" pitchFamily="34" charset="-122"/>
+                <a:cs typeface="Yu Gothic" pitchFamily="34" charset="-120"/>
+              </a:rPr>
+              <a:t>部分関数従属を排除</a:t>
+            </a:r>
+            <a:endParaRPr lang="en-US" sz="900" dirty="0"/>
+          </a:p>
+        </p:txBody>
+      </p:sp>
+      <p:sp>
+        <p:nvSpPr>
+          <p:cNvPr id="28" name="Text 26"/>
+          <p:cNvSpPr txBox="1"/>
+          <p:nvPr/>
+        </p:nvSpPr>
+        <p:spPr>
+          <a:xfrm>
+            <a:off x="7543800" y="4108704"/>
+            <a:ext cx="3703320" cy="201168"/>
+          </a:xfrm>
+          <a:prstGeom prst="rect">
+            <a:avLst/>
+          </a:prstGeom>
+          <a:noFill/>
+          <a:ln/>
+        </p:spPr>
+        <p:txBody>
+          <a:bodyPr wrap="square" lIns="0" tIns="0" rIns="0" bIns="0" rtlCol="0" anchor="ctr"/>
+          <a:lstStyle/>
+          <a:p>
+            <a:pPr algn="ctr" indent="0" marL="0">
+              <a:buNone/>
+            </a:pPr>
+            <a:r>
+              <a:rPr lang="en-US" sz="1300" dirty="0">
+                <a:solidFill>
+                  <a:srgbClr val="8A8A8A"/>
+                </a:solidFill>
+                <a:latin typeface="Yu Gothic" pitchFamily="34" charset="0"/>
+                <a:ea typeface="Yu Gothic" pitchFamily="34" charset="-122"/>
+                <a:cs typeface="Yu Gothic" pitchFamily="34" charset="-120"/>
+              </a:rPr>
+              <a:t>↓</a:t>
+            </a:r>
+            <a:endParaRPr lang="en-US" sz="1300" dirty="0"/>
+          </a:p>
+        </p:txBody>
+      </p:sp>
+      <p:sp>
+        <p:nvSpPr>
+          <p:cNvPr id="29" name="Shape 27"/>
+          <p:cNvSpPr/>
+          <p:nvPr/>
+        </p:nvSpPr>
+        <p:spPr>
+          <a:xfrm>
+            <a:off x="7543800" y="4309872"/>
+            <a:ext cx="3703320" cy="1085088"/>
+          </a:xfrm>
+          <a:prstGeom prst="rect">
+            <a:avLst/>
+          </a:prstGeom>
+          <a:solidFill>
+            <a:srgbClr val="F4F4F4"/>
+          </a:solidFill>
+          <a:ln w="12700">
+            <a:solidFill>
+              <a:srgbClr val="E6E6E6"/>
+            </a:solidFill>
+            <a:prstDash val="solid"/>
+          </a:ln>
+        </p:spPr>
+      </p:sp>
+      <p:sp>
+        <p:nvSpPr>
+          <p:cNvPr id="30" name="Text 28"/>
+          <p:cNvSpPr txBox="1"/>
+          <p:nvPr/>
+        </p:nvSpPr>
+        <p:spPr>
+          <a:xfrm>
+            <a:off x="7543800" y="4309872"/>
+            <a:ext cx="3703320" cy="1085088"/>
+          </a:xfrm>
+          <a:prstGeom prst="rect">
+            <a:avLst/>
+          </a:prstGeom>
+          <a:noFill/>
+          <a:ln/>
+        </p:spPr>
+        <p:txBody>
+          <a:bodyPr wrap="square" lIns="0" tIns="0" rIns="0" bIns="0" rtlCol="0" anchor="ctr"/>
+          <a:lstStyle/>
+          <a:p>
+            <a:pPr algn="ctr" indent="0" marL="0">
+              <a:lnSpc>
+                <a:spcPct val="115000"/>
+              </a:lnSpc>
+              <a:buNone/>
+            </a:pPr>
+            <a:r>
+              <a:rPr lang="en-US" sz="900" b="1" dirty="0">
+                <a:solidFill>
+                  <a:srgbClr val="FF3B1F"/>
+                </a:solidFill>
+                <a:latin typeface="Consolas" pitchFamily="34" charset="0"/>
+                <a:ea typeface="Consolas" pitchFamily="34" charset="-122"/>
+                <a:cs typeface="Consolas" pitchFamily="34" charset="-120"/>
+              </a:rPr>
+              <a:t>3NF
+</a:t>
+            </a:r>
+            <a:endParaRPr lang="en-US" sz="900" dirty="0"/>
+          </a:p>
+          <a:p>
+            <a:pPr algn="ctr" indent="0" marL="0">
+              <a:lnSpc>
+                <a:spcPct val="115000"/>
+              </a:lnSpc>
+              <a:buNone/>
+            </a:pPr>
+            <a:r>
+              <a:rPr lang="en-US" sz="1600" b="1" dirty="0">
+                <a:solidFill>
+                  <a:srgbClr val="171717"/>
+                </a:solidFill>
+                <a:latin typeface="Yu Gothic" pitchFamily="34" charset="0"/>
+                <a:ea typeface="Yu Gothic" pitchFamily="34" charset="-122"/>
+                <a:cs typeface="Yu Gothic" pitchFamily="34" charset="-120"/>
+              </a:rPr>
+              <a:t>第3正規形</a:t>
+            </a:r>
+            <a:pPr algn="ctr" indent="0" marL="0">
+              <a:lnSpc>
+                <a:spcPct val="115000"/>
+              </a:lnSpc>
+              <a:buNone/>
+            </a:pPr>
+            <a:endParaRPr lang="en-US" sz="900" dirty="0"/>
+          </a:p>
+          <a:p>
+            <a:pPr algn="ctr" indent="0" marL="0">
+              <a:lnSpc>
+                <a:spcPct val="115000"/>
+              </a:lnSpc>
+              <a:buNone/>
+            </a:pPr>
+            <a:r>
+              <a:rPr lang="en-US" sz="1000" b="1" dirty="0">
+                <a:solidFill>
+                  <a:srgbClr val="FF3B1F"/>
+                </a:solidFill>
+                <a:latin typeface="Yu Gothic" pitchFamily="34" charset="0"/>
+                <a:ea typeface="Yu Gothic" pitchFamily="34" charset="-122"/>
+                <a:cs typeface="Yu Gothic" pitchFamily="34" charset="-120"/>
+              </a:rPr>
+              <a:t>推移的関数従属を排除</a:t>
+            </a:r>
+            <a:endParaRPr lang="en-US" sz="900" dirty="0"/>
+          </a:p>
+        </p:txBody>
+      </p:sp>
+      <p:sp>
+        <p:nvSpPr>
+          <p:cNvPr id="31" name="Shape 29"/>
           <p:cNvSpPr/>
           <p:nvPr/>
         </p:nvSpPr>
@@ -6976,7 +7438,7 @@
       </p:sp>
       <p:sp>
         <p:nvSpPr>
-          <p:cNvPr id="23" name="Shape 21"/>
+          <p:cNvPr id="32" name="Shape 30"/>
           <p:cNvSpPr/>
           <p:nvPr/>
         </p:nvSpPr>
@@ -6996,7 +7458,7 @@
       </p:sp>
       <p:sp>
         <p:nvSpPr>
-          <p:cNvPr id="24" name="Text 22"/>
+          <p:cNvPr id="33" name="Text 31"/>
           <p:cNvSpPr txBox="1"/>
           <p:nvPr/>
         </p:nvSpPr>
@@ -7035,7 +7497,7 @@
       </p:sp>
       <p:sp>
         <p:nvSpPr>
-          <p:cNvPr id="25" name="Text 23"/>
+          <p:cNvPr id="34" name="Text 32"/>
           <p:cNvSpPr txBox="1"/>
           <p:nvPr/>
         </p:nvSpPr>
@@ -7074,7 +7536,7 @@
       </p:sp>
       <p:sp>
         <p:nvSpPr>
-          <p:cNvPr id="26" name="Shape 24"/>
+          <p:cNvPr id="35" name="Shape 33"/>
           <p:cNvSpPr/>
           <p:nvPr/>
         </p:nvSpPr>
@@ -7097,7 +7559,7 @@
       </p:sp>
       <p:sp>
         <p:nvSpPr>
-          <p:cNvPr id="27" name="Text 25"/>
+          <p:cNvPr id="36" name="Text 34"/>
           <p:cNvSpPr txBox="1"/>
           <p:nvPr/>
         </p:nvSpPr>
@@ -7136,7 +7598,7 @@
       </p:sp>
       <p:sp>
         <p:nvSpPr>
-          <p:cNvPr id="28" name="Text 26"/>
+          <p:cNvPr id="37" name="Text 35"/>
           <p:cNvSpPr txBox="1"/>
           <p:nvPr/>
         </p:nvSpPr>
@@ -7175,7 +7637,7 @@
       </p:sp>
       <p:sp>
         <p:nvSpPr>
-          <p:cNvPr id="29" name="Shape 27"/>
+          <p:cNvPr id="38" name="Shape 36"/>
           <p:cNvSpPr/>
           <p:nvPr/>
         </p:nvSpPr>
@@ -7200,7 +7662,7 @@
       </p:sp>
       <p:sp>
         <p:nvSpPr>
-          <p:cNvPr id="30" name="Text 28"/>
+          <p:cNvPr id="39" name="Text 37"/>
           <p:cNvSpPr txBox="1"/>
           <p:nvPr/>
         </p:nvSpPr>
@@ -7239,7 +7701,7 @@
       </p:sp>
       <p:sp>
         <p:nvSpPr>
-          <p:cNvPr id="31" name="Shape 29"/>
+          <p:cNvPr id="40" name="Shape 38"/>
           <p:cNvSpPr/>
           <p:nvPr/>
         </p:nvSpPr>
@@ -7264,7 +7726,7 @@
       </p:sp>
       <p:sp>
         <p:nvSpPr>
-          <p:cNvPr id="32" name="Text 30"/>
+          <p:cNvPr id="41" name="Text 39"/>
           <p:cNvSpPr txBox="1"/>
           <p:nvPr/>
         </p:nvSpPr>
@@ -7303,7 +7765,7 @@
       </p:sp>
       <p:sp>
         <p:nvSpPr>
-          <p:cNvPr id="33" name="Shape 31"/>
+          <p:cNvPr id="42" name="Shape 40"/>
           <p:cNvSpPr/>
           <p:nvPr/>
         </p:nvSpPr>
@@ -7328,7 +7790,7 @@
       </p:sp>
       <p:sp>
         <p:nvSpPr>
-          <p:cNvPr id="34" name="Text 32"/>
+          <p:cNvPr id="43" name="Text 41"/>
           <p:cNvSpPr txBox="1"/>
           <p:nvPr/>
         </p:nvSpPr>
@@ -7367,7 +7829,7 @@
       </p:sp>
       <p:sp>
         <p:nvSpPr>
-          <p:cNvPr id="35" name="Shape 33"/>
+          <p:cNvPr id="44" name="Shape 42"/>
           <p:cNvSpPr/>
           <p:nvPr/>
         </p:nvSpPr>
@@ -7392,7 +7854,7 @@
       </p:sp>
       <p:sp>
         <p:nvSpPr>
-          <p:cNvPr id="36" name="Text 34"/>
+          <p:cNvPr id="45" name="Text 43"/>
           <p:cNvSpPr txBox="1"/>
           <p:nvPr/>
         </p:nvSpPr>
@@ -7431,7 +7893,7 @@
       </p:sp>
       <p:sp>
         <p:nvSpPr>
-          <p:cNvPr id="37" name="Shape 35"/>
+          <p:cNvPr id="46" name="Shape 44"/>
           <p:cNvSpPr/>
           <p:nvPr/>
         </p:nvSpPr>
@@ -7456,7 +7918,7 @@
       </p:sp>
       <p:sp>
         <p:nvSpPr>
-          <p:cNvPr id="38" name="Text 36"/>
+          <p:cNvPr id="47" name="Text 45"/>
           <p:cNvSpPr txBox="1"/>
           <p:nvPr/>
         </p:nvSpPr>
@@ -7495,7 +7957,7 @@
       </p:sp>
       <p:sp>
         <p:nvSpPr>
-          <p:cNvPr id="39" name="Shape 37"/>
+          <p:cNvPr id="48" name="Shape 46"/>
           <p:cNvSpPr/>
           <p:nvPr/>
         </p:nvSpPr>
@@ -7520,7 +7982,7 @@
       </p:sp>
       <p:sp>
         <p:nvSpPr>
-          <p:cNvPr id="40" name="Text 38"/>
+          <p:cNvPr id="49" name="Text 47"/>
           <p:cNvSpPr txBox="1"/>
           <p:nvPr/>
         </p:nvSpPr>
@@ -7559,7 +8021,7 @@
       </p:sp>
       <p:sp>
         <p:nvSpPr>
-          <p:cNvPr id="41" name="Shape 39"/>
+          <p:cNvPr id="50" name="Shape 48"/>
           <p:cNvSpPr/>
           <p:nvPr/>
         </p:nvSpPr>
@@ -7584,7 +8046,7 @@
       </p:sp>
       <p:sp>
         <p:nvSpPr>
-          <p:cNvPr id="42" name="Text 40"/>
+          <p:cNvPr id="51" name="Text 49"/>
           <p:cNvSpPr txBox="1"/>
           <p:nvPr/>
         </p:nvSpPr>
@@ -7623,7 +8085,7 @@
       </p:sp>
       <p:sp>
         <p:nvSpPr>
-          <p:cNvPr id="43" name="Shape 41"/>
+          <p:cNvPr id="52" name="Shape 50"/>
           <p:cNvSpPr/>
           <p:nvPr/>
         </p:nvSpPr>
@@ -7648,7 +8110,7 @@
       </p:sp>
       <p:sp>
         <p:nvSpPr>
-          <p:cNvPr id="44" name="Text 42"/>
+          <p:cNvPr id="53" name="Text 51"/>
           <p:cNvSpPr txBox="1"/>
           <p:nvPr/>
         </p:nvSpPr>
@@ -7687,7 +8149,7 @@
       </p:sp>
       <p:sp>
         <p:nvSpPr>
-          <p:cNvPr id="45" name="Shape 43"/>
+          <p:cNvPr id="54" name="Shape 52"/>
           <p:cNvSpPr/>
           <p:nvPr/>
         </p:nvSpPr>
@@ -7712,7 +8174,7 @@
       </p:sp>
       <p:sp>
         <p:nvSpPr>
-          <p:cNvPr id="46" name="Text 44"/>
+          <p:cNvPr id="55" name="Text 53"/>
           <p:cNvSpPr txBox="1"/>
           <p:nvPr/>
         </p:nvSpPr>
@@ -7751,7 +8213,7 @@
       </p:sp>
       <p:sp>
         <p:nvSpPr>
-          <p:cNvPr id="47" name="Shape 45"/>
+          <p:cNvPr id="56" name="Shape 54"/>
           <p:cNvSpPr/>
           <p:nvPr/>
         </p:nvSpPr>
@@ -7776,7 +8238,7 @@
       </p:sp>
       <p:sp>
         <p:nvSpPr>
-          <p:cNvPr id="48" name="Text 46"/>
+          <p:cNvPr id="57" name="Text 55"/>
           <p:cNvSpPr txBox="1"/>
           <p:nvPr/>
         </p:nvSpPr>
@@ -22280,6 +22742,48 @@
         <p:spPr>
           <a:xfrm>
             <a:off x="502920" y="1691640"/>
+            <a:ext cx="6766560" cy="777240"/>
+          </a:xfrm>
+          <a:prstGeom prst="rect">
+            <a:avLst/>
+          </a:prstGeom>
+          <a:noFill/>
+          <a:ln/>
+        </p:spPr>
+        <p:txBody>
+          <a:bodyPr wrap="square" lIns="0" tIns="0" rIns="0" bIns="0" rtlCol="0" anchor="ctr"/>
+          <a:lstStyle/>
+          <a:p>
+            <a:pPr indent="0" marL="0">
+              <a:lnSpc>
+                <a:spcPct val="130000"/>
+              </a:lnSpc>
+              <a:buNone/>
+            </a:pPr>
+            <a:r>
+              <a:rPr lang="en-US" sz="1050" dirty="0">
+                <a:solidFill>
+                  <a:srgbClr val="8A8A8A"/>
+                </a:solidFill>
+                <a:latin typeface="Yu Gothic" pitchFamily="34" charset="0"/>
+                <a:ea typeface="Yu Gothic" pitchFamily="34" charset="-122"/>
+                <a:cs typeface="Yu Gothic" pitchFamily="34" charset="-120"/>
+              </a:rPr>
+              <a:t>ウォーターフォール型は工程を上流から下流へ一方向に進める開発手法。右図のとおり各設計工程と対応するテスト工程を線でつなぐとV字の形になることから、この対応関係をV字モデルと呼ぶ。</a:t>
+            </a:r>
+            <a:endParaRPr lang="en-US" sz="1050" dirty="0"/>
+          </a:p>
+        </p:txBody>
+      </p:sp>
+      <p:sp>
+        <p:nvSpPr>
+          <p:cNvPr id="9" name="Text 7"/>
+          <p:cNvSpPr txBox="1"/>
+          <p:nvPr/>
+        </p:nvSpPr>
+        <p:spPr>
+          <a:xfrm>
+            <a:off x="502920" y="2560320"/>
             <a:ext cx="1828800" cy="365760"/>
           </a:xfrm>
           <a:prstGeom prst="rect">
@@ -22296,7 +22800,7 @@
               <a:buNone/>
             </a:pPr>
             <a:r>
-              <a:rPr lang="en-US" sz="1100" b="1" dirty="0">
+              <a:rPr lang="en-US" sz="1000" b="1" dirty="0">
                 <a:solidFill>
                   <a:srgbClr val="171717"/>
                 </a:solidFill>
@@ -22306,19 +22810,19 @@
               </a:rPr>
               <a:t>工程の流れ</a:t>
             </a:r>
-            <a:endParaRPr lang="en-US" sz="1100" dirty="0"/>
-          </a:p>
-        </p:txBody>
-      </p:sp>
-      <p:sp>
-        <p:nvSpPr>
-          <p:cNvPr id="9" name="Shape 7"/>
+            <a:endParaRPr lang="en-US" sz="1000" dirty="0"/>
+          </a:p>
+        </p:txBody>
+      </p:sp>
+      <p:sp>
+        <p:nvSpPr>
+          <p:cNvPr id="10" name="Shape 8"/>
           <p:cNvSpPr/>
           <p:nvPr/>
         </p:nvSpPr>
         <p:spPr>
           <a:xfrm>
-            <a:off x="2313432" y="1691640"/>
+            <a:off x="2313432" y="2560320"/>
             <a:ext cx="0" cy="256032"/>
           </a:xfrm>
           <a:prstGeom prst="line">
@@ -22335,14 +22839,14 @@
       </p:sp>
       <p:sp>
         <p:nvSpPr>
-          <p:cNvPr id="10" name="Text 8"/>
-          <p:cNvSpPr txBox="1"/>
-          <p:nvPr/>
-        </p:nvSpPr>
-        <p:spPr>
-          <a:xfrm>
-            <a:off x="2468880" y="1691640"/>
-            <a:ext cx="9235440" cy="365760"/>
+          <p:cNvPr id="11" name="Text 9"/>
+          <p:cNvSpPr txBox="1"/>
+          <p:nvPr/>
+        </p:nvSpPr>
+        <p:spPr>
+          <a:xfrm>
+            <a:off x="2468880" y="2560320"/>
+            <a:ext cx="4800600" cy="365760"/>
           </a:xfrm>
           <a:prstGeom prst="rect">
             <a:avLst/>
@@ -22358,7 +22862,7 @@
               <a:buNone/>
             </a:pPr>
             <a:r>
-              <a:rPr lang="en-US" sz="1100" dirty="0">
+              <a:rPr lang="en-US" sz="1000" dirty="0">
                 <a:solidFill>
                   <a:srgbClr val="8A8A8A"/>
                 </a:solidFill>
@@ -22368,19 +22872,19 @@
               </a:rPr>
               <a:t>要件定義→外部設計→内部設計→プログラミング→テスト→運用保守</a:t>
             </a:r>
-            <a:endParaRPr lang="en-US" sz="1100" dirty="0"/>
-          </a:p>
-        </p:txBody>
-      </p:sp>
-      <p:sp>
-        <p:nvSpPr>
-          <p:cNvPr id="11" name="Text 9"/>
-          <p:cNvSpPr txBox="1"/>
-          <p:nvPr/>
-        </p:nvSpPr>
-        <p:spPr>
-          <a:xfrm>
-            <a:off x="502920" y="2075688"/>
+            <a:endParaRPr lang="en-US" sz="1000" dirty="0"/>
+          </a:p>
+        </p:txBody>
+      </p:sp>
+      <p:sp>
+        <p:nvSpPr>
+          <p:cNvPr id="12" name="Text 10"/>
+          <p:cNvSpPr txBox="1"/>
+          <p:nvPr/>
+        </p:nvSpPr>
+        <p:spPr>
+          <a:xfrm>
+            <a:off x="502920" y="2944368"/>
             <a:ext cx="1828800" cy="365760"/>
           </a:xfrm>
           <a:prstGeom prst="rect">
@@ -22397,7 +22901,7 @@
               <a:buNone/>
             </a:pPr>
             <a:r>
-              <a:rPr lang="en-US" sz="1100" b="1" dirty="0">
+              <a:rPr lang="en-US" sz="1000" b="1" dirty="0">
                 <a:solidFill>
                   <a:srgbClr val="171717"/>
                 </a:solidFill>
@@ -22407,19 +22911,19 @@
               </a:rPr>
               <a:t>テストの順序</a:t>
             </a:r>
-            <a:endParaRPr lang="en-US" sz="1100" dirty="0"/>
-          </a:p>
-        </p:txBody>
-      </p:sp>
-      <p:sp>
-        <p:nvSpPr>
-          <p:cNvPr id="12" name="Shape 10"/>
+            <a:endParaRPr lang="en-US" sz="1000" dirty="0"/>
+          </a:p>
+        </p:txBody>
+      </p:sp>
+      <p:sp>
+        <p:nvSpPr>
+          <p:cNvPr id="13" name="Shape 11"/>
           <p:cNvSpPr/>
           <p:nvPr/>
         </p:nvSpPr>
         <p:spPr>
           <a:xfrm>
-            <a:off x="2313432" y="2075688"/>
+            <a:off x="2313432" y="2944368"/>
             <a:ext cx="0" cy="256032"/>
           </a:xfrm>
           <a:prstGeom prst="line">
@@ -22436,14 +22940,14 @@
       </p:sp>
       <p:sp>
         <p:nvSpPr>
-          <p:cNvPr id="13" name="Text 11"/>
-          <p:cNvSpPr txBox="1"/>
-          <p:nvPr/>
-        </p:nvSpPr>
-        <p:spPr>
-          <a:xfrm>
-            <a:off x="2468880" y="2075688"/>
-            <a:ext cx="9235440" cy="365760"/>
+          <p:cNvPr id="14" name="Text 12"/>
+          <p:cNvSpPr txBox="1"/>
+          <p:nvPr/>
+        </p:nvSpPr>
+        <p:spPr>
+          <a:xfrm>
+            <a:off x="2468880" y="2944368"/>
+            <a:ext cx="4800600" cy="365760"/>
           </a:xfrm>
           <a:prstGeom prst="rect">
             <a:avLst/>
@@ -22459,7 +22963,7 @@
               <a:buNone/>
             </a:pPr>
             <a:r>
-              <a:rPr lang="en-US" sz="1100" dirty="0">
+              <a:rPr lang="en-US" sz="1000" dirty="0">
                 <a:solidFill>
                   <a:srgbClr val="8A8A8A"/>
                 </a:solidFill>
@@ -22469,46 +22973,7 @@
               </a:rPr>
               <a:t>単体テスト→結合テスト→システムテスト→運用テスト</a:t>
             </a:r>
-            <a:endParaRPr lang="en-US" sz="1100" dirty="0"/>
-          </a:p>
-        </p:txBody>
-      </p:sp>
-      <p:sp>
-        <p:nvSpPr>
-          <p:cNvPr id="14" name="Text 12"/>
-          <p:cNvSpPr txBox="1"/>
-          <p:nvPr/>
-        </p:nvSpPr>
-        <p:spPr>
-          <a:xfrm>
-            <a:off x="502920" y="2459736"/>
-            <a:ext cx="1828800" cy="365760"/>
-          </a:xfrm>
-          <a:prstGeom prst="rect">
-            <a:avLst/>
-          </a:prstGeom>
-          <a:noFill/>
-          <a:ln/>
-        </p:spPr>
-        <p:txBody>
-          <a:bodyPr wrap="square" lIns="0" tIns="0" rIns="0" bIns="0" rtlCol="0" anchor="t"/>
-          <a:lstStyle/>
-          <a:p>
-            <a:pPr indent="0" marL="0">
-              <a:buNone/>
-            </a:pPr>
-            <a:r>
-              <a:rPr lang="en-US" sz="1100" b="1" dirty="0">
-                <a:solidFill>
-                  <a:srgbClr val="171717"/>
-                </a:solidFill>
-                <a:latin typeface="Yu Gothic" pitchFamily="34" charset="0"/>
-                <a:ea typeface="Yu Gothic" pitchFamily="34" charset="-122"/>
-                <a:cs typeface="Yu Gothic" pitchFamily="34" charset="-120"/>
-              </a:rPr>
-              <a:t>V字モデル</a:t>
-            </a:r>
-            <a:endParaRPr lang="en-US" sz="1100" dirty="0"/>
+            <a:endParaRPr lang="en-US" sz="1000" dirty="0"/>
           </a:p>
         </p:txBody>
       </p:sp>
@@ -22520,8 +22985,8 @@
         </p:nvSpPr>
         <p:spPr>
           <a:xfrm>
-            <a:off x="2313432" y="2459736"/>
-            <a:ext cx="0" cy="256032"/>
+            <a:off x="502920" y="3419856"/>
+            <a:ext cx="6766560" cy="0"/>
           </a:xfrm>
           <a:prstGeom prst="line">
             <a:avLst/>
@@ -22543,24 +23008,312 @@
         </p:nvSpPr>
         <p:spPr>
           <a:xfrm>
-            <a:off x="2468880" y="2459736"/>
-            <a:ext cx="9235440" cy="365760"/>
-          </a:xfrm>
-          <a:prstGeom prst="rect">
-            <a:avLst/>
-          </a:prstGeom>
-          <a:noFill/>
-          <a:ln/>
-        </p:spPr>
-        <p:txBody>
-          <a:bodyPr wrap="square" lIns="0" tIns="0" rIns="0" bIns="0" rtlCol="0" anchor="t"/>
-          <a:lstStyle/>
-          <a:p>
-            <a:pPr indent="0" marL="0">
-              <a:buNone/>
-            </a:pPr>
-            <a:r>
-              <a:rPr lang="en-US" sz="1100" dirty="0">
+            <a:off x="502920" y="3493008"/>
+            <a:ext cx="6766560" cy="548640"/>
+          </a:xfrm>
+          <a:prstGeom prst="rect">
+            <a:avLst/>
+          </a:prstGeom>
+          <a:noFill/>
+          <a:ln/>
+        </p:spPr>
+        <p:txBody>
+          <a:bodyPr wrap="square" lIns="0" tIns="0" rIns="0" bIns="0" rtlCol="0" anchor="ctr"/>
+          <a:lstStyle/>
+          <a:p>
+            <a:pPr indent="0" marL="0">
+              <a:lnSpc>
+                <a:spcPct val="120000"/>
+              </a:lnSpc>
+              <a:buNone/>
+            </a:pPr>
+            <a:r>
+              <a:rPr lang="en-US" sz="950" b="1" dirty="0">
+                <a:solidFill>
+                  <a:srgbClr val="FF3B1F"/>
+                </a:solidFill>
+                <a:latin typeface="Yu Gothic" pitchFamily="34" charset="0"/>
+                <a:ea typeface="Yu Gothic" pitchFamily="34" charset="-122"/>
+                <a:cs typeface="Yu Gothic" pitchFamily="34" charset="-120"/>
+              </a:rPr>
+              <a:t>ひっかけ：</a:t>
+            </a:r>
+            <a:pPr indent="0" marL="0">
+              <a:lnSpc>
+                <a:spcPct val="120000"/>
+              </a:lnSpc>
+              <a:buNone/>
+            </a:pPr>
+            <a:r>
+              <a:rPr lang="en-US" sz="950" dirty="0">
+                <a:solidFill>
+                  <a:srgbClr val="FF3B1F"/>
+                </a:solidFill>
+                <a:latin typeface="Yu Gothic" pitchFamily="34" charset="0"/>
+                <a:ea typeface="Yu Gothic" pitchFamily="34" charset="-122"/>
+                <a:cs typeface="Yu Gothic" pitchFamily="34" charset="-120"/>
+              </a:rPr>
+              <a:t>「要件変更に柔軟」は誤り。手戻りコストが大きく変更には弱い（柔軟なのはF-17のアジャイル型）。テスト順序の入れ替えにも注意。</a:t>
+            </a:r>
+            <a:endParaRPr lang="en-US" sz="950" dirty="0"/>
+          </a:p>
+        </p:txBody>
+      </p:sp>
+      <p:sp>
+        <p:nvSpPr>
+          <p:cNvPr id="17" name="Text 15"/>
+          <p:cNvSpPr txBox="1"/>
+          <p:nvPr/>
+        </p:nvSpPr>
+        <p:spPr>
+          <a:xfrm>
+            <a:off x="7543800" y="1417320"/>
+            <a:ext cx="1691640" cy="274320"/>
+          </a:xfrm>
+          <a:prstGeom prst="rect">
+            <a:avLst/>
+          </a:prstGeom>
+          <a:noFill/>
+          <a:ln/>
+        </p:spPr>
+        <p:txBody>
+          <a:bodyPr wrap="square" lIns="0" tIns="0" rIns="0" bIns="0" rtlCol="0" anchor="ctr"/>
+          <a:lstStyle/>
+          <a:p>
+            <a:pPr algn="ctr" indent="0" marL="0">
+              <a:buNone/>
+            </a:pPr>
+            <a:r>
+              <a:rPr lang="en-US" sz="900" b="1" dirty="0">
+                <a:solidFill>
+                  <a:srgbClr val="171717"/>
+                </a:solidFill>
+                <a:latin typeface="Yu Gothic" pitchFamily="34" charset="0"/>
+                <a:ea typeface="Yu Gothic" pitchFamily="34" charset="-122"/>
+                <a:cs typeface="Yu Gothic" pitchFamily="34" charset="-120"/>
+              </a:rPr>
+              <a:t>設計工程</a:t>
+            </a:r>
+            <a:endParaRPr lang="en-US" sz="900" dirty="0"/>
+          </a:p>
+        </p:txBody>
+      </p:sp>
+      <p:sp>
+        <p:nvSpPr>
+          <p:cNvPr id="18" name="Text 16"/>
+          <p:cNvSpPr txBox="1"/>
+          <p:nvPr/>
+        </p:nvSpPr>
+        <p:spPr>
+          <a:xfrm>
+            <a:off x="9555480" y="1417320"/>
+            <a:ext cx="1691640" cy="274320"/>
+          </a:xfrm>
+          <a:prstGeom prst="rect">
+            <a:avLst/>
+          </a:prstGeom>
+          <a:noFill/>
+          <a:ln/>
+        </p:spPr>
+        <p:txBody>
+          <a:bodyPr wrap="square" lIns="0" tIns="0" rIns="0" bIns="0" rtlCol="0" anchor="ctr"/>
+          <a:lstStyle/>
+          <a:p>
+            <a:pPr algn="ctr" indent="0" marL="0">
+              <a:buNone/>
+            </a:pPr>
+            <a:r>
+              <a:rPr lang="en-US" sz="900" b="1" dirty="0">
+                <a:solidFill>
+                  <a:srgbClr val="171717"/>
+                </a:solidFill>
+                <a:latin typeface="Yu Gothic" pitchFamily="34" charset="0"/>
+                <a:ea typeface="Yu Gothic" pitchFamily="34" charset="-122"/>
+                <a:cs typeface="Yu Gothic" pitchFamily="34" charset="-120"/>
+              </a:rPr>
+              <a:t>テスト工程</a:t>
+            </a:r>
+            <a:endParaRPr lang="en-US" sz="900" dirty="0"/>
+          </a:p>
+        </p:txBody>
+      </p:sp>
+      <p:sp>
+        <p:nvSpPr>
+          <p:cNvPr id="19" name="Shape 17"/>
+          <p:cNvSpPr/>
+          <p:nvPr/>
+        </p:nvSpPr>
+        <p:spPr>
+          <a:xfrm>
+            <a:off x="7543800" y="1737360"/>
+            <a:ext cx="1691640" cy="685800"/>
+          </a:xfrm>
+          <a:prstGeom prst="rect">
+            <a:avLst/>
+          </a:prstGeom>
+          <a:solidFill>
+            <a:srgbClr val="F4F4F4"/>
+          </a:solidFill>
+          <a:ln w="12700">
+            <a:solidFill>
+              <a:srgbClr val="171717"/>
+            </a:solidFill>
+            <a:prstDash val="solid"/>
+          </a:ln>
+        </p:spPr>
+      </p:sp>
+      <p:sp>
+        <p:nvSpPr>
+          <p:cNvPr id="20" name="Text 18"/>
+          <p:cNvSpPr txBox="1"/>
+          <p:nvPr/>
+        </p:nvSpPr>
+        <p:spPr>
+          <a:xfrm>
+            <a:off x="7589520" y="1737360"/>
+            <a:ext cx="1600200" cy="685800"/>
+          </a:xfrm>
+          <a:prstGeom prst="rect">
+            <a:avLst/>
+          </a:prstGeom>
+          <a:noFill/>
+          <a:ln/>
+        </p:spPr>
+        <p:txBody>
+          <a:bodyPr wrap="square" lIns="0" tIns="0" rIns="0" bIns="0" rtlCol="0" anchor="ctr"/>
+          <a:lstStyle/>
+          <a:p>
+            <a:pPr algn="ctr" indent="0" marL="0">
+              <a:buNone/>
+            </a:pPr>
+            <a:r>
+              <a:rPr lang="en-US" sz="950" b="1" dirty="0">
+                <a:solidFill>
+                  <a:srgbClr val="171717"/>
+                </a:solidFill>
+                <a:latin typeface="Yu Gothic" pitchFamily="34" charset="0"/>
+                <a:ea typeface="Yu Gothic" pitchFamily="34" charset="-122"/>
+                <a:cs typeface="Yu Gothic" pitchFamily="34" charset="-120"/>
+              </a:rPr>
+              <a:t>要件定義</a:t>
+            </a:r>
+            <a:endParaRPr lang="en-US" sz="950" dirty="0"/>
+          </a:p>
+        </p:txBody>
+      </p:sp>
+      <p:sp>
+        <p:nvSpPr>
+          <p:cNvPr id="21" name="Shape 19"/>
+          <p:cNvSpPr/>
+          <p:nvPr/>
+        </p:nvSpPr>
+        <p:spPr>
+          <a:xfrm>
+            <a:off x="9555480" y="1737360"/>
+            <a:ext cx="1691640" cy="685800"/>
+          </a:xfrm>
+          <a:prstGeom prst="rect">
+            <a:avLst/>
+          </a:prstGeom>
+          <a:solidFill>
+            <a:srgbClr val="F4F4F4"/>
+          </a:solidFill>
+          <a:ln w="12700">
+            <a:solidFill>
+              <a:srgbClr val="171717"/>
+            </a:solidFill>
+            <a:prstDash val="solid"/>
+          </a:ln>
+        </p:spPr>
+      </p:sp>
+      <p:sp>
+        <p:nvSpPr>
+          <p:cNvPr id="22" name="Text 20"/>
+          <p:cNvSpPr txBox="1"/>
+          <p:nvPr/>
+        </p:nvSpPr>
+        <p:spPr>
+          <a:xfrm>
+            <a:off x="9601200" y="1737360"/>
+            <a:ext cx="1600200" cy="685800"/>
+          </a:xfrm>
+          <a:prstGeom prst="rect">
+            <a:avLst/>
+          </a:prstGeom>
+          <a:noFill/>
+          <a:ln/>
+        </p:spPr>
+        <p:txBody>
+          <a:bodyPr wrap="square" lIns="0" tIns="0" rIns="0" bIns="0" rtlCol="0" anchor="ctr"/>
+          <a:lstStyle/>
+          <a:p>
+            <a:pPr algn="ctr" indent="0" marL="0">
+              <a:buNone/>
+            </a:pPr>
+            <a:r>
+              <a:rPr lang="en-US" sz="950" b="1" dirty="0">
+                <a:solidFill>
+                  <a:srgbClr val="171717"/>
+                </a:solidFill>
+                <a:latin typeface="Yu Gothic" pitchFamily="34" charset="0"/>
+                <a:ea typeface="Yu Gothic" pitchFamily="34" charset="-122"/>
+                <a:cs typeface="Yu Gothic" pitchFamily="34" charset="-120"/>
+              </a:rPr>
+              <a:t>運用テスト</a:t>
+            </a:r>
+            <a:endParaRPr lang="en-US" sz="950" dirty="0"/>
+          </a:p>
+        </p:txBody>
+      </p:sp>
+      <p:sp>
+        <p:nvSpPr>
+          <p:cNvPr id="23" name="Shape 21"/>
+          <p:cNvSpPr/>
+          <p:nvPr/>
+        </p:nvSpPr>
+        <p:spPr>
+          <a:xfrm>
+            <a:off x="9235440" y="2080260"/>
+            <a:ext cx="320040" cy="0"/>
+          </a:xfrm>
+          <a:prstGeom prst="line">
+            <a:avLst/>
+          </a:prstGeom>
+          <a:noFill/>
+          <a:ln w="12700">
+            <a:solidFill>
+              <a:srgbClr val="8A8A8A"/>
+            </a:solidFill>
+            <a:prstDash val="dash"/>
+          </a:ln>
+        </p:spPr>
+      </p:sp>
+      <p:sp>
+        <p:nvSpPr>
+          <p:cNvPr id="24" name="Text 22"/>
+          <p:cNvSpPr txBox="1"/>
+          <p:nvPr/>
+        </p:nvSpPr>
+        <p:spPr>
+          <a:xfrm>
+            <a:off x="7543800" y="2395728"/>
+            <a:ext cx="1691640" cy="237744"/>
+          </a:xfrm>
+          <a:prstGeom prst="rect">
+            <a:avLst/>
+          </a:prstGeom>
+          <a:noFill/>
+          <a:ln/>
+        </p:spPr>
+        <p:txBody>
+          <a:bodyPr wrap="square" lIns="0" tIns="0" rIns="0" bIns="0" rtlCol="0" anchor="ctr"/>
+          <a:lstStyle/>
+          <a:p>
+            <a:pPr algn="ctr" indent="0" marL="0">
+              <a:buNone/>
+            </a:pPr>
+            <a:r>
+              <a:rPr lang="en-US" sz="1000" dirty="0">
                 <a:solidFill>
                   <a:srgbClr val="8A8A8A"/>
                 </a:solidFill>
@@ -22568,22 +23321,820 @@
                 <a:ea typeface="Yu Gothic" pitchFamily="34" charset="-122"/>
                 <a:cs typeface="Yu Gothic" pitchFamily="34" charset="-120"/>
               </a:rPr>
-              <a:t>要件定義⇔運用テスト、外部設計⇔システムテスト等の対応関係</a:t>
-            </a:r>
-            <a:endParaRPr lang="en-US" sz="1100" dirty="0"/>
-          </a:p>
-        </p:txBody>
-      </p:sp>
-      <p:sp>
-        <p:nvSpPr>
-          <p:cNvPr id="17" name="Shape 15"/>
+              <a:t>↓</a:t>
+            </a:r>
+            <a:endParaRPr lang="en-US" sz="1000" dirty="0"/>
+          </a:p>
+        </p:txBody>
+      </p:sp>
+      <p:sp>
+        <p:nvSpPr>
+          <p:cNvPr id="25" name="Text 23"/>
+          <p:cNvSpPr txBox="1"/>
+          <p:nvPr/>
+        </p:nvSpPr>
+        <p:spPr>
+          <a:xfrm>
+            <a:off x="9555480" y="2395728"/>
+            <a:ext cx="1691640" cy="237744"/>
+          </a:xfrm>
+          <a:prstGeom prst="rect">
+            <a:avLst/>
+          </a:prstGeom>
+          <a:noFill/>
+          <a:ln/>
+        </p:spPr>
+        <p:txBody>
+          <a:bodyPr wrap="square" lIns="0" tIns="0" rIns="0" bIns="0" rtlCol="0" anchor="ctr"/>
+          <a:lstStyle/>
+          <a:p>
+            <a:pPr algn="ctr" indent="0" marL="0">
+              <a:buNone/>
+            </a:pPr>
+            <a:r>
+              <a:rPr lang="en-US" sz="1000" dirty="0">
+                <a:solidFill>
+                  <a:srgbClr val="8A8A8A"/>
+                </a:solidFill>
+                <a:latin typeface="Yu Gothic" pitchFamily="34" charset="0"/>
+                <a:ea typeface="Yu Gothic" pitchFamily="34" charset="-122"/>
+                <a:cs typeface="Yu Gothic" pitchFamily="34" charset="-120"/>
+              </a:rPr>
+              <a:t>↑</a:t>
+            </a:r>
+            <a:endParaRPr lang="en-US" sz="1000" dirty="0"/>
+          </a:p>
+        </p:txBody>
+      </p:sp>
+      <p:sp>
+        <p:nvSpPr>
+          <p:cNvPr id="26" name="Shape 24"/>
           <p:cNvSpPr/>
           <p:nvPr/>
         </p:nvSpPr>
         <p:spPr>
           <a:xfrm>
-            <a:off x="502920" y="2935224"/>
+            <a:off x="7543800" y="2606040"/>
+            <a:ext cx="1691640" cy="685800"/>
+          </a:xfrm>
+          <a:prstGeom prst="rect">
+            <a:avLst/>
+          </a:prstGeom>
+          <a:solidFill>
+            <a:srgbClr val="F4F4F4"/>
+          </a:solidFill>
+          <a:ln w="12700">
+            <a:solidFill>
+              <a:srgbClr val="171717"/>
+            </a:solidFill>
+            <a:prstDash val="solid"/>
+          </a:ln>
+        </p:spPr>
+      </p:sp>
+      <p:sp>
+        <p:nvSpPr>
+          <p:cNvPr id="27" name="Text 25"/>
+          <p:cNvSpPr txBox="1"/>
+          <p:nvPr/>
+        </p:nvSpPr>
+        <p:spPr>
+          <a:xfrm>
+            <a:off x="7589520" y="2606040"/>
+            <a:ext cx="1600200" cy="685800"/>
+          </a:xfrm>
+          <a:prstGeom prst="rect">
+            <a:avLst/>
+          </a:prstGeom>
+          <a:noFill/>
+          <a:ln/>
+        </p:spPr>
+        <p:txBody>
+          <a:bodyPr wrap="square" lIns="0" tIns="0" rIns="0" bIns="0" rtlCol="0" anchor="ctr"/>
+          <a:lstStyle/>
+          <a:p>
+            <a:pPr algn="ctr" indent="0" marL="0">
+              <a:buNone/>
+            </a:pPr>
+            <a:r>
+              <a:rPr lang="en-US" sz="950" b="1" dirty="0">
+                <a:solidFill>
+                  <a:srgbClr val="171717"/>
+                </a:solidFill>
+                <a:latin typeface="Yu Gothic" pitchFamily="34" charset="0"/>
+                <a:ea typeface="Yu Gothic" pitchFamily="34" charset="-122"/>
+                <a:cs typeface="Yu Gothic" pitchFamily="34" charset="-120"/>
+              </a:rPr>
+              <a:t>外部設計</a:t>
+            </a:r>
+            <a:endParaRPr lang="en-US" sz="950" dirty="0"/>
+          </a:p>
+        </p:txBody>
+      </p:sp>
+      <p:sp>
+        <p:nvSpPr>
+          <p:cNvPr id="28" name="Shape 26"/>
+          <p:cNvSpPr/>
+          <p:nvPr/>
+        </p:nvSpPr>
+        <p:spPr>
+          <a:xfrm>
+            <a:off x="9555480" y="2606040"/>
+            <a:ext cx="1691640" cy="685800"/>
+          </a:xfrm>
+          <a:prstGeom prst="rect">
+            <a:avLst/>
+          </a:prstGeom>
+          <a:solidFill>
+            <a:srgbClr val="F4F4F4"/>
+          </a:solidFill>
+          <a:ln w="12700">
+            <a:solidFill>
+              <a:srgbClr val="171717"/>
+            </a:solidFill>
+            <a:prstDash val="solid"/>
+          </a:ln>
+        </p:spPr>
+      </p:sp>
+      <p:sp>
+        <p:nvSpPr>
+          <p:cNvPr id="29" name="Text 27"/>
+          <p:cNvSpPr txBox="1"/>
+          <p:nvPr/>
+        </p:nvSpPr>
+        <p:spPr>
+          <a:xfrm>
+            <a:off x="9601200" y="2606040"/>
+            <a:ext cx="1600200" cy="685800"/>
+          </a:xfrm>
+          <a:prstGeom prst="rect">
+            <a:avLst/>
+          </a:prstGeom>
+          <a:noFill/>
+          <a:ln/>
+        </p:spPr>
+        <p:txBody>
+          <a:bodyPr wrap="square" lIns="0" tIns="0" rIns="0" bIns="0" rtlCol="0" anchor="ctr"/>
+          <a:lstStyle/>
+          <a:p>
+            <a:pPr algn="ctr" indent="0" marL="0">
+              <a:buNone/>
+            </a:pPr>
+            <a:r>
+              <a:rPr lang="en-US" sz="950" b="1" dirty="0">
+                <a:solidFill>
+                  <a:srgbClr val="171717"/>
+                </a:solidFill>
+                <a:latin typeface="Yu Gothic" pitchFamily="34" charset="0"/>
+                <a:ea typeface="Yu Gothic" pitchFamily="34" charset="-122"/>
+                <a:cs typeface="Yu Gothic" pitchFamily="34" charset="-120"/>
+              </a:rPr>
+              <a:t>システムテスト</a:t>
+            </a:r>
+            <a:endParaRPr lang="en-US" sz="950" dirty="0"/>
+          </a:p>
+        </p:txBody>
+      </p:sp>
+      <p:sp>
+        <p:nvSpPr>
+          <p:cNvPr id="30" name="Shape 28"/>
+          <p:cNvSpPr/>
+          <p:nvPr/>
+        </p:nvSpPr>
+        <p:spPr>
+          <a:xfrm>
+            <a:off x="9235440" y="2948940"/>
+            <a:ext cx="320040" cy="0"/>
+          </a:xfrm>
+          <a:prstGeom prst="line">
+            <a:avLst/>
+          </a:prstGeom>
+          <a:noFill/>
+          <a:ln w="12700">
+            <a:solidFill>
+              <a:srgbClr val="8A8A8A"/>
+            </a:solidFill>
+            <a:prstDash val="dash"/>
+          </a:ln>
+        </p:spPr>
+      </p:sp>
+      <p:sp>
+        <p:nvSpPr>
+          <p:cNvPr id="31" name="Text 29"/>
+          <p:cNvSpPr txBox="1"/>
+          <p:nvPr/>
+        </p:nvSpPr>
+        <p:spPr>
+          <a:xfrm>
+            <a:off x="7543800" y="3264408"/>
+            <a:ext cx="1691640" cy="237744"/>
+          </a:xfrm>
+          <a:prstGeom prst="rect">
+            <a:avLst/>
+          </a:prstGeom>
+          <a:noFill/>
+          <a:ln/>
+        </p:spPr>
+        <p:txBody>
+          <a:bodyPr wrap="square" lIns="0" tIns="0" rIns="0" bIns="0" rtlCol="0" anchor="ctr"/>
+          <a:lstStyle/>
+          <a:p>
+            <a:pPr algn="ctr" indent="0" marL="0">
+              <a:buNone/>
+            </a:pPr>
+            <a:r>
+              <a:rPr lang="en-US" sz="1000" dirty="0">
+                <a:solidFill>
+                  <a:srgbClr val="8A8A8A"/>
+                </a:solidFill>
+                <a:latin typeface="Yu Gothic" pitchFamily="34" charset="0"/>
+                <a:ea typeface="Yu Gothic" pitchFamily="34" charset="-122"/>
+                <a:cs typeface="Yu Gothic" pitchFamily="34" charset="-120"/>
+              </a:rPr>
+              <a:t>↓</a:t>
+            </a:r>
+            <a:endParaRPr lang="en-US" sz="1000" dirty="0"/>
+          </a:p>
+        </p:txBody>
+      </p:sp>
+      <p:sp>
+        <p:nvSpPr>
+          <p:cNvPr id="32" name="Text 30"/>
+          <p:cNvSpPr txBox="1"/>
+          <p:nvPr/>
+        </p:nvSpPr>
+        <p:spPr>
+          <a:xfrm>
+            <a:off x="9555480" y="3264408"/>
+            <a:ext cx="1691640" cy="237744"/>
+          </a:xfrm>
+          <a:prstGeom prst="rect">
+            <a:avLst/>
+          </a:prstGeom>
+          <a:noFill/>
+          <a:ln/>
+        </p:spPr>
+        <p:txBody>
+          <a:bodyPr wrap="square" lIns="0" tIns="0" rIns="0" bIns="0" rtlCol="0" anchor="ctr"/>
+          <a:lstStyle/>
+          <a:p>
+            <a:pPr algn="ctr" indent="0" marL="0">
+              <a:buNone/>
+            </a:pPr>
+            <a:r>
+              <a:rPr lang="en-US" sz="1000" dirty="0">
+                <a:solidFill>
+                  <a:srgbClr val="8A8A8A"/>
+                </a:solidFill>
+                <a:latin typeface="Yu Gothic" pitchFamily="34" charset="0"/>
+                <a:ea typeface="Yu Gothic" pitchFamily="34" charset="-122"/>
+                <a:cs typeface="Yu Gothic" pitchFamily="34" charset="-120"/>
+              </a:rPr>
+              <a:t>↑</a:t>
+            </a:r>
+            <a:endParaRPr lang="en-US" sz="1000" dirty="0"/>
+          </a:p>
+        </p:txBody>
+      </p:sp>
+      <p:sp>
+        <p:nvSpPr>
+          <p:cNvPr id="33" name="Shape 31"/>
+          <p:cNvSpPr/>
+          <p:nvPr/>
+        </p:nvSpPr>
+        <p:spPr>
+          <a:xfrm>
+            <a:off x="7543800" y="3474720"/>
+            <a:ext cx="1691640" cy="685800"/>
+          </a:xfrm>
+          <a:prstGeom prst="rect">
+            <a:avLst/>
+          </a:prstGeom>
+          <a:solidFill>
+            <a:srgbClr val="F4F4F4"/>
+          </a:solidFill>
+          <a:ln w="12700">
+            <a:solidFill>
+              <a:srgbClr val="171717"/>
+            </a:solidFill>
+            <a:prstDash val="solid"/>
+          </a:ln>
+        </p:spPr>
+      </p:sp>
+      <p:sp>
+        <p:nvSpPr>
+          <p:cNvPr id="34" name="Text 32"/>
+          <p:cNvSpPr txBox="1"/>
+          <p:nvPr/>
+        </p:nvSpPr>
+        <p:spPr>
+          <a:xfrm>
+            <a:off x="7589520" y="3474720"/>
+            <a:ext cx="1600200" cy="685800"/>
+          </a:xfrm>
+          <a:prstGeom prst="rect">
+            <a:avLst/>
+          </a:prstGeom>
+          <a:noFill/>
+          <a:ln/>
+        </p:spPr>
+        <p:txBody>
+          <a:bodyPr wrap="square" lIns="0" tIns="0" rIns="0" bIns="0" rtlCol="0" anchor="ctr"/>
+          <a:lstStyle/>
+          <a:p>
+            <a:pPr algn="ctr" indent="0" marL="0">
+              <a:buNone/>
+            </a:pPr>
+            <a:r>
+              <a:rPr lang="en-US" sz="950" b="1" dirty="0">
+                <a:solidFill>
+                  <a:srgbClr val="171717"/>
+                </a:solidFill>
+                <a:latin typeface="Yu Gothic" pitchFamily="34" charset="0"/>
+                <a:ea typeface="Yu Gothic" pitchFamily="34" charset="-122"/>
+                <a:cs typeface="Yu Gothic" pitchFamily="34" charset="-120"/>
+              </a:rPr>
+              <a:t>内部設計</a:t>
+            </a:r>
+            <a:endParaRPr lang="en-US" sz="950" dirty="0"/>
+          </a:p>
+        </p:txBody>
+      </p:sp>
+      <p:sp>
+        <p:nvSpPr>
+          <p:cNvPr id="35" name="Shape 33"/>
+          <p:cNvSpPr/>
+          <p:nvPr/>
+        </p:nvSpPr>
+        <p:spPr>
+          <a:xfrm>
+            <a:off x="9555480" y="3474720"/>
+            <a:ext cx="1691640" cy="685800"/>
+          </a:xfrm>
+          <a:prstGeom prst="rect">
+            <a:avLst/>
+          </a:prstGeom>
+          <a:solidFill>
+            <a:srgbClr val="F4F4F4"/>
+          </a:solidFill>
+          <a:ln w="12700">
+            <a:solidFill>
+              <a:srgbClr val="171717"/>
+            </a:solidFill>
+            <a:prstDash val="solid"/>
+          </a:ln>
+        </p:spPr>
+      </p:sp>
+      <p:sp>
+        <p:nvSpPr>
+          <p:cNvPr id="36" name="Text 34"/>
+          <p:cNvSpPr txBox="1"/>
+          <p:nvPr/>
+        </p:nvSpPr>
+        <p:spPr>
+          <a:xfrm>
+            <a:off x="9601200" y="3474720"/>
+            <a:ext cx="1600200" cy="685800"/>
+          </a:xfrm>
+          <a:prstGeom prst="rect">
+            <a:avLst/>
+          </a:prstGeom>
+          <a:noFill/>
+          <a:ln/>
+        </p:spPr>
+        <p:txBody>
+          <a:bodyPr wrap="square" lIns="0" tIns="0" rIns="0" bIns="0" rtlCol="0" anchor="ctr"/>
+          <a:lstStyle/>
+          <a:p>
+            <a:pPr algn="ctr" indent="0" marL="0">
+              <a:buNone/>
+            </a:pPr>
+            <a:r>
+              <a:rPr lang="en-US" sz="950" b="1" dirty="0">
+                <a:solidFill>
+                  <a:srgbClr val="171717"/>
+                </a:solidFill>
+                <a:latin typeface="Yu Gothic" pitchFamily="34" charset="0"/>
+                <a:ea typeface="Yu Gothic" pitchFamily="34" charset="-122"/>
+                <a:cs typeface="Yu Gothic" pitchFamily="34" charset="-120"/>
+              </a:rPr>
+              <a:t>結合テスト</a:t>
+            </a:r>
+            <a:endParaRPr lang="en-US" sz="950" dirty="0"/>
+          </a:p>
+        </p:txBody>
+      </p:sp>
+      <p:sp>
+        <p:nvSpPr>
+          <p:cNvPr id="37" name="Shape 35"/>
+          <p:cNvSpPr/>
+          <p:nvPr/>
+        </p:nvSpPr>
+        <p:spPr>
+          <a:xfrm>
+            <a:off x="9235440" y="3817620"/>
+            <a:ext cx="320040" cy="0"/>
+          </a:xfrm>
+          <a:prstGeom prst="line">
+            <a:avLst/>
+          </a:prstGeom>
+          <a:noFill/>
+          <a:ln w="12700">
+            <a:solidFill>
+              <a:srgbClr val="8A8A8A"/>
+            </a:solidFill>
+            <a:prstDash val="dash"/>
+          </a:ln>
+        </p:spPr>
+      </p:sp>
+      <p:sp>
+        <p:nvSpPr>
+          <p:cNvPr id="38" name="Text 36"/>
+          <p:cNvSpPr txBox="1"/>
+          <p:nvPr/>
+        </p:nvSpPr>
+        <p:spPr>
+          <a:xfrm>
+            <a:off x="7543800" y="4133088"/>
+            <a:ext cx="1691640" cy="237744"/>
+          </a:xfrm>
+          <a:prstGeom prst="rect">
+            <a:avLst/>
+          </a:prstGeom>
+          <a:noFill/>
+          <a:ln/>
+        </p:spPr>
+        <p:txBody>
+          <a:bodyPr wrap="square" lIns="0" tIns="0" rIns="0" bIns="0" rtlCol="0" anchor="ctr"/>
+          <a:lstStyle/>
+          <a:p>
+            <a:pPr algn="ctr" indent="0" marL="0">
+              <a:buNone/>
+            </a:pPr>
+            <a:r>
+              <a:rPr lang="en-US" sz="1000" dirty="0">
+                <a:solidFill>
+                  <a:srgbClr val="8A8A8A"/>
+                </a:solidFill>
+                <a:latin typeface="Yu Gothic" pitchFamily="34" charset="0"/>
+                <a:ea typeface="Yu Gothic" pitchFamily="34" charset="-122"/>
+                <a:cs typeface="Yu Gothic" pitchFamily="34" charset="-120"/>
+              </a:rPr>
+              <a:t>↓</a:t>
+            </a:r>
+            <a:endParaRPr lang="en-US" sz="1000" dirty="0"/>
+          </a:p>
+        </p:txBody>
+      </p:sp>
+      <p:sp>
+        <p:nvSpPr>
+          <p:cNvPr id="39" name="Text 37"/>
+          <p:cNvSpPr txBox="1"/>
+          <p:nvPr/>
+        </p:nvSpPr>
+        <p:spPr>
+          <a:xfrm>
+            <a:off x="9555480" y="4133088"/>
+            <a:ext cx="1691640" cy="237744"/>
+          </a:xfrm>
+          <a:prstGeom prst="rect">
+            <a:avLst/>
+          </a:prstGeom>
+          <a:noFill/>
+          <a:ln/>
+        </p:spPr>
+        <p:txBody>
+          <a:bodyPr wrap="square" lIns="0" tIns="0" rIns="0" bIns="0" rtlCol="0" anchor="ctr"/>
+          <a:lstStyle/>
+          <a:p>
+            <a:pPr algn="ctr" indent="0" marL="0">
+              <a:buNone/>
+            </a:pPr>
+            <a:r>
+              <a:rPr lang="en-US" sz="1000" dirty="0">
+                <a:solidFill>
+                  <a:srgbClr val="8A8A8A"/>
+                </a:solidFill>
+                <a:latin typeface="Yu Gothic" pitchFamily="34" charset="0"/>
+                <a:ea typeface="Yu Gothic" pitchFamily="34" charset="-122"/>
+                <a:cs typeface="Yu Gothic" pitchFamily="34" charset="-120"/>
+              </a:rPr>
+              <a:t>↑</a:t>
+            </a:r>
+            <a:endParaRPr lang="en-US" sz="1000" dirty="0"/>
+          </a:p>
+        </p:txBody>
+      </p:sp>
+      <p:sp>
+        <p:nvSpPr>
+          <p:cNvPr id="40" name="Shape 38"/>
+          <p:cNvSpPr/>
+          <p:nvPr/>
+        </p:nvSpPr>
+        <p:spPr>
+          <a:xfrm>
+            <a:off x="7543800" y="4343400"/>
+            <a:ext cx="1691640" cy="685800"/>
+          </a:xfrm>
+          <a:prstGeom prst="rect">
+            <a:avLst/>
+          </a:prstGeom>
+          <a:solidFill>
+            <a:srgbClr val="FF3B1F"/>
+          </a:solidFill>
+          <a:ln/>
+        </p:spPr>
+      </p:sp>
+      <p:sp>
+        <p:nvSpPr>
+          <p:cNvPr id="41" name="Text 39"/>
+          <p:cNvSpPr txBox="1"/>
+          <p:nvPr/>
+        </p:nvSpPr>
+        <p:spPr>
+          <a:xfrm>
+            <a:off x="7589520" y="4343400"/>
+            <a:ext cx="1600200" cy="685800"/>
+          </a:xfrm>
+          <a:prstGeom prst="rect">
+            <a:avLst/>
+          </a:prstGeom>
+          <a:noFill/>
+          <a:ln/>
+        </p:spPr>
+        <p:txBody>
+          <a:bodyPr wrap="square" lIns="0" tIns="0" rIns="0" bIns="0" rtlCol="0" anchor="ctr"/>
+          <a:lstStyle/>
+          <a:p>
+            <a:pPr algn="ctr" indent="0" marL="0">
+              <a:buNone/>
+            </a:pPr>
+            <a:r>
+              <a:rPr lang="en-US" sz="950" b="1" dirty="0">
+                <a:solidFill>
+                  <a:srgbClr val="FFFFFF"/>
+                </a:solidFill>
+                <a:latin typeface="Yu Gothic" pitchFamily="34" charset="0"/>
+                <a:ea typeface="Yu Gothic" pitchFamily="34" charset="-122"/>
+                <a:cs typeface="Yu Gothic" pitchFamily="34" charset="-120"/>
+              </a:rPr>
+              <a:t>プログラミング</a:t>
+            </a:r>
+            <a:endParaRPr lang="en-US" sz="950" dirty="0"/>
+          </a:p>
+        </p:txBody>
+      </p:sp>
+      <p:sp>
+        <p:nvSpPr>
+          <p:cNvPr id="42" name="Shape 40"/>
+          <p:cNvSpPr/>
+          <p:nvPr/>
+        </p:nvSpPr>
+        <p:spPr>
+          <a:xfrm>
+            <a:off x="9555480" y="4343400"/>
+            <a:ext cx="1691640" cy="685800"/>
+          </a:xfrm>
+          <a:prstGeom prst="rect">
+            <a:avLst/>
+          </a:prstGeom>
+          <a:solidFill>
+            <a:srgbClr val="FF3B1F"/>
+          </a:solidFill>
+          <a:ln/>
+        </p:spPr>
+      </p:sp>
+      <p:sp>
+        <p:nvSpPr>
+          <p:cNvPr id="43" name="Text 41"/>
+          <p:cNvSpPr txBox="1"/>
+          <p:nvPr/>
+        </p:nvSpPr>
+        <p:spPr>
+          <a:xfrm>
+            <a:off x="9601200" y="4343400"/>
+            <a:ext cx="1600200" cy="685800"/>
+          </a:xfrm>
+          <a:prstGeom prst="rect">
+            <a:avLst/>
+          </a:prstGeom>
+          <a:noFill/>
+          <a:ln/>
+        </p:spPr>
+        <p:txBody>
+          <a:bodyPr wrap="square" lIns="0" tIns="0" rIns="0" bIns="0" rtlCol="0" anchor="ctr"/>
+          <a:lstStyle/>
+          <a:p>
+            <a:pPr algn="ctr" indent="0" marL="0">
+              <a:buNone/>
+            </a:pPr>
+            <a:r>
+              <a:rPr lang="en-US" sz="950" b="1" dirty="0">
+                <a:solidFill>
+                  <a:srgbClr val="FFFFFF"/>
+                </a:solidFill>
+                <a:latin typeface="Yu Gothic" pitchFamily="34" charset="0"/>
+                <a:ea typeface="Yu Gothic" pitchFamily="34" charset="-122"/>
+                <a:cs typeface="Yu Gothic" pitchFamily="34" charset="-120"/>
+              </a:rPr>
+              <a:t>単体テスト</a:t>
+            </a:r>
+            <a:endParaRPr lang="en-US" sz="950" dirty="0"/>
+          </a:p>
+        </p:txBody>
+      </p:sp>
+      <p:sp>
+        <p:nvSpPr>
+          <p:cNvPr id="44" name="Shape 42"/>
+          <p:cNvSpPr/>
+          <p:nvPr/>
+        </p:nvSpPr>
+        <p:spPr>
+          <a:xfrm>
+            <a:off x="9235440" y="4686300"/>
+            <a:ext cx="320040" cy="0"/>
+          </a:xfrm>
+          <a:prstGeom prst="line">
+            <a:avLst/>
+          </a:prstGeom>
+          <a:noFill/>
+          <a:ln w="12700">
+            <a:solidFill>
+              <a:srgbClr val="8A8A8A"/>
+            </a:solidFill>
+            <a:prstDash val="dash"/>
+          </a:ln>
+        </p:spPr>
+      </p:sp>
+      <p:sp>
+        <p:nvSpPr>
+          <p:cNvPr id="45" name="Text 43"/>
+          <p:cNvSpPr txBox="1"/>
+          <p:nvPr/>
+        </p:nvSpPr>
+        <p:spPr>
+          <a:xfrm>
+            <a:off x="7543800" y="5102352"/>
+            <a:ext cx="3703320" cy="320040"/>
+          </a:xfrm>
+          <a:prstGeom prst="rect">
+            <a:avLst/>
+          </a:prstGeom>
+          <a:noFill/>
+          <a:ln/>
+        </p:spPr>
+        <p:txBody>
+          <a:bodyPr wrap="square" lIns="0" tIns="0" rIns="0" bIns="0" rtlCol="0" anchor="ctr"/>
+          <a:lstStyle/>
+          <a:p>
+            <a:pPr algn="ctr" indent="0" marL="0">
+              <a:buNone/>
+            </a:pPr>
+            <a:r>
+              <a:rPr lang="en-US" sz="800" dirty="0">
+                <a:solidFill>
+                  <a:srgbClr val="8A8A8A"/>
+                </a:solidFill>
+                <a:latin typeface="Yu Gothic" pitchFamily="34" charset="0"/>
+                <a:ea typeface="Yu Gothic" pitchFamily="34" charset="-122"/>
+                <a:cs typeface="Yu Gothic" pitchFamily="34" charset="-120"/>
+              </a:rPr>
+              <a:t>設計工程（左）とテスト工程（右）が１対１で対応するV字モデル</a:t>
+            </a:r>
+            <a:endParaRPr lang="en-US" sz="800" dirty="0"/>
+          </a:p>
+        </p:txBody>
+      </p:sp>
+      <p:sp>
+        <p:nvSpPr>
+          <p:cNvPr id="46" name="Shape 44"/>
+          <p:cNvSpPr/>
+          <p:nvPr/>
+        </p:nvSpPr>
+        <p:spPr>
+          <a:xfrm>
+            <a:off x="502920" y="5989320"/>
             <a:ext cx="11201400" cy="0"/>
+          </a:xfrm>
+          <a:prstGeom prst="line">
+            <a:avLst/>
+          </a:prstGeom>
+          <a:noFill/>
+          <a:ln w="9525">
+            <a:solidFill>
+              <a:srgbClr val="171717"/>
+            </a:solidFill>
+            <a:prstDash val="solid"/>
+          </a:ln>
+        </p:spPr>
+      </p:sp>
+      <p:sp>
+        <p:nvSpPr>
+          <p:cNvPr id="47" name="Shape 45"/>
+          <p:cNvSpPr/>
+          <p:nvPr/>
+        </p:nvSpPr>
+        <p:spPr>
+          <a:xfrm>
+            <a:off x="502920" y="6062472"/>
+            <a:ext cx="329184" cy="329184"/>
+          </a:xfrm>
+          <a:prstGeom prst="ellipse">
+            <a:avLst/>
+          </a:prstGeom>
+          <a:solidFill>
+            <a:srgbClr val="FF3B1F"/>
+          </a:solidFill>
+          <a:ln/>
+        </p:spPr>
+      </p:sp>
+      <p:sp>
+        <p:nvSpPr>
+          <p:cNvPr id="48" name="Text 46"/>
+          <p:cNvSpPr txBox="1"/>
+          <p:nvPr/>
+        </p:nvSpPr>
+        <p:spPr>
+          <a:xfrm>
+            <a:off x="502920" y="6062472"/>
+            <a:ext cx="329184" cy="329184"/>
+          </a:xfrm>
+          <a:prstGeom prst="rect">
+            <a:avLst/>
+          </a:prstGeom>
+          <a:noFill/>
+          <a:ln/>
+        </p:spPr>
+        <p:txBody>
+          <a:bodyPr wrap="square" lIns="0" tIns="0" rIns="0" bIns="0" rtlCol="0" anchor="ctr"/>
+          <a:lstStyle/>
+          <a:p>
+            <a:pPr algn="ctr" indent="0" marL="0">
+              <a:buNone/>
+            </a:pPr>
+            <a:r>
+              <a:rPr lang="en-US" sz="1300" b="1" dirty="0">
+                <a:solidFill>
+                  <a:srgbClr val="FFFFFF"/>
+                </a:solidFill>
+                <a:latin typeface="Consolas" pitchFamily="34" charset="0"/>
+                <a:ea typeface="Consolas" pitchFamily="34" charset="-122"/>
+                <a:cs typeface="Consolas" pitchFamily="34" charset="-120"/>
+              </a:rPr>
+              <a:t>A</a:t>
+            </a:r>
+            <a:endParaRPr lang="en-US" sz="1300" dirty="0"/>
+          </a:p>
+        </p:txBody>
+      </p:sp>
+      <p:sp>
+        <p:nvSpPr>
+          <p:cNvPr id="49" name="Text 47"/>
+          <p:cNvSpPr txBox="1"/>
+          <p:nvPr/>
+        </p:nvSpPr>
+        <p:spPr>
+          <a:xfrm>
+            <a:off x="914400" y="6062472"/>
+            <a:ext cx="1371600" cy="329184"/>
+          </a:xfrm>
+          <a:prstGeom prst="rect">
+            <a:avLst/>
+          </a:prstGeom>
+          <a:noFill/>
+          <a:ln/>
+        </p:spPr>
+        <p:txBody>
+          <a:bodyPr wrap="square" lIns="0" tIns="0" rIns="0" bIns="0" rtlCol="0" anchor="ctr"/>
+          <a:lstStyle/>
+          <a:p>
+            <a:pPr indent="0" marL="0">
+              <a:buNone/>
+            </a:pPr>
+            <a:r>
+              <a:rPr lang="en-US" sz="1050" b="1" dirty="0">
+                <a:solidFill>
+                  <a:srgbClr val="171717"/>
+                </a:solidFill>
+                <a:latin typeface="Yu Gothic" pitchFamily="34" charset="0"/>
+                <a:ea typeface="Yu Gothic" pitchFamily="34" charset="-122"/>
+                <a:cs typeface="Yu Gothic" pitchFamily="34" charset="-120"/>
+              </a:rPr>
+              <a:t>最頻出論点</a:t>
+            </a:r>
+            <a:endParaRPr lang="en-US" sz="1050" dirty="0"/>
+          </a:p>
+        </p:txBody>
+      </p:sp>
+      <p:sp>
+        <p:nvSpPr>
+          <p:cNvPr id="50" name="Shape 48"/>
+          <p:cNvSpPr/>
+          <p:nvPr/>
+        </p:nvSpPr>
+        <p:spPr>
+          <a:xfrm>
+            <a:off x="2331720" y="6062472"/>
+            <a:ext cx="0" cy="329184"/>
           </a:xfrm>
           <a:prstGeom prst="line">
             <a:avLst/>
@@ -22599,210 +24150,7 @@
       </p:sp>
       <p:sp>
         <p:nvSpPr>
-          <p:cNvPr id="18" name="Text 16"/>
-          <p:cNvSpPr txBox="1"/>
-          <p:nvPr/>
-        </p:nvSpPr>
-        <p:spPr>
-          <a:xfrm>
-            <a:off x="502920" y="3008376"/>
-            <a:ext cx="11201400" cy="457200"/>
-          </a:xfrm>
-          <a:prstGeom prst="rect">
-            <a:avLst/>
-          </a:prstGeom>
-          <a:noFill/>
-          <a:ln/>
-        </p:spPr>
-        <p:txBody>
-          <a:bodyPr wrap="square" lIns="0" tIns="0" rIns="0" bIns="0" rtlCol="0" anchor="ctr"/>
-          <a:lstStyle/>
-          <a:p>
-            <a:pPr indent="0" marL="0">
-              <a:lnSpc>
-                <a:spcPct val="120000"/>
-              </a:lnSpc>
-              <a:buNone/>
-            </a:pPr>
-            <a:r>
-              <a:rPr lang="en-US" sz="950" b="1" dirty="0">
-                <a:solidFill>
-                  <a:srgbClr val="FF3B1F"/>
-                </a:solidFill>
-                <a:latin typeface="Yu Gothic" pitchFamily="34" charset="0"/>
-                <a:ea typeface="Yu Gothic" pitchFamily="34" charset="-122"/>
-                <a:cs typeface="Yu Gothic" pitchFamily="34" charset="-120"/>
-              </a:rPr>
-              <a:t>ひっかけ：</a:t>
-            </a:r>
-            <a:pPr indent="0" marL="0">
-              <a:lnSpc>
-                <a:spcPct val="120000"/>
-              </a:lnSpc>
-              <a:buNone/>
-            </a:pPr>
-            <a:r>
-              <a:rPr lang="en-US" sz="950" dirty="0">
-                <a:solidFill>
-                  <a:srgbClr val="FF3B1F"/>
-                </a:solidFill>
-                <a:latin typeface="Yu Gothic" pitchFamily="34" charset="0"/>
-                <a:ea typeface="Yu Gothic" pitchFamily="34" charset="-122"/>
-                <a:cs typeface="Yu Gothic" pitchFamily="34" charset="-120"/>
-              </a:rPr>
-              <a:t>「要件変更に柔軟」は誤り。手戻りコストが大きく変更には弱い（柔軟なのはF-17のアジャイル型）。テスト順序の入れ替えにも注意。</a:t>
-            </a:r>
-            <a:endParaRPr lang="en-US" sz="950" dirty="0"/>
-          </a:p>
-        </p:txBody>
-      </p:sp>
-      <p:sp>
-        <p:nvSpPr>
-          <p:cNvPr id="19" name="Shape 17"/>
-          <p:cNvSpPr/>
-          <p:nvPr/>
-        </p:nvSpPr>
-        <p:spPr>
-          <a:xfrm>
-            <a:off x="502920" y="5989320"/>
-            <a:ext cx="11201400" cy="0"/>
-          </a:xfrm>
-          <a:prstGeom prst="line">
-            <a:avLst/>
-          </a:prstGeom>
-          <a:noFill/>
-          <a:ln w="9525">
-            <a:solidFill>
-              <a:srgbClr val="171717"/>
-            </a:solidFill>
-            <a:prstDash val="solid"/>
-          </a:ln>
-        </p:spPr>
-      </p:sp>
-      <p:sp>
-        <p:nvSpPr>
-          <p:cNvPr id="20" name="Shape 18"/>
-          <p:cNvSpPr/>
-          <p:nvPr/>
-        </p:nvSpPr>
-        <p:spPr>
-          <a:xfrm>
-            <a:off x="502920" y="6062472"/>
-            <a:ext cx="329184" cy="329184"/>
-          </a:xfrm>
-          <a:prstGeom prst="ellipse">
-            <a:avLst/>
-          </a:prstGeom>
-          <a:solidFill>
-            <a:srgbClr val="FF3B1F"/>
-          </a:solidFill>
-          <a:ln/>
-        </p:spPr>
-      </p:sp>
-      <p:sp>
-        <p:nvSpPr>
-          <p:cNvPr id="21" name="Text 19"/>
-          <p:cNvSpPr txBox="1"/>
-          <p:nvPr/>
-        </p:nvSpPr>
-        <p:spPr>
-          <a:xfrm>
-            <a:off x="502920" y="6062472"/>
-            <a:ext cx="329184" cy="329184"/>
-          </a:xfrm>
-          <a:prstGeom prst="rect">
-            <a:avLst/>
-          </a:prstGeom>
-          <a:noFill/>
-          <a:ln/>
-        </p:spPr>
-        <p:txBody>
-          <a:bodyPr wrap="square" lIns="0" tIns="0" rIns="0" bIns="0" rtlCol="0" anchor="ctr"/>
-          <a:lstStyle/>
-          <a:p>
-            <a:pPr algn="ctr" indent="0" marL="0">
-              <a:buNone/>
-            </a:pPr>
-            <a:r>
-              <a:rPr lang="en-US" sz="1300" b="1" dirty="0">
-                <a:solidFill>
-                  <a:srgbClr val="FFFFFF"/>
-                </a:solidFill>
-                <a:latin typeface="Consolas" pitchFamily="34" charset="0"/>
-                <a:ea typeface="Consolas" pitchFamily="34" charset="-122"/>
-                <a:cs typeface="Consolas" pitchFamily="34" charset="-120"/>
-              </a:rPr>
-              <a:t>A</a:t>
-            </a:r>
-            <a:endParaRPr lang="en-US" sz="1300" dirty="0"/>
-          </a:p>
-        </p:txBody>
-      </p:sp>
-      <p:sp>
-        <p:nvSpPr>
-          <p:cNvPr id="22" name="Text 20"/>
-          <p:cNvSpPr txBox="1"/>
-          <p:nvPr/>
-        </p:nvSpPr>
-        <p:spPr>
-          <a:xfrm>
-            <a:off x="914400" y="6062472"/>
-            <a:ext cx="1371600" cy="329184"/>
-          </a:xfrm>
-          <a:prstGeom prst="rect">
-            <a:avLst/>
-          </a:prstGeom>
-          <a:noFill/>
-          <a:ln/>
-        </p:spPr>
-        <p:txBody>
-          <a:bodyPr wrap="square" lIns="0" tIns="0" rIns="0" bIns="0" rtlCol="0" anchor="ctr"/>
-          <a:lstStyle/>
-          <a:p>
-            <a:pPr indent="0" marL="0">
-              <a:buNone/>
-            </a:pPr>
-            <a:r>
-              <a:rPr lang="en-US" sz="1050" b="1" dirty="0">
-                <a:solidFill>
-                  <a:srgbClr val="171717"/>
-                </a:solidFill>
-                <a:latin typeface="Yu Gothic" pitchFamily="34" charset="0"/>
-                <a:ea typeface="Yu Gothic" pitchFamily="34" charset="-122"/>
-                <a:cs typeface="Yu Gothic" pitchFamily="34" charset="-120"/>
-              </a:rPr>
-              <a:t>最頻出論点</a:t>
-            </a:r>
-            <a:endParaRPr lang="en-US" sz="1050" dirty="0"/>
-          </a:p>
-        </p:txBody>
-      </p:sp>
-      <p:sp>
-        <p:nvSpPr>
-          <p:cNvPr id="23" name="Shape 21"/>
-          <p:cNvSpPr/>
-          <p:nvPr/>
-        </p:nvSpPr>
-        <p:spPr>
-          <a:xfrm>
-            <a:off x="2331720" y="6062472"/>
-            <a:ext cx="0" cy="329184"/>
-          </a:xfrm>
-          <a:prstGeom prst="line">
-            <a:avLst/>
-          </a:prstGeom>
-          <a:noFill/>
-          <a:ln w="12700">
-            <a:solidFill>
-              <a:srgbClr val="E6E6E6"/>
-            </a:solidFill>
-            <a:prstDash val="solid"/>
-          </a:ln>
-        </p:spPr>
-      </p:sp>
-      <p:sp>
-        <p:nvSpPr>
-          <p:cNvPr id="24" name="Text 22"/>
+          <p:cNvPr id="51" name="Text 49"/>
           <p:cNvSpPr txBox="1"/>
           <p:nvPr/>
         </p:nvSpPr>
@@ -22841,7 +24189,7 @@
       </p:sp>
       <p:sp>
         <p:nvSpPr>
-          <p:cNvPr id="25" name="Text 23"/>
+          <p:cNvPr id="52" name="Text 50"/>
           <p:cNvSpPr txBox="1"/>
           <p:nvPr/>
         </p:nvSpPr>
@@ -22880,7 +24228,7 @@
       </p:sp>
       <p:sp>
         <p:nvSpPr>
-          <p:cNvPr id="26" name="Shape 24"/>
+          <p:cNvPr id="53" name="Shape 51"/>
           <p:cNvSpPr/>
           <p:nvPr/>
         </p:nvSpPr>
@@ -22905,7 +24253,7 @@
       </p:sp>
       <p:sp>
         <p:nvSpPr>
-          <p:cNvPr id="27" name="Text 25"/>
+          <p:cNvPr id="54" name="Text 52"/>
           <p:cNvSpPr txBox="1"/>
           <p:nvPr/>
         </p:nvSpPr>
@@ -22944,7 +24292,7 @@
       </p:sp>
       <p:sp>
         <p:nvSpPr>
-          <p:cNvPr id="28" name="Shape 26"/>
+          <p:cNvPr id="55" name="Shape 53"/>
           <p:cNvSpPr/>
           <p:nvPr/>
         </p:nvSpPr>
@@ -22969,7 +24317,7 @@
       </p:sp>
       <p:sp>
         <p:nvSpPr>
-          <p:cNvPr id="29" name="Text 27"/>
+          <p:cNvPr id="56" name="Text 54"/>
           <p:cNvSpPr txBox="1"/>
           <p:nvPr/>
         </p:nvSpPr>
@@ -23008,7 +24356,7 @@
       </p:sp>
       <p:sp>
         <p:nvSpPr>
-          <p:cNvPr id="30" name="Shape 28"/>
+          <p:cNvPr id="57" name="Shape 55"/>
           <p:cNvSpPr/>
           <p:nvPr/>
         </p:nvSpPr>
@@ -23033,7 +24381,7 @@
       </p:sp>
       <p:sp>
         <p:nvSpPr>
-          <p:cNvPr id="31" name="Text 29"/>
+          <p:cNvPr id="58" name="Text 56"/>
           <p:cNvSpPr txBox="1"/>
           <p:nvPr/>
         </p:nvSpPr>
@@ -23072,7 +24420,7 @@
       </p:sp>
       <p:sp>
         <p:nvSpPr>
-          <p:cNvPr id="32" name="Shape 30"/>
+          <p:cNvPr id="59" name="Shape 57"/>
           <p:cNvSpPr/>
           <p:nvPr/>
         </p:nvSpPr>
@@ -23097,7 +24445,7 @@
       </p:sp>
       <p:sp>
         <p:nvSpPr>
-          <p:cNvPr id="33" name="Text 31"/>
+          <p:cNvPr id="60" name="Text 58"/>
           <p:cNvSpPr txBox="1"/>
           <p:nvPr/>
         </p:nvSpPr>
@@ -23136,7 +24484,7 @@
       </p:sp>
       <p:sp>
         <p:nvSpPr>
-          <p:cNvPr id="34" name="Shape 32"/>
+          <p:cNvPr id="61" name="Shape 59"/>
           <p:cNvSpPr/>
           <p:nvPr/>
         </p:nvSpPr>
@@ -23161,7 +24509,7 @@
       </p:sp>
       <p:sp>
         <p:nvSpPr>
-          <p:cNvPr id="35" name="Text 33"/>
+          <p:cNvPr id="62" name="Text 60"/>
           <p:cNvSpPr txBox="1"/>
           <p:nvPr/>
         </p:nvSpPr>
@@ -23200,7 +24548,7 @@
       </p:sp>
       <p:sp>
         <p:nvSpPr>
-          <p:cNvPr id="36" name="Shape 34"/>
+          <p:cNvPr id="63" name="Shape 61"/>
           <p:cNvSpPr/>
           <p:nvPr/>
         </p:nvSpPr>
@@ -23225,7 +24573,7 @@
       </p:sp>
       <p:sp>
         <p:nvSpPr>
-          <p:cNvPr id="37" name="Text 35"/>
+          <p:cNvPr id="64" name="Text 62"/>
           <p:cNvSpPr txBox="1"/>
           <p:nvPr/>
         </p:nvSpPr>
@@ -23264,7 +24612,7 @@
       </p:sp>
       <p:sp>
         <p:nvSpPr>
-          <p:cNvPr id="38" name="Shape 36"/>
+          <p:cNvPr id="65" name="Shape 63"/>
           <p:cNvSpPr/>
           <p:nvPr/>
         </p:nvSpPr>
@@ -23289,7 +24637,7 @@
       </p:sp>
       <p:sp>
         <p:nvSpPr>
-          <p:cNvPr id="39" name="Text 37"/>
+          <p:cNvPr id="66" name="Text 64"/>
           <p:cNvSpPr txBox="1"/>
           <p:nvPr/>
         </p:nvSpPr>
@@ -23328,7 +24676,7 @@
       </p:sp>
       <p:sp>
         <p:nvSpPr>
-          <p:cNvPr id="40" name="Shape 38"/>
+          <p:cNvPr id="67" name="Shape 65"/>
           <p:cNvSpPr/>
           <p:nvPr/>
         </p:nvSpPr>
@@ -23353,7 +24701,7 @@
       </p:sp>
       <p:sp>
         <p:nvSpPr>
-          <p:cNvPr id="41" name="Text 39"/>
+          <p:cNvPr id="68" name="Text 66"/>
           <p:cNvSpPr txBox="1"/>
           <p:nvPr/>
         </p:nvSpPr>
@@ -23392,7 +24740,7 @@
       </p:sp>
       <p:sp>
         <p:nvSpPr>
-          <p:cNvPr id="42" name="Shape 40"/>
+          <p:cNvPr id="69" name="Shape 67"/>
           <p:cNvSpPr/>
           <p:nvPr/>
         </p:nvSpPr>
@@ -23417,7 +24765,7 @@
       </p:sp>
       <p:sp>
         <p:nvSpPr>
-          <p:cNvPr id="43" name="Text 41"/>
+          <p:cNvPr id="70" name="Text 68"/>
           <p:cNvSpPr txBox="1"/>
           <p:nvPr/>
         </p:nvSpPr>
@@ -23456,7 +24804,7 @@
       </p:sp>
       <p:sp>
         <p:nvSpPr>
-          <p:cNvPr id="44" name="Shape 42"/>
+          <p:cNvPr id="71" name="Shape 69"/>
           <p:cNvSpPr/>
           <p:nvPr/>
         </p:nvSpPr>
@@ -23481,7 +24829,7 @@
       </p:sp>
       <p:sp>
         <p:nvSpPr>
-          <p:cNvPr id="45" name="Text 43"/>
+          <p:cNvPr id="72" name="Text 70"/>
           <p:cNvSpPr txBox="1"/>
           <p:nvPr/>
         </p:nvSpPr>

--- a/slides/1st_stage/F_information_systems.pptx
+++ b/slides/1st_stage/F_information_systems.pptx
@@ -5374,13 +5374,76 @@
       </p:sp>
       <p:sp>
         <p:nvSpPr>
-          <p:cNvPr id="19" name="Shape 17"/>
+          <p:cNvPr id="19" name="Text 17"/>
+          <p:cNvSpPr txBox="1"/>
+          <p:nvPr/>
+        </p:nvSpPr>
+        <p:spPr>
+          <a:xfrm>
+            <a:off x="502920" y="5148072"/>
+            <a:ext cx="11201400" cy="685800"/>
+          </a:xfrm>
+          <a:prstGeom prst="rect">
+            <a:avLst/>
+          </a:prstGeom>
+          <a:noFill/>
+          <a:ln/>
+        </p:spPr>
+        <p:txBody>
+          <a:bodyPr wrap="square" lIns="0" tIns="0" rIns="0" bIns="0" rtlCol="0" anchor="ctr"/>
+          <a:lstStyle/>
+          <a:p>
+            <a:pPr indent="0" marL="0">
+              <a:lnSpc>
+                <a:spcPct val="120000"/>
+              </a:lnSpc>
+              <a:buNone/>
+            </a:pPr>
+            <a:r>
+              <a:rPr lang="en-US" sz="850" b="1" dirty="0">
+                <a:solidFill>
+                  <a:srgbClr val="8A8A8A"/>
+                </a:solidFill>
+                <a:latin typeface="Consolas" pitchFamily="34" charset="0"/>
+                <a:ea typeface="Consolas" pitchFamily="34" charset="-122"/>
+                <a:cs typeface="Consolas" pitchFamily="34" charset="-120"/>
+              </a:rPr>
+              <a:t>具体例
+</a:t>
+            </a:r>
+            <a:endParaRPr lang="en-US" sz="850" dirty="0"/>
+          </a:p>
+          <a:p>
+            <a:pPr indent="0" marL="0">
+              <a:lnSpc>
+                <a:spcPct val="120000"/>
+              </a:lnSpc>
+              <a:buNone/>
+            </a:pPr>
+            <a:r>
+              <a:rPr lang="en-US" sz="1050" dirty="0">
+                <a:solidFill>
+                  <a:srgbClr val="171717"/>
+                </a:solidFill>
+                <a:latin typeface="Yu Gothic" pitchFamily="34" charset="0"/>
+                <a:ea typeface="Yu Gothic" pitchFamily="34" charset="-122"/>
+                <a:cs typeface="Yu Gothic" pitchFamily="34" charset="-120"/>
+              </a:rPr>
+              <a:t>中小企業G社は自社でメールサーバを構築する代わりにクラウド型メールサービス（SaaS）を利用し、独自の業務アプリを開発する際は開発基盤が整ったPaaSを利用することで、サーバの保守負担を大きく減らしている。</a:t>
+            </a:r>
+            <a:endParaRPr lang="en-US" sz="850" dirty="0"/>
+          </a:p>
+        </p:txBody>
+      </p:sp>
+      <p:sp>
+        <p:nvSpPr>
+          <p:cNvPr id="20" name="Shape 18"/>
           <p:cNvSpPr/>
           <p:nvPr/>
         </p:nvSpPr>
         <p:spPr>
           <a:xfrm>
-            <a:off x="502920" y="5989320"/>
+            <a:off x="502920" y="5998464"/>
             <a:ext cx="11201400" cy="0"/>
           </a:xfrm>
           <a:prstGeom prst="line">
@@ -5397,13 +5460,13 @@
       </p:sp>
       <p:sp>
         <p:nvSpPr>
-          <p:cNvPr id="20" name="Shape 18"/>
+          <p:cNvPr id="21" name="Shape 19"/>
           <p:cNvSpPr/>
           <p:nvPr/>
         </p:nvSpPr>
         <p:spPr>
           <a:xfrm>
-            <a:off x="502920" y="6062472"/>
+            <a:off x="502920" y="6071616"/>
             <a:ext cx="329184" cy="329184"/>
           </a:xfrm>
           <a:prstGeom prst="ellipse">
@@ -5417,13 +5480,13 @@
       </p:sp>
       <p:sp>
         <p:nvSpPr>
-          <p:cNvPr id="21" name="Text 19"/>
-          <p:cNvSpPr txBox="1"/>
-          <p:nvPr/>
-        </p:nvSpPr>
-        <p:spPr>
-          <a:xfrm>
-            <a:off x="502920" y="6062472"/>
+          <p:cNvPr id="22" name="Text 20"/>
+          <p:cNvSpPr txBox="1"/>
+          <p:nvPr/>
+        </p:nvSpPr>
+        <p:spPr>
+          <a:xfrm>
+            <a:off x="502920" y="6071616"/>
             <a:ext cx="329184" cy="329184"/>
           </a:xfrm>
           <a:prstGeom prst="rect">
@@ -5456,13 +5519,13 @@
       </p:sp>
       <p:sp>
         <p:nvSpPr>
-          <p:cNvPr id="22" name="Text 20"/>
-          <p:cNvSpPr txBox="1"/>
-          <p:nvPr/>
-        </p:nvSpPr>
-        <p:spPr>
-          <a:xfrm>
-            <a:off x="914400" y="6062472"/>
+          <p:cNvPr id="23" name="Text 21"/>
+          <p:cNvSpPr txBox="1"/>
+          <p:nvPr/>
+        </p:nvSpPr>
+        <p:spPr>
+          <a:xfrm>
+            <a:off x="914400" y="6071616"/>
             <a:ext cx="1371600" cy="329184"/>
           </a:xfrm>
           <a:prstGeom prst="rect">
@@ -5495,13 +5558,13 @@
       </p:sp>
       <p:sp>
         <p:nvSpPr>
-          <p:cNvPr id="23" name="Shape 21"/>
+          <p:cNvPr id="24" name="Shape 22"/>
           <p:cNvSpPr/>
           <p:nvPr/>
         </p:nvSpPr>
         <p:spPr>
           <a:xfrm>
-            <a:off x="2331720" y="6062472"/>
+            <a:off x="2331720" y="6071616"/>
             <a:ext cx="0" cy="329184"/>
           </a:xfrm>
           <a:prstGeom prst="line">
@@ -5518,13 +5581,13 @@
       </p:sp>
       <p:sp>
         <p:nvSpPr>
-          <p:cNvPr id="24" name="Text 22"/>
-          <p:cNvSpPr txBox="1"/>
-          <p:nvPr/>
-        </p:nvSpPr>
-        <p:spPr>
-          <a:xfrm>
-            <a:off x="2514600" y="6044184"/>
+          <p:cNvPr id="25" name="Text 23"/>
+          <p:cNvSpPr txBox="1"/>
+          <p:nvPr/>
+        </p:nvSpPr>
+        <p:spPr>
+          <a:xfrm>
+            <a:off x="2514600" y="6053328"/>
             <a:ext cx="9189720" cy="365760"/>
           </a:xfrm>
           <a:prstGeom prst="rect">
@@ -5557,13 +5620,13 @@
       </p:sp>
       <p:sp>
         <p:nvSpPr>
-          <p:cNvPr id="25" name="Text 23"/>
-          <p:cNvSpPr txBox="1"/>
-          <p:nvPr/>
-        </p:nvSpPr>
-        <p:spPr>
-          <a:xfrm>
-            <a:off x="502920" y="6464808"/>
+          <p:cNvPr id="26" name="Text 24"/>
+          <p:cNvSpPr txBox="1"/>
+          <p:nvPr/>
+        </p:nvSpPr>
+        <p:spPr>
+          <a:xfrm>
+            <a:off x="502920" y="6473952"/>
             <a:ext cx="1417320" cy="219456"/>
           </a:xfrm>
           <a:prstGeom prst="rect">
@@ -5596,13 +5659,13 @@
       </p:sp>
       <p:sp>
         <p:nvSpPr>
-          <p:cNvPr id="26" name="Shape 24"/>
+          <p:cNvPr id="27" name="Shape 25"/>
           <p:cNvSpPr/>
           <p:nvPr/>
         </p:nvSpPr>
         <p:spPr>
           <a:xfrm>
-            <a:off x="2466594" y="6464808"/>
+            <a:off x="2466594" y="6473952"/>
             <a:ext cx="146304" cy="146304"/>
           </a:xfrm>
           <a:prstGeom prst="ellipse">
@@ -5621,13 +5684,13 @@
       </p:sp>
       <p:sp>
         <p:nvSpPr>
-          <p:cNvPr id="27" name="Text 25"/>
-          <p:cNvSpPr txBox="1"/>
-          <p:nvPr/>
-        </p:nvSpPr>
-        <p:spPr>
-          <a:xfrm>
-            <a:off x="2057400" y="6620256"/>
+          <p:cNvPr id="28" name="Text 26"/>
+          <p:cNvSpPr txBox="1"/>
+          <p:nvPr/>
+        </p:nvSpPr>
+        <p:spPr>
+          <a:xfrm>
+            <a:off x="2057400" y="6629400"/>
             <a:ext cx="964692" cy="173736"/>
           </a:xfrm>
           <a:prstGeom prst="rect">
@@ -5660,13 +5723,13 @@
       </p:sp>
       <p:sp>
         <p:nvSpPr>
-          <p:cNvPr id="28" name="Shape 26"/>
+          <p:cNvPr id="29" name="Shape 27"/>
           <p:cNvSpPr/>
           <p:nvPr/>
         </p:nvSpPr>
         <p:spPr>
           <a:xfrm>
-            <a:off x="3431286" y="6464808"/>
+            <a:off x="3431286" y="6473952"/>
             <a:ext cx="146304" cy="146304"/>
           </a:xfrm>
           <a:prstGeom prst="ellipse">
@@ -5685,13 +5748,13 @@
       </p:sp>
       <p:sp>
         <p:nvSpPr>
-          <p:cNvPr id="29" name="Text 27"/>
-          <p:cNvSpPr txBox="1"/>
-          <p:nvPr/>
-        </p:nvSpPr>
-        <p:spPr>
-          <a:xfrm>
-            <a:off x="3022092" y="6620256"/>
+          <p:cNvPr id="30" name="Text 28"/>
+          <p:cNvSpPr txBox="1"/>
+          <p:nvPr/>
+        </p:nvSpPr>
+        <p:spPr>
+          <a:xfrm>
+            <a:off x="3022092" y="6629400"/>
             <a:ext cx="964692" cy="173736"/>
           </a:xfrm>
           <a:prstGeom prst="rect">
@@ -5724,13 +5787,13 @@
       </p:sp>
       <p:sp>
         <p:nvSpPr>
-          <p:cNvPr id="30" name="Shape 28"/>
+          <p:cNvPr id="31" name="Shape 29"/>
           <p:cNvSpPr/>
           <p:nvPr/>
         </p:nvSpPr>
         <p:spPr>
           <a:xfrm>
-            <a:off x="4395978" y="6464808"/>
+            <a:off x="4395978" y="6473952"/>
             <a:ext cx="146304" cy="146304"/>
           </a:xfrm>
           <a:prstGeom prst="ellipse">
@@ -5749,13 +5812,13 @@
       </p:sp>
       <p:sp>
         <p:nvSpPr>
-          <p:cNvPr id="31" name="Text 29"/>
-          <p:cNvSpPr txBox="1"/>
-          <p:nvPr/>
-        </p:nvSpPr>
-        <p:spPr>
-          <a:xfrm>
-            <a:off x="3986784" y="6620256"/>
+          <p:cNvPr id="32" name="Text 30"/>
+          <p:cNvSpPr txBox="1"/>
+          <p:nvPr/>
+        </p:nvSpPr>
+        <p:spPr>
+          <a:xfrm>
+            <a:off x="3986784" y="6629400"/>
             <a:ext cx="964692" cy="173736"/>
           </a:xfrm>
           <a:prstGeom prst="rect">
@@ -5788,13 +5851,13 @@
       </p:sp>
       <p:sp>
         <p:nvSpPr>
-          <p:cNvPr id="32" name="Shape 30"/>
+          <p:cNvPr id="33" name="Shape 31"/>
           <p:cNvSpPr/>
           <p:nvPr/>
         </p:nvSpPr>
         <p:spPr>
           <a:xfrm>
-            <a:off x="5360670" y="6464808"/>
+            <a:off x="5360670" y="6473952"/>
             <a:ext cx="146304" cy="146304"/>
           </a:xfrm>
           <a:prstGeom prst="ellipse">
@@ -5813,13 +5876,13 @@
       </p:sp>
       <p:sp>
         <p:nvSpPr>
-          <p:cNvPr id="33" name="Text 31"/>
-          <p:cNvSpPr txBox="1"/>
-          <p:nvPr/>
-        </p:nvSpPr>
-        <p:spPr>
-          <a:xfrm>
-            <a:off x="4951476" y="6620256"/>
+          <p:cNvPr id="34" name="Text 32"/>
+          <p:cNvSpPr txBox="1"/>
+          <p:nvPr/>
+        </p:nvSpPr>
+        <p:spPr>
+          <a:xfrm>
+            <a:off x="4951476" y="6629400"/>
             <a:ext cx="964692" cy="173736"/>
           </a:xfrm>
           <a:prstGeom prst="rect">
@@ -5852,13 +5915,13 @@
       </p:sp>
       <p:sp>
         <p:nvSpPr>
-          <p:cNvPr id="34" name="Shape 32"/>
+          <p:cNvPr id="35" name="Shape 33"/>
           <p:cNvSpPr/>
           <p:nvPr/>
         </p:nvSpPr>
         <p:spPr>
           <a:xfrm>
-            <a:off x="6325362" y="6464808"/>
+            <a:off x="6325362" y="6473952"/>
             <a:ext cx="146304" cy="146304"/>
           </a:xfrm>
           <a:prstGeom prst="ellipse">
@@ -5877,13 +5940,13 @@
       </p:sp>
       <p:sp>
         <p:nvSpPr>
-          <p:cNvPr id="35" name="Text 33"/>
-          <p:cNvSpPr txBox="1"/>
-          <p:nvPr/>
-        </p:nvSpPr>
-        <p:spPr>
-          <a:xfrm>
-            <a:off x="5916168" y="6620256"/>
+          <p:cNvPr id="36" name="Text 34"/>
+          <p:cNvSpPr txBox="1"/>
+          <p:nvPr/>
+        </p:nvSpPr>
+        <p:spPr>
+          <a:xfrm>
+            <a:off x="5916168" y="6629400"/>
             <a:ext cx="964692" cy="173736"/>
           </a:xfrm>
           <a:prstGeom prst="rect">
@@ -5916,13 +5979,13 @@
       </p:sp>
       <p:sp>
         <p:nvSpPr>
-          <p:cNvPr id="36" name="Shape 34"/>
+          <p:cNvPr id="37" name="Shape 35"/>
           <p:cNvSpPr/>
           <p:nvPr/>
         </p:nvSpPr>
         <p:spPr>
           <a:xfrm>
-            <a:off x="7290054" y="6464808"/>
+            <a:off x="7290054" y="6473952"/>
             <a:ext cx="146304" cy="146304"/>
           </a:xfrm>
           <a:prstGeom prst="ellipse">
@@ -5941,13 +6004,13 @@
       </p:sp>
       <p:sp>
         <p:nvSpPr>
-          <p:cNvPr id="37" name="Text 35"/>
-          <p:cNvSpPr txBox="1"/>
-          <p:nvPr/>
-        </p:nvSpPr>
-        <p:spPr>
-          <a:xfrm>
-            <a:off x="6880860" y="6620256"/>
+          <p:cNvPr id="38" name="Text 36"/>
+          <p:cNvSpPr txBox="1"/>
+          <p:nvPr/>
+        </p:nvSpPr>
+        <p:spPr>
+          <a:xfrm>
+            <a:off x="6880860" y="6629400"/>
             <a:ext cx="964692" cy="173736"/>
           </a:xfrm>
           <a:prstGeom prst="rect">
@@ -5980,13 +6043,13 @@
       </p:sp>
       <p:sp>
         <p:nvSpPr>
-          <p:cNvPr id="38" name="Shape 36"/>
+          <p:cNvPr id="39" name="Shape 37"/>
           <p:cNvSpPr/>
           <p:nvPr/>
         </p:nvSpPr>
         <p:spPr>
           <a:xfrm>
-            <a:off x="8254746" y="6464808"/>
+            <a:off x="8254746" y="6473952"/>
             <a:ext cx="146304" cy="146304"/>
           </a:xfrm>
           <a:prstGeom prst="ellipse">
@@ -6005,13 +6068,13 @@
       </p:sp>
       <p:sp>
         <p:nvSpPr>
-          <p:cNvPr id="39" name="Text 37"/>
-          <p:cNvSpPr txBox="1"/>
-          <p:nvPr/>
-        </p:nvSpPr>
-        <p:spPr>
-          <a:xfrm>
-            <a:off x="7845552" y="6620256"/>
+          <p:cNvPr id="40" name="Text 38"/>
+          <p:cNvSpPr txBox="1"/>
+          <p:nvPr/>
+        </p:nvSpPr>
+        <p:spPr>
+          <a:xfrm>
+            <a:off x="7845552" y="6629400"/>
             <a:ext cx="964692" cy="173736"/>
           </a:xfrm>
           <a:prstGeom prst="rect">
@@ -6044,13 +6107,13 @@
       </p:sp>
       <p:sp>
         <p:nvSpPr>
-          <p:cNvPr id="40" name="Shape 38"/>
+          <p:cNvPr id="41" name="Shape 39"/>
           <p:cNvSpPr/>
           <p:nvPr/>
         </p:nvSpPr>
         <p:spPr>
           <a:xfrm>
-            <a:off x="9219438" y="6464808"/>
+            <a:off x="9219438" y="6473952"/>
             <a:ext cx="146304" cy="146304"/>
           </a:xfrm>
           <a:prstGeom prst="ellipse">
@@ -6069,13 +6132,13 @@
       </p:sp>
       <p:sp>
         <p:nvSpPr>
-          <p:cNvPr id="41" name="Text 39"/>
-          <p:cNvSpPr txBox="1"/>
-          <p:nvPr/>
-        </p:nvSpPr>
-        <p:spPr>
-          <a:xfrm>
-            <a:off x="8810244" y="6620256"/>
+          <p:cNvPr id="42" name="Text 40"/>
+          <p:cNvSpPr txBox="1"/>
+          <p:nvPr/>
+        </p:nvSpPr>
+        <p:spPr>
+          <a:xfrm>
+            <a:off x="8810244" y="6629400"/>
             <a:ext cx="964692" cy="173736"/>
           </a:xfrm>
           <a:prstGeom prst="rect">
@@ -6108,13 +6171,13 @@
       </p:sp>
       <p:sp>
         <p:nvSpPr>
-          <p:cNvPr id="42" name="Shape 40"/>
+          <p:cNvPr id="43" name="Shape 41"/>
           <p:cNvSpPr/>
           <p:nvPr/>
         </p:nvSpPr>
         <p:spPr>
           <a:xfrm>
-            <a:off x="10184130" y="6464808"/>
+            <a:off x="10184130" y="6473952"/>
             <a:ext cx="146304" cy="146304"/>
           </a:xfrm>
           <a:prstGeom prst="ellipse">
@@ -6133,13 +6196,13 @@
       </p:sp>
       <p:sp>
         <p:nvSpPr>
-          <p:cNvPr id="43" name="Text 41"/>
-          <p:cNvSpPr txBox="1"/>
-          <p:nvPr/>
-        </p:nvSpPr>
-        <p:spPr>
-          <a:xfrm>
-            <a:off x="9774936" y="6620256"/>
+          <p:cNvPr id="44" name="Text 42"/>
+          <p:cNvSpPr txBox="1"/>
+          <p:nvPr/>
+        </p:nvSpPr>
+        <p:spPr>
+          <a:xfrm>
+            <a:off x="9774936" y="6629400"/>
             <a:ext cx="964692" cy="173736"/>
           </a:xfrm>
           <a:prstGeom prst="rect">
@@ -6172,13 +6235,13 @@
       </p:sp>
       <p:sp>
         <p:nvSpPr>
-          <p:cNvPr id="44" name="Shape 42"/>
+          <p:cNvPr id="45" name="Shape 43"/>
           <p:cNvSpPr/>
           <p:nvPr/>
         </p:nvSpPr>
         <p:spPr>
           <a:xfrm>
-            <a:off x="11148822" y="6464808"/>
+            <a:off x="11148822" y="6473952"/>
             <a:ext cx="146304" cy="146304"/>
           </a:xfrm>
           <a:prstGeom prst="ellipse">
@@ -6197,13 +6260,13 @@
       </p:sp>
       <p:sp>
         <p:nvSpPr>
-          <p:cNvPr id="45" name="Text 43"/>
-          <p:cNvSpPr txBox="1"/>
-          <p:nvPr/>
-        </p:nvSpPr>
-        <p:spPr>
-          <a:xfrm>
-            <a:off x="10739628" y="6620256"/>
+          <p:cNvPr id="46" name="Text 44"/>
+          <p:cNvSpPr txBox="1"/>
+          <p:nvPr/>
+        </p:nvSpPr>
+        <p:spPr>
+          <a:xfrm>
+            <a:off x="10739628" y="6629400"/>
             <a:ext cx="964692" cy="173736"/>
           </a:xfrm>
           <a:prstGeom prst="rect">
@@ -17299,7 +17362,70 @@
       </p:sp>
       <p:sp>
         <p:nvSpPr>
-          <p:cNvPr id="19" name="Shape 17"/>
+          <p:cNvPr id="19" name="Text 17"/>
+          <p:cNvSpPr txBox="1"/>
+          <p:nvPr/>
+        </p:nvSpPr>
+        <p:spPr>
+          <a:xfrm>
+            <a:off x="502920" y="3557016"/>
+            <a:ext cx="11201400" cy="685800"/>
+          </a:xfrm>
+          <a:prstGeom prst="rect">
+            <a:avLst/>
+          </a:prstGeom>
+          <a:noFill/>
+          <a:ln/>
+        </p:spPr>
+        <p:txBody>
+          <a:bodyPr wrap="square" lIns="0" tIns="0" rIns="0" bIns="0" rtlCol="0" anchor="ctr"/>
+          <a:lstStyle/>
+          <a:p>
+            <a:pPr indent="0" marL="0">
+              <a:lnSpc>
+                <a:spcPct val="120000"/>
+              </a:lnSpc>
+              <a:buNone/>
+            </a:pPr>
+            <a:r>
+              <a:rPr lang="en-US" sz="850" b="1" dirty="0">
+                <a:solidFill>
+                  <a:srgbClr val="8A8A8A"/>
+                </a:solidFill>
+                <a:latin typeface="Consolas" pitchFamily="34" charset="0"/>
+                <a:ea typeface="Consolas" pitchFamily="34" charset="-122"/>
+                <a:cs typeface="Consolas" pitchFamily="34" charset="-120"/>
+              </a:rPr>
+              <a:t>具体例
+</a:t>
+            </a:r>
+            <a:endParaRPr lang="en-US" sz="850" dirty="0"/>
+          </a:p>
+          <a:p>
+            <a:pPr indent="0" marL="0">
+              <a:lnSpc>
+                <a:spcPct val="120000"/>
+              </a:lnSpc>
+              <a:buNone/>
+            </a:pPr>
+            <a:r>
+              <a:rPr lang="en-US" sz="1050" dirty="0">
+                <a:solidFill>
+                  <a:srgbClr val="171717"/>
+                </a:solidFill>
+                <a:latin typeface="Yu Gothic" pitchFamily="34" charset="0"/>
+                <a:ea typeface="Yu Gothic" pitchFamily="34" charset="-122"/>
+                <a:cs typeface="Yu Gothic" pitchFamily="34" charset="-120"/>
+              </a:rPr>
+              <a:t>製造業A社は「多品種少量生産への対応力強化」という経営戦略のもとCIOが全体最適化計画を策定し、そこから生産管理システム刷新という個別システム化計画へと落とし込んだ。</a:t>
+            </a:r>
+            <a:endParaRPr lang="en-US" sz="850" dirty="0"/>
+          </a:p>
+        </p:txBody>
+      </p:sp>
+      <p:sp>
+        <p:nvSpPr>
+          <p:cNvPr id="20" name="Shape 18"/>
           <p:cNvSpPr/>
           <p:nvPr/>
         </p:nvSpPr>
@@ -17322,7 +17448,7 @@
       </p:sp>
       <p:sp>
         <p:nvSpPr>
-          <p:cNvPr id="20" name="Shape 18"/>
+          <p:cNvPr id="21" name="Shape 19"/>
           <p:cNvSpPr/>
           <p:nvPr/>
         </p:nvSpPr>
@@ -17342,7 +17468,7 @@
       </p:sp>
       <p:sp>
         <p:nvSpPr>
-          <p:cNvPr id="21" name="Text 19"/>
+          <p:cNvPr id="22" name="Text 20"/>
           <p:cNvSpPr txBox="1"/>
           <p:nvPr/>
         </p:nvSpPr>
@@ -17381,7 +17507,7 @@
       </p:sp>
       <p:sp>
         <p:nvSpPr>
-          <p:cNvPr id="22" name="Text 20"/>
+          <p:cNvPr id="23" name="Text 21"/>
           <p:cNvSpPr txBox="1"/>
           <p:nvPr/>
         </p:nvSpPr>
@@ -17420,7 +17546,7 @@
       </p:sp>
       <p:sp>
         <p:nvSpPr>
-          <p:cNvPr id="23" name="Shape 21"/>
+          <p:cNvPr id="24" name="Shape 22"/>
           <p:cNvSpPr/>
           <p:nvPr/>
         </p:nvSpPr>
@@ -17443,7 +17569,7 @@
       </p:sp>
       <p:sp>
         <p:nvSpPr>
-          <p:cNvPr id="24" name="Text 22"/>
+          <p:cNvPr id="25" name="Text 23"/>
           <p:cNvSpPr txBox="1"/>
           <p:nvPr/>
         </p:nvSpPr>
@@ -17482,7 +17608,7 @@
       </p:sp>
       <p:sp>
         <p:nvSpPr>
-          <p:cNvPr id="25" name="Text 23"/>
+          <p:cNvPr id="26" name="Text 24"/>
           <p:cNvSpPr txBox="1"/>
           <p:nvPr/>
         </p:nvSpPr>
@@ -17521,7 +17647,7 @@
       </p:sp>
       <p:sp>
         <p:nvSpPr>
-          <p:cNvPr id="26" name="Shape 24"/>
+          <p:cNvPr id="27" name="Shape 25"/>
           <p:cNvSpPr/>
           <p:nvPr/>
         </p:nvSpPr>
@@ -17546,7 +17672,7 @@
       </p:sp>
       <p:sp>
         <p:nvSpPr>
-          <p:cNvPr id="27" name="Text 25"/>
+          <p:cNvPr id="28" name="Text 26"/>
           <p:cNvSpPr txBox="1"/>
           <p:nvPr/>
         </p:nvSpPr>
@@ -17585,7 +17711,7 @@
       </p:sp>
       <p:sp>
         <p:nvSpPr>
-          <p:cNvPr id="28" name="Shape 26"/>
+          <p:cNvPr id="29" name="Shape 27"/>
           <p:cNvSpPr/>
           <p:nvPr/>
         </p:nvSpPr>
@@ -17610,7 +17736,7 @@
       </p:sp>
       <p:sp>
         <p:nvSpPr>
-          <p:cNvPr id="29" name="Text 27"/>
+          <p:cNvPr id="30" name="Text 28"/>
           <p:cNvSpPr txBox="1"/>
           <p:nvPr/>
         </p:nvSpPr>
@@ -17649,7 +17775,7 @@
       </p:sp>
       <p:sp>
         <p:nvSpPr>
-          <p:cNvPr id="30" name="Shape 28"/>
+          <p:cNvPr id="31" name="Shape 29"/>
           <p:cNvSpPr/>
           <p:nvPr/>
         </p:nvSpPr>
@@ -17674,7 +17800,7 @@
       </p:sp>
       <p:sp>
         <p:nvSpPr>
-          <p:cNvPr id="31" name="Text 29"/>
+          <p:cNvPr id="32" name="Text 30"/>
           <p:cNvSpPr txBox="1"/>
           <p:nvPr/>
         </p:nvSpPr>
@@ -17713,7 +17839,7 @@
       </p:sp>
       <p:sp>
         <p:nvSpPr>
-          <p:cNvPr id="32" name="Shape 30"/>
+          <p:cNvPr id="33" name="Shape 31"/>
           <p:cNvSpPr/>
           <p:nvPr/>
         </p:nvSpPr>
@@ -17738,7 +17864,7 @@
       </p:sp>
       <p:sp>
         <p:nvSpPr>
-          <p:cNvPr id="33" name="Text 31"/>
+          <p:cNvPr id="34" name="Text 32"/>
           <p:cNvSpPr txBox="1"/>
           <p:nvPr/>
         </p:nvSpPr>
@@ -17777,7 +17903,7 @@
       </p:sp>
       <p:sp>
         <p:nvSpPr>
-          <p:cNvPr id="34" name="Shape 32"/>
+          <p:cNvPr id="35" name="Shape 33"/>
           <p:cNvSpPr/>
           <p:nvPr/>
         </p:nvSpPr>
@@ -17802,7 +17928,7 @@
       </p:sp>
       <p:sp>
         <p:nvSpPr>
-          <p:cNvPr id="35" name="Text 33"/>
+          <p:cNvPr id="36" name="Text 34"/>
           <p:cNvSpPr txBox="1"/>
           <p:nvPr/>
         </p:nvSpPr>
@@ -17841,7 +17967,7 @@
       </p:sp>
       <p:sp>
         <p:nvSpPr>
-          <p:cNvPr id="36" name="Shape 34"/>
+          <p:cNvPr id="37" name="Shape 35"/>
           <p:cNvSpPr/>
           <p:nvPr/>
         </p:nvSpPr>
@@ -17866,7 +17992,7 @@
       </p:sp>
       <p:sp>
         <p:nvSpPr>
-          <p:cNvPr id="37" name="Text 35"/>
+          <p:cNvPr id="38" name="Text 36"/>
           <p:cNvSpPr txBox="1"/>
           <p:nvPr/>
         </p:nvSpPr>
@@ -17905,7 +18031,7 @@
       </p:sp>
       <p:sp>
         <p:nvSpPr>
-          <p:cNvPr id="38" name="Shape 36"/>
+          <p:cNvPr id="39" name="Shape 37"/>
           <p:cNvSpPr/>
           <p:nvPr/>
         </p:nvSpPr>
@@ -17930,7 +18056,7 @@
       </p:sp>
       <p:sp>
         <p:nvSpPr>
-          <p:cNvPr id="39" name="Text 37"/>
+          <p:cNvPr id="40" name="Text 38"/>
           <p:cNvSpPr txBox="1"/>
           <p:nvPr/>
         </p:nvSpPr>
@@ -17969,7 +18095,7 @@
       </p:sp>
       <p:sp>
         <p:nvSpPr>
-          <p:cNvPr id="40" name="Shape 38"/>
+          <p:cNvPr id="41" name="Shape 39"/>
           <p:cNvSpPr/>
           <p:nvPr/>
         </p:nvSpPr>
@@ -17994,7 +18120,7 @@
       </p:sp>
       <p:sp>
         <p:nvSpPr>
-          <p:cNvPr id="41" name="Text 39"/>
+          <p:cNvPr id="42" name="Text 40"/>
           <p:cNvSpPr txBox="1"/>
           <p:nvPr/>
         </p:nvSpPr>
@@ -18033,7 +18159,7 @@
       </p:sp>
       <p:sp>
         <p:nvSpPr>
-          <p:cNvPr id="42" name="Shape 40"/>
+          <p:cNvPr id="43" name="Shape 41"/>
           <p:cNvSpPr/>
           <p:nvPr/>
         </p:nvSpPr>
@@ -18058,7 +18184,7 @@
       </p:sp>
       <p:sp>
         <p:nvSpPr>
-          <p:cNvPr id="43" name="Text 41"/>
+          <p:cNvPr id="44" name="Text 42"/>
           <p:cNvSpPr txBox="1"/>
           <p:nvPr/>
         </p:nvSpPr>
@@ -18097,7 +18223,7 @@
       </p:sp>
       <p:sp>
         <p:nvSpPr>
-          <p:cNvPr id="44" name="Shape 42"/>
+          <p:cNvPr id="45" name="Shape 43"/>
           <p:cNvSpPr/>
           <p:nvPr/>
         </p:nvSpPr>
@@ -18122,7 +18248,7 @@
       </p:sp>
       <p:sp>
         <p:nvSpPr>
-          <p:cNvPr id="45" name="Text 43"/>
+          <p:cNvPr id="46" name="Text 44"/>
           <p:cNvSpPr txBox="1"/>
           <p:nvPr/>
         </p:nvSpPr>
@@ -18878,7 +19004,70 @@
       </p:sp>
       <p:sp>
         <p:nvSpPr>
-          <p:cNvPr id="22" name="Shape 20"/>
+          <p:cNvPr id="22" name="Text 20"/>
+          <p:cNvSpPr txBox="1"/>
+          <p:nvPr/>
+        </p:nvSpPr>
+        <p:spPr>
+          <a:xfrm>
+            <a:off x="502920" y="3703320"/>
+            <a:ext cx="11201400" cy="685800"/>
+          </a:xfrm>
+          <a:prstGeom prst="rect">
+            <a:avLst/>
+          </a:prstGeom>
+          <a:noFill/>
+          <a:ln/>
+        </p:spPr>
+        <p:txBody>
+          <a:bodyPr wrap="square" lIns="0" tIns="0" rIns="0" bIns="0" rtlCol="0" anchor="ctr"/>
+          <a:lstStyle/>
+          <a:p>
+            <a:pPr indent="0" marL="0">
+              <a:lnSpc>
+                <a:spcPct val="120000"/>
+              </a:lnSpc>
+              <a:buNone/>
+            </a:pPr>
+            <a:r>
+              <a:rPr lang="en-US" sz="850" b="1" dirty="0">
+                <a:solidFill>
+                  <a:srgbClr val="8A8A8A"/>
+                </a:solidFill>
+                <a:latin typeface="Consolas" pitchFamily="34" charset="0"/>
+                <a:ea typeface="Consolas" pitchFamily="34" charset="-122"/>
+                <a:cs typeface="Consolas" pitchFamily="34" charset="-120"/>
+              </a:rPr>
+              <a:t>具体例
+</a:t>
+            </a:r>
+            <a:endParaRPr lang="en-US" sz="850" dirty="0"/>
+          </a:p>
+          <a:p>
+            <a:pPr indent="0" marL="0">
+              <a:lnSpc>
+                <a:spcPct val="120000"/>
+              </a:lnSpc>
+              <a:buNone/>
+            </a:pPr>
+            <a:r>
+              <a:rPr lang="en-US" sz="1050" dirty="0">
+                <a:solidFill>
+                  <a:srgbClr val="171717"/>
+                </a:solidFill>
+                <a:latin typeface="Yu Gothic" pitchFamily="34" charset="0"/>
+                <a:ea typeface="Yu Gothic" pitchFamily="34" charset="-122"/>
+                <a:cs typeface="Yu Gothic" pitchFamily="34" charset="-120"/>
+              </a:rPr>
+              <a:t>卸売業D社は紙の伝票をExcelに入力するだけの単なるデジタル化にとどまらず、取引先とのデータ連携・自動集計まで一体化し、発注判断をデータに基づいて行えるようビジネスの進め方自体を変えるDXに取り組んだ。</a:t>
+            </a:r>
+            <a:endParaRPr lang="en-US" sz="850" dirty="0"/>
+          </a:p>
+        </p:txBody>
+      </p:sp>
+      <p:sp>
+        <p:nvSpPr>
+          <p:cNvPr id="23" name="Shape 21"/>
           <p:cNvSpPr/>
           <p:nvPr/>
         </p:nvSpPr>
@@ -18901,7 +19090,7 @@
       </p:sp>
       <p:sp>
         <p:nvSpPr>
-          <p:cNvPr id="23" name="Shape 21"/>
+          <p:cNvPr id="24" name="Shape 22"/>
           <p:cNvSpPr/>
           <p:nvPr/>
         </p:nvSpPr>
@@ -18921,7 +19110,7 @@
       </p:sp>
       <p:sp>
         <p:nvSpPr>
-          <p:cNvPr id="24" name="Text 22"/>
+          <p:cNvPr id="25" name="Text 23"/>
           <p:cNvSpPr txBox="1"/>
           <p:nvPr/>
         </p:nvSpPr>
@@ -18960,7 +19149,7 @@
       </p:sp>
       <p:sp>
         <p:nvSpPr>
-          <p:cNvPr id="25" name="Text 23"/>
+          <p:cNvPr id="26" name="Text 24"/>
           <p:cNvSpPr txBox="1"/>
           <p:nvPr/>
         </p:nvSpPr>
@@ -18999,7 +19188,7 @@
       </p:sp>
       <p:sp>
         <p:nvSpPr>
-          <p:cNvPr id="26" name="Shape 24"/>
+          <p:cNvPr id="27" name="Shape 25"/>
           <p:cNvSpPr/>
           <p:nvPr/>
         </p:nvSpPr>
@@ -19022,7 +19211,7 @@
       </p:sp>
       <p:sp>
         <p:nvSpPr>
-          <p:cNvPr id="27" name="Text 25"/>
+          <p:cNvPr id="28" name="Text 26"/>
           <p:cNvSpPr txBox="1"/>
           <p:nvPr/>
         </p:nvSpPr>
@@ -19061,7 +19250,7 @@
       </p:sp>
       <p:sp>
         <p:nvSpPr>
-          <p:cNvPr id="28" name="Text 26"/>
+          <p:cNvPr id="29" name="Text 27"/>
           <p:cNvSpPr txBox="1"/>
           <p:nvPr/>
         </p:nvSpPr>
@@ -19100,7 +19289,7 @@
       </p:sp>
       <p:sp>
         <p:nvSpPr>
-          <p:cNvPr id="29" name="Shape 27"/>
+          <p:cNvPr id="30" name="Shape 28"/>
           <p:cNvSpPr/>
           <p:nvPr/>
         </p:nvSpPr>
@@ -19125,7 +19314,7 @@
       </p:sp>
       <p:sp>
         <p:nvSpPr>
-          <p:cNvPr id="30" name="Text 28"/>
+          <p:cNvPr id="31" name="Text 29"/>
           <p:cNvSpPr txBox="1"/>
           <p:nvPr/>
         </p:nvSpPr>
@@ -19164,7 +19353,7 @@
       </p:sp>
       <p:sp>
         <p:nvSpPr>
-          <p:cNvPr id="31" name="Shape 29"/>
+          <p:cNvPr id="32" name="Shape 30"/>
           <p:cNvSpPr/>
           <p:nvPr/>
         </p:nvSpPr>
@@ -19189,7 +19378,7 @@
       </p:sp>
       <p:sp>
         <p:nvSpPr>
-          <p:cNvPr id="32" name="Text 30"/>
+          <p:cNvPr id="33" name="Text 31"/>
           <p:cNvSpPr txBox="1"/>
           <p:nvPr/>
         </p:nvSpPr>
@@ -19228,7 +19417,7 @@
       </p:sp>
       <p:sp>
         <p:nvSpPr>
-          <p:cNvPr id="33" name="Shape 31"/>
+          <p:cNvPr id="34" name="Shape 32"/>
           <p:cNvSpPr/>
           <p:nvPr/>
         </p:nvSpPr>
@@ -19253,7 +19442,7 @@
       </p:sp>
       <p:sp>
         <p:nvSpPr>
-          <p:cNvPr id="34" name="Text 32"/>
+          <p:cNvPr id="35" name="Text 33"/>
           <p:cNvSpPr txBox="1"/>
           <p:nvPr/>
         </p:nvSpPr>
@@ -19292,7 +19481,7 @@
       </p:sp>
       <p:sp>
         <p:nvSpPr>
-          <p:cNvPr id="35" name="Shape 33"/>
+          <p:cNvPr id="36" name="Shape 34"/>
           <p:cNvSpPr/>
           <p:nvPr/>
         </p:nvSpPr>
@@ -19317,7 +19506,7 @@
       </p:sp>
       <p:sp>
         <p:nvSpPr>
-          <p:cNvPr id="36" name="Text 34"/>
+          <p:cNvPr id="37" name="Text 35"/>
           <p:cNvSpPr txBox="1"/>
           <p:nvPr/>
         </p:nvSpPr>
@@ -19356,7 +19545,7 @@
       </p:sp>
       <p:sp>
         <p:nvSpPr>
-          <p:cNvPr id="37" name="Shape 35"/>
+          <p:cNvPr id="38" name="Shape 36"/>
           <p:cNvSpPr/>
           <p:nvPr/>
         </p:nvSpPr>
@@ -19381,7 +19570,7 @@
       </p:sp>
       <p:sp>
         <p:nvSpPr>
-          <p:cNvPr id="38" name="Text 36"/>
+          <p:cNvPr id="39" name="Text 37"/>
           <p:cNvSpPr txBox="1"/>
           <p:nvPr/>
         </p:nvSpPr>
@@ -19420,7 +19609,7 @@
       </p:sp>
       <p:sp>
         <p:nvSpPr>
-          <p:cNvPr id="39" name="Shape 37"/>
+          <p:cNvPr id="40" name="Shape 38"/>
           <p:cNvSpPr/>
           <p:nvPr/>
         </p:nvSpPr>
@@ -19445,7 +19634,7 @@
       </p:sp>
       <p:sp>
         <p:nvSpPr>
-          <p:cNvPr id="40" name="Text 38"/>
+          <p:cNvPr id="41" name="Text 39"/>
           <p:cNvSpPr txBox="1"/>
           <p:nvPr/>
         </p:nvSpPr>
@@ -19484,7 +19673,7 @@
       </p:sp>
       <p:sp>
         <p:nvSpPr>
-          <p:cNvPr id="41" name="Shape 39"/>
+          <p:cNvPr id="42" name="Shape 40"/>
           <p:cNvSpPr/>
           <p:nvPr/>
         </p:nvSpPr>
@@ -19509,7 +19698,7 @@
       </p:sp>
       <p:sp>
         <p:nvSpPr>
-          <p:cNvPr id="42" name="Text 40"/>
+          <p:cNvPr id="43" name="Text 41"/>
           <p:cNvSpPr txBox="1"/>
           <p:nvPr/>
         </p:nvSpPr>
@@ -19548,7 +19737,7 @@
       </p:sp>
       <p:sp>
         <p:nvSpPr>
-          <p:cNvPr id="43" name="Shape 41"/>
+          <p:cNvPr id="44" name="Shape 42"/>
           <p:cNvSpPr/>
           <p:nvPr/>
         </p:nvSpPr>
@@ -19573,7 +19762,7 @@
       </p:sp>
       <p:sp>
         <p:nvSpPr>
-          <p:cNvPr id="44" name="Text 42"/>
+          <p:cNvPr id="45" name="Text 43"/>
           <p:cNvSpPr txBox="1"/>
           <p:nvPr/>
         </p:nvSpPr>
@@ -19612,7 +19801,7 @@
       </p:sp>
       <p:sp>
         <p:nvSpPr>
-          <p:cNvPr id="45" name="Shape 43"/>
+          <p:cNvPr id="46" name="Shape 44"/>
           <p:cNvSpPr/>
           <p:nvPr/>
         </p:nvSpPr>
@@ -19637,7 +19826,7 @@
       </p:sp>
       <p:sp>
         <p:nvSpPr>
-          <p:cNvPr id="46" name="Text 44"/>
+          <p:cNvPr id="47" name="Text 45"/>
           <p:cNvSpPr txBox="1"/>
           <p:nvPr/>
         </p:nvSpPr>
@@ -19676,7 +19865,7 @@
       </p:sp>
       <p:sp>
         <p:nvSpPr>
-          <p:cNvPr id="47" name="Shape 45"/>
+          <p:cNvPr id="48" name="Shape 46"/>
           <p:cNvSpPr/>
           <p:nvPr/>
         </p:nvSpPr>
@@ -19701,7 +19890,7 @@
       </p:sp>
       <p:sp>
         <p:nvSpPr>
-          <p:cNvPr id="48" name="Text 46"/>
+          <p:cNvPr id="49" name="Text 47"/>
           <p:cNvSpPr txBox="1"/>
           <p:nvPr/>
         </p:nvSpPr>
@@ -20156,7 +20345,70 @@
       </p:sp>
       <p:sp>
         <p:nvSpPr>
-          <p:cNvPr id="13" name="Shape 11"/>
+          <p:cNvPr id="13" name="Text 11"/>
+          <p:cNvSpPr txBox="1"/>
+          <p:nvPr/>
+        </p:nvSpPr>
+        <p:spPr>
+          <a:xfrm>
+            <a:off x="502920" y="4233672"/>
+            <a:ext cx="11201400" cy="685800"/>
+          </a:xfrm>
+          <a:prstGeom prst="rect">
+            <a:avLst/>
+          </a:prstGeom>
+          <a:noFill/>
+          <a:ln/>
+        </p:spPr>
+        <p:txBody>
+          <a:bodyPr wrap="square" lIns="0" tIns="0" rIns="0" bIns="0" rtlCol="0" anchor="ctr"/>
+          <a:lstStyle/>
+          <a:p>
+            <a:pPr indent="0" marL="0">
+              <a:lnSpc>
+                <a:spcPct val="120000"/>
+              </a:lnSpc>
+              <a:buNone/>
+            </a:pPr>
+            <a:r>
+              <a:rPr lang="en-US" sz="850" b="1" dirty="0">
+                <a:solidFill>
+                  <a:srgbClr val="8A8A8A"/>
+                </a:solidFill>
+                <a:latin typeface="Consolas" pitchFamily="34" charset="0"/>
+                <a:ea typeface="Consolas" pitchFamily="34" charset="-122"/>
+                <a:cs typeface="Consolas" pitchFamily="34" charset="-120"/>
+              </a:rPr>
+              <a:t>具体例
+</a:t>
+            </a:r>
+            <a:endParaRPr lang="en-US" sz="850" dirty="0"/>
+          </a:p>
+          <a:p>
+            <a:pPr indent="0" marL="0">
+              <a:lnSpc>
+                <a:spcPct val="120000"/>
+              </a:lnSpc>
+              <a:buNone/>
+            </a:pPr>
+            <a:r>
+              <a:rPr lang="en-US" sz="1050" dirty="0">
+                <a:solidFill>
+                  <a:srgbClr val="171717"/>
+                </a:solidFill>
+                <a:latin typeface="Yu Gothic" pitchFamily="34" charset="0"/>
+                <a:ea typeface="Yu Gothic" pitchFamily="34" charset="-122"/>
+                <a:cs typeface="Yu Gothic" pitchFamily="34" charset="-120"/>
+              </a:rPr>
+              <a:t>社内システム部門はシステムの利用権限を「申請→上長の承認→管理者が付与」という内部統制の手順にしている。この仕組みが機能しているかを、開発を担当した部門とは独立した監査人が定期的にチェックするのがシステム監査。</a:t>
+            </a:r>
+            <a:endParaRPr lang="en-US" sz="850" dirty="0"/>
+          </a:p>
+        </p:txBody>
+      </p:sp>
+      <p:sp>
+        <p:nvSpPr>
+          <p:cNvPr id="14" name="Shape 12"/>
           <p:cNvSpPr/>
           <p:nvPr/>
         </p:nvSpPr>
@@ -20179,7 +20431,7 @@
       </p:sp>
       <p:sp>
         <p:nvSpPr>
-          <p:cNvPr id="14" name="Shape 12"/>
+          <p:cNvPr id="15" name="Shape 13"/>
           <p:cNvSpPr/>
           <p:nvPr/>
         </p:nvSpPr>
@@ -20199,7 +20451,7 @@
       </p:sp>
       <p:sp>
         <p:nvSpPr>
-          <p:cNvPr id="15" name="Text 13"/>
+          <p:cNvPr id="16" name="Text 14"/>
           <p:cNvSpPr txBox="1"/>
           <p:nvPr/>
         </p:nvSpPr>
@@ -20238,7 +20490,7 @@
       </p:sp>
       <p:sp>
         <p:nvSpPr>
-          <p:cNvPr id="16" name="Text 14"/>
+          <p:cNvPr id="17" name="Text 15"/>
           <p:cNvSpPr txBox="1"/>
           <p:nvPr/>
         </p:nvSpPr>
@@ -20277,7 +20529,7 @@
       </p:sp>
       <p:sp>
         <p:nvSpPr>
-          <p:cNvPr id="17" name="Shape 15"/>
+          <p:cNvPr id="18" name="Shape 16"/>
           <p:cNvSpPr/>
           <p:nvPr/>
         </p:nvSpPr>
@@ -20300,7 +20552,7 @@
       </p:sp>
       <p:sp>
         <p:nvSpPr>
-          <p:cNvPr id="18" name="Text 16"/>
+          <p:cNvPr id="19" name="Text 17"/>
           <p:cNvSpPr txBox="1"/>
           <p:nvPr/>
         </p:nvSpPr>
@@ -20339,7 +20591,7 @@
       </p:sp>
       <p:sp>
         <p:nvSpPr>
-          <p:cNvPr id="19" name="Text 17"/>
+          <p:cNvPr id="20" name="Text 18"/>
           <p:cNvSpPr txBox="1"/>
           <p:nvPr/>
         </p:nvSpPr>
@@ -20378,7 +20630,7 @@
       </p:sp>
       <p:sp>
         <p:nvSpPr>
-          <p:cNvPr id="20" name="Shape 18"/>
+          <p:cNvPr id="21" name="Shape 19"/>
           <p:cNvSpPr/>
           <p:nvPr/>
         </p:nvSpPr>
@@ -20403,7 +20655,7 @@
       </p:sp>
       <p:sp>
         <p:nvSpPr>
-          <p:cNvPr id="21" name="Text 19"/>
+          <p:cNvPr id="22" name="Text 20"/>
           <p:cNvSpPr txBox="1"/>
           <p:nvPr/>
         </p:nvSpPr>
@@ -20442,7 +20694,7 @@
       </p:sp>
       <p:sp>
         <p:nvSpPr>
-          <p:cNvPr id="22" name="Shape 20"/>
+          <p:cNvPr id="23" name="Shape 21"/>
           <p:cNvSpPr/>
           <p:nvPr/>
         </p:nvSpPr>
@@ -20467,7 +20719,7 @@
       </p:sp>
       <p:sp>
         <p:nvSpPr>
-          <p:cNvPr id="23" name="Text 21"/>
+          <p:cNvPr id="24" name="Text 22"/>
           <p:cNvSpPr txBox="1"/>
           <p:nvPr/>
         </p:nvSpPr>
@@ -20506,7 +20758,7 @@
       </p:sp>
       <p:sp>
         <p:nvSpPr>
-          <p:cNvPr id="24" name="Shape 22"/>
+          <p:cNvPr id="25" name="Shape 23"/>
           <p:cNvSpPr/>
           <p:nvPr/>
         </p:nvSpPr>
@@ -20531,7 +20783,7 @@
       </p:sp>
       <p:sp>
         <p:nvSpPr>
-          <p:cNvPr id="25" name="Text 23"/>
+          <p:cNvPr id="26" name="Text 24"/>
           <p:cNvSpPr txBox="1"/>
           <p:nvPr/>
         </p:nvSpPr>
@@ -20570,7 +20822,7 @@
       </p:sp>
       <p:sp>
         <p:nvSpPr>
-          <p:cNvPr id="26" name="Shape 24"/>
+          <p:cNvPr id="27" name="Shape 25"/>
           <p:cNvSpPr/>
           <p:nvPr/>
         </p:nvSpPr>
@@ -20595,7 +20847,7 @@
       </p:sp>
       <p:sp>
         <p:nvSpPr>
-          <p:cNvPr id="27" name="Text 25"/>
+          <p:cNvPr id="28" name="Text 26"/>
           <p:cNvSpPr txBox="1"/>
           <p:nvPr/>
         </p:nvSpPr>
@@ -20634,7 +20886,7 @@
       </p:sp>
       <p:sp>
         <p:nvSpPr>
-          <p:cNvPr id="28" name="Shape 26"/>
+          <p:cNvPr id="29" name="Shape 27"/>
           <p:cNvSpPr/>
           <p:nvPr/>
         </p:nvSpPr>
@@ -20659,7 +20911,7 @@
       </p:sp>
       <p:sp>
         <p:nvSpPr>
-          <p:cNvPr id="29" name="Text 27"/>
+          <p:cNvPr id="30" name="Text 28"/>
           <p:cNvSpPr txBox="1"/>
           <p:nvPr/>
         </p:nvSpPr>
@@ -20698,7 +20950,7 @@
       </p:sp>
       <p:sp>
         <p:nvSpPr>
-          <p:cNvPr id="30" name="Shape 28"/>
+          <p:cNvPr id="31" name="Shape 29"/>
           <p:cNvSpPr/>
           <p:nvPr/>
         </p:nvSpPr>
@@ -20723,7 +20975,7 @@
       </p:sp>
       <p:sp>
         <p:nvSpPr>
-          <p:cNvPr id="31" name="Text 29"/>
+          <p:cNvPr id="32" name="Text 30"/>
           <p:cNvSpPr txBox="1"/>
           <p:nvPr/>
         </p:nvSpPr>
@@ -20762,7 +21014,7 @@
       </p:sp>
       <p:sp>
         <p:nvSpPr>
-          <p:cNvPr id="32" name="Shape 30"/>
+          <p:cNvPr id="33" name="Shape 31"/>
           <p:cNvSpPr/>
           <p:nvPr/>
         </p:nvSpPr>
@@ -20787,7 +21039,7 @@
       </p:sp>
       <p:sp>
         <p:nvSpPr>
-          <p:cNvPr id="33" name="Text 31"/>
+          <p:cNvPr id="34" name="Text 32"/>
           <p:cNvSpPr txBox="1"/>
           <p:nvPr/>
         </p:nvSpPr>
@@ -20826,7 +21078,7 @@
       </p:sp>
       <p:sp>
         <p:nvSpPr>
-          <p:cNvPr id="34" name="Shape 32"/>
+          <p:cNvPr id="35" name="Shape 33"/>
           <p:cNvSpPr/>
           <p:nvPr/>
         </p:nvSpPr>
@@ -20851,7 +21103,7 @@
       </p:sp>
       <p:sp>
         <p:nvSpPr>
-          <p:cNvPr id="35" name="Text 33"/>
+          <p:cNvPr id="36" name="Text 34"/>
           <p:cNvSpPr txBox="1"/>
           <p:nvPr/>
         </p:nvSpPr>
@@ -20890,7 +21142,7 @@
       </p:sp>
       <p:sp>
         <p:nvSpPr>
-          <p:cNvPr id="36" name="Shape 34"/>
+          <p:cNvPr id="37" name="Shape 35"/>
           <p:cNvSpPr/>
           <p:nvPr/>
         </p:nvSpPr>
@@ -20915,7 +21167,7 @@
       </p:sp>
       <p:sp>
         <p:nvSpPr>
-          <p:cNvPr id="37" name="Text 35"/>
+          <p:cNvPr id="38" name="Text 36"/>
           <p:cNvSpPr txBox="1"/>
           <p:nvPr/>
         </p:nvSpPr>
@@ -20954,7 +21206,7 @@
       </p:sp>
       <p:sp>
         <p:nvSpPr>
-          <p:cNvPr id="38" name="Shape 36"/>
+          <p:cNvPr id="39" name="Shape 37"/>
           <p:cNvSpPr/>
           <p:nvPr/>
         </p:nvSpPr>
@@ -20979,7 +21231,7 @@
       </p:sp>
       <p:sp>
         <p:nvSpPr>
-          <p:cNvPr id="39" name="Text 37"/>
+          <p:cNvPr id="40" name="Text 38"/>
           <p:cNvSpPr txBox="1"/>
           <p:nvPr/>
         </p:nvSpPr>
@@ -21642,13 +21894,76 @@
       </p:sp>
       <p:sp>
         <p:nvSpPr>
-          <p:cNvPr id="19" name="Shape 17"/>
+          <p:cNvPr id="19" name="Text 17"/>
+          <p:cNvSpPr txBox="1"/>
+          <p:nvPr/>
+        </p:nvSpPr>
+        <p:spPr>
+          <a:xfrm>
+            <a:off x="502920" y="5148072"/>
+            <a:ext cx="11201400" cy="685800"/>
+          </a:xfrm>
+          <a:prstGeom prst="rect">
+            <a:avLst/>
+          </a:prstGeom>
+          <a:noFill/>
+          <a:ln/>
+        </p:spPr>
+        <p:txBody>
+          <a:bodyPr wrap="square" lIns="0" tIns="0" rIns="0" bIns="0" rtlCol="0" anchor="ctr"/>
+          <a:lstStyle/>
+          <a:p>
+            <a:pPr indent="0" marL="0">
+              <a:lnSpc>
+                <a:spcPct val="120000"/>
+              </a:lnSpc>
+              <a:buNone/>
+            </a:pPr>
+            <a:r>
+              <a:rPr lang="en-US" sz="850" b="1" dirty="0">
+                <a:solidFill>
+                  <a:srgbClr val="8A8A8A"/>
+                </a:solidFill>
+                <a:latin typeface="Consolas" pitchFamily="34" charset="0"/>
+                <a:ea typeface="Consolas" pitchFamily="34" charset="-122"/>
+                <a:cs typeface="Consolas" pitchFamily="34" charset="-120"/>
+              </a:rPr>
+              <a:t>具体例
+</a:t>
+            </a:r>
+            <a:endParaRPr lang="en-US" sz="850" dirty="0"/>
+          </a:p>
+          <a:p>
+            <a:pPr indent="0" marL="0">
+              <a:lnSpc>
+                <a:spcPct val="120000"/>
+              </a:lnSpc>
+              <a:buNone/>
+            </a:pPr>
+            <a:r>
+              <a:rPr lang="en-US" sz="1050" dirty="0">
+                <a:solidFill>
+                  <a:srgbClr val="171717"/>
+                </a:solidFill>
+                <a:latin typeface="Yu Gothic" pitchFamily="34" charset="0"/>
+                <a:ea typeface="Yu Gothic" pitchFamily="34" charset="-122"/>
+                <a:cs typeface="Yu Gothic" pitchFamily="34" charset="-120"/>
+              </a:rPr>
+              <a:t>小売チェーンのB社はPOSで得た販売データを仕入先とも共有し、SCMを通じて発注・生産計画に反映させる一方、会員カードの購買履歴はCRMで分析し、顧客ごとに異なるクーポンを配信している。</a:t>
+            </a:r>
+            <a:endParaRPr lang="en-US" sz="850" dirty="0"/>
+          </a:p>
+        </p:txBody>
+      </p:sp>
+      <p:sp>
+        <p:nvSpPr>
+          <p:cNvPr id="20" name="Shape 18"/>
           <p:cNvSpPr/>
           <p:nvPr/>
         </p:nvSpPr>
         <p:spPr>
           <a:xfrm>
-            <a:off x="502920" y="5989320"/>
+            <a:off x="502920" y="5998464"/>
             <a:ext cx="11201400" cy="0"/>
           </a:xfrm>
           <a:prstGeom prst="line">
@@ -21665,13 +21980,13 @@
       </p:sp>
       <p:sp>
         <p:nvSpPr>
-          <p:cNvPr id="20" name="Shape 18"/>
+          <p:cNvPr id="21" name="Shape 19"/>
           <p:cNvSpPr/>
           <p:nvPr/>
         </p:nvSpPr>
         <p:spPr>
           <a:xfrm>
-            <a:off x="502920" y="6062472"/>
+            <a:off x="502920" y="6071616"/>
             <a:ext cx="329184" cy="329184"/>
           </a:xfrm>
           <a:prstGeom prst="ellipse">
@@ -21685,13 +22000,13 @@
       </p:sp>
       <p:sp>
         <p:nvSpPr>
-          <p:cNvPr id="21" name="Text 19"/>
-          <p:cNvSpPr txBox="1"/>
-          <p:nvPr/>
-        </p:nvSpPr>
-        <p:spPr>
-          <a:xfrm>
-            <a:off x="502920" y="6062472"/>
+          <p:cNvPr id="22" name="Text 20"/>
+          <p:cNvSpPr txBox="1"/>
+          <p:nvPr/>
+        </p:nvSpPr>
+        <p:spPr>
+          <a:xfrm>
+            <a:off x="502920" y="6071616"/>
             <a:ext cx="329184" cy="329184"/>
           </a:xfrm>
           <a:prstGeom prst="rect">
@@ -21724,13 +22039,13 @@
       </p:sp>
       <p:sp>
         <p:nvSpPr>
-          <p:cNvPr id="22" name="Text 20"/>
-          <p:cNvSpPr txBox="1"/>
-          <p:nvPr/>
-        </p:nvSpPr>
-        <p:spPr>
-          <a:xfrm>
-            <a:off x="914400" y="6062472"/>
+          <p:cNvPr id="23" name="Text 21"/>
+          <p:cNvSpPr txBox="1"/>
+          <p:nvPr/>
+        </p:nvSpPr>
+        <p:spPr>
+          <a:xfrm>
+            <a:off x="914400" y="6071616"/>
             <a:ext cx="1371600" cy="329184"/>
           </a:xfrm>
           <a:prstGeom prst="rect">
@@ -21763,13 +22078,13 @@
       </p:sp>
       <p:sp>
         <p:nvSpPr>
-          <p:cNvPr id="23" name="Shape 21"/>
+          <p:cNvPr id="24" name="Shape 22"/>
           <p:cNvSpPr/>
           <p:nvPr/>
         </p:nvSpPr>
         <p:spPr>
           <a:xfrm>
-            <a:off x="2331720" y="6062472"/>
+            <a:off x="2331720" y="6071616"/>
             <a:ext cx="0" cy="329184"/>
           </a:xfrm>
           <a:prstGeom prst="line">
@@ -21786,13 +22101,13 @@
       </p:sp>
       <p:sp>
         <p:nvSpPr>
-          <p:cNvPr id="24" name="Text 22"/>
-          <p:cNvSpPr txBox="1"/>
-          <p:nvPr/>
-        </p:nvSpPr>
-        <p:spPr>
-          <a:xfrm>
-            <a:off x="2514600" y="6044184"/>
+          <p:cNvPr id="25" name="Text 23"/>
+          <p:cNvSpPr txBox="1"/>
+          <p:nvPr/>
+        </p:nvSpPr>
+        <p:spPr>
+          <a:xfrm>
+            <a:off x="2514600" y="6053328"/>
             <a:ext cx="9189720" cy="365760"/>
           </a:xfrm>
           <a:prstGeom prst="rect">
@@ -21825,13 +22140,13 @@
       </p:sp>
       <p:sp>
         <p:nvSpPr>
-          <p:cNvPr id="25" name="Text 23"/>
-          <p:cNvSpPr txBox="1"/>
-          <p:nvPr/>
-        </p:nvSpPr>
-        <p:spPr>
-          <a:xfrm>
-            <a:off x="502920" y="6464808"/>
+          <p:cNvPr id="26" name="Text 24"/>
+          <p:cNvSpPr txBox="1"/>
+          <p:nvPr/>
+        </p:nvSpPr>
+        <p:spPr>
+          <a:xfrm>
+            <a:off x="502920" y="6473952"/>
             <a:ext cx="1417320" cy="219456"/>
           </a:xfrm>
           <a:prstGeom prst="rect">
@@ -21864,13 +22179,13 @@
       </p:sp>
       <p:sp>
         <p:nvSpPr>
-          <p:cNvPr id="26" name="Shape 24"/>
+          <p:cNvPr id="27" name="Shape 25"/>
           <p:cNvSpPr/>
           <p:nvPr/>
         </p:nvSpPr>
         <p:spPr>
           <a:xfrm>
-            <a:off x="2466594" y="6464808"/>
+            <a:off x="2466594" y="6473952"/>
             <a:ext cx="146304" cy="146304"/>
           </a:xfrm>
           <a:prstGeom prst="ellipse">
@@ -21889,13 +22204,13 @@
       </p:sp>
       <p:sp>
         <p:nvSpPr>
-          <p:cNvPr id="27" name="Text 25"/>
-          <p:cNvSpPr txBox="1"/>
-          <p:nvPr/>
-        </p:nvSpPr>
-        <p:spPr>
-          <a:xfrm>
-            <a:off x="2057400" y="6620256"/>
+          <p:cNvPr id="28" name="Text 26"/>
+          <p:cNvSpPr txBox="1"/>
+          <p:nvPr/>
+        </p:nvSpPr>
+        <p:spPr>
+          <a:xfrm>
+            <a:off x="2057400" y="6629400"/>
             <a:ext cx="964692" cy="173736"/>
           </a:xfrm>
           <a:prstGeom prst="rect">
@@ -21928,13 +22243,13 @@
       </p:sp>
       <p:sp>
         <p:nvSpPr>
-          <p:cNvPr id="28" name="Shape 26"/>
+          <p:cNvPr id="29" name="Shape 27"/>
           <p:cNvSpPr/>
           <p:nvPr/>
         </p:nvSpPr>
         <p:spPr>
           <a:xfrm>
-            <a:off x="3431286" y="6464808"/>
+            <a:off x="3431286" y="6473952"/>
             <a:ext cx="146304" cy="146304"/>
           </a:xfrm>
           <a:prstGeom prst="ellipse">
@@ -21953,13 +22268,13 @@
       </p:sp>
       <p:sp>
         <p:nvSpPr>
-          <p:cNvPr id="29" name="Text 27"/>
-          <p:cNvSpPr txBox="1"/>
-          <p:nvPr/>
-        </p:nvSpPr>
-        <p:spPr>
-          <a:xfrm>
-            <a:off x="3022092" y="6620256"/>
+          <p:cNvPr id="30" name="Text 28"/>
+          <p:cNvSpPr txBox="1"/>
+          <p:nvPr/>
+        </p:nvSpPr>
+        <p:spPr>
+          <a:xfrm>
+            <a:off x="3022092" y="6629400"/>
             <a:ext cx="964692" cy="173736"/>
           </a:xfrm>
           <a:prstGeom prst="rect">
@@ -21992,13 +22307,13 @@
       </p:sp>
       <p:sp>
         <p:nvSpPr>
-          <p:cNvPr id="30" name="Shape 28"/>
+          <p:cNvPr id="31" name="Shape 29"/>
           <p:cNvSpPr/>
           <p:nvPr/>
         </p:nvSpPr>
         <p:spPr>
           <a:xfrm>
-            <a:off x="4395978" y="6464808"/>
+            <a:off x="4395978" y="6473952"/>
             <a:ext cx="146304" cy="146304"/>
           </a:xfrm>
           <a:prstGeom prst="ellipse">
@@ -22017,13 +22332,13 @@
       </p:sp>
       <p:sp>
         <p:nvSpPr>
-          <p:cNvPr id="31" name="Text 29"/>
-          <p:cNvSpPr txBox="1"/>
-          <p:nvPr/>
-        </p:nvSpPr>
-        <p:spPr>
-          <a:xfrm>
-            <a:off x="3986784" y="6620256"/>
+          <p:cNvPr id="32" name="Text 30"/>
+          <p:cNvSpPr txBox="1"/>
+          <p:nvPr/>
+        </p:nvSpPr>
+        <p:spPr>
+          <a:xfrm>
+            <a:off x="3986784" y="6629400"/>
             <a:ext cx="964692" cy="173736"/>
           </a:xfrm>
           <a:prstGeom prst="rect">
@@ -22056,13 +22371,13 @@
       </p:sp>
       <p:sp>
         <p:nvSpPr>
-          <p:cNvPr id="32" name="Shape 30"/>
+          <p:cNvPr id="33" name="Shape 31"/>
           <p:cNvSpPr/>
           <p:nvPr/>
         </p:nvSpPr>
         <p:spPr>
           <a:xfrm>
-            <a:off x="5360670" y="6464808"/>
+            <a:off x="5360670" y="6473952"/>
             <a:ext cx="146304" cy="146304"/>
           </a:xfrm>
           <a:prstGeom prst="ellipse">
@@ -22081,13 +22396,13 @@
       </p:sp>
       <p:sp>
         <p:nvSpPr>
-          <p:cNvPr id="33" name="Text 31"/>
-          <p:cNvSpPr txBox="1"/>
-          <p:nvPr/>
-        </p:nvSpPr>
-        <p:spPr>
-          <a:xfrm>
-            <a:off x="4951476" y="6620256"/>
+          <p:cNvPr id="34" name="Text 32"/>
+          <p:cNvSpPr txBox="1"/>
+          <p:nvPr/>
+        </p:nvSpPr>
+        <p:spPr>
+          <a:xfrm>
+            <a:off x="4951476" y="6629400"/>
             <a:ext cx="964692" cy="173736"/>
           </a:xfrm>
           <a:prstGeom prst="rect">
@@ -22120,13 +22435,13 @@
       </p:sp>
       <p:sp>
         <p:nvSpPr>
-          <p:cNvPr id="34" name="Shape 32"/>
+          <p:cNvPr id="35" name="Shape 33"/>
           <p:cNvSpPr/>
           <p:nvPr/>
         </p:nvSpPr>
         <p:spPr>
           <a:xfrm>
-            <a:off x="6325362" y="6464808"/>
+            <a:off x="6325362" y="6473952"/>
             <a:ext cx="146304" cy="146304"/>
           </a:xfrm>
           <a:prstGeom prst="ellipse">
@@ -22145,13 +22460,13 @@
       </p:sp>
       <p:sp>
         <p:nvSpPr>
-          <p:cNvPr id="35" name="Text 33"/>
-          <p:cNvSpPr txBox="1"/>
-          <p:nvPr/>
-        </p:nvSpPr>
-        <p:spPr>
-          <a:xfrm>
-            <a:off x="5916168" y="6620256"/>
+          <p:cNvPr id="36" name="Text 34"/>
+          <p:cNvSpPr txBox="1"/>
+          <p:nvPr/>
+        </p:nvSpPr>
+        <p:spPr>
+          <a:xfrm>
+            <a:off x="5916168" y="6629400"/>
             <a:ext cx="964692" cy="173736"/>
           </a:xfrm>
           <a:prstGeom prst="rect">
@@ -22184,13 +22499,13 @@
       </p:sp>
       <p:sp>
         <p:nvSpPr>
-          <p:cNvPr id="36" name="Shape 34"/>
+          <p:cNvPr id="37" name="Shape 35"/>
           <p:cNvSpPr/>
           <p:nvPr/>
         </p:nvSpPr>
         <p:spPr>
           <a:xfrm>
-            <a:off x="7290054" y="6464808"/>
+            <a:off x="7290054" y="6473952"/>
             <a:ext cx="146304" cy="146304"/>
           </a:xfrm>
           <a:prstGeom prst="ellipse">
@@ -22209,13 +22524,13 @@
       </p:sp>
       <p:sp>
         <p:nvSpPr>
-          <p:cNvPr id="37" name="Text 35"/>
-          <p:cNvSpPr txBox="1"/>
-          <p:nvPr/>
-        </p:nvSpPr>
-        <p:spPr>
-          <a:xfrm>
-            <a:off x="6880860" y="6620256"/>
+          <p:cNvPr id="38" name="Text 36"/>
+          <p:cNvSpPr txBox="1"/>
+          <p:nvPr/>
+        </p:nvSpPr>
+        <p:spPr>
+          <a:xfrm>
+            <a:off x="6880860" y="6629400"/>
             <a:ext cx="964692" cy="173736"/>
           </a:xfrm>
           <a:prstGeom prst="rect">
@@ -22248,13 +22563,13 @@
       </p:sp>
       <p:sp>
         <p:nvSpPr>
-          <p:cNvPr id="38" name="Shape 36"/>
+          <p:cNvPr id="39" name="Shape 37"/>
           <p:cNvSpPr/>
           <p:nvPr/>
         </p:nvSpPr>
         <p:spPr>
           <a:xfrm>
-            <a:off x="8254746" y="6464808"/>
+            <a:off x="8254746" y="6473952"/>
             <a:ext cx="146304" cy="146304"/>
           </a:xfrm>
           <a:prstGeom prst="ellipse">
@@ -22273,13 +22588,13 @@
       </p:sp>
       <p:sp>
         <p:nvSpPr>
-          <p:cNvPr id="39" name="Text 37"/>
-          <p:cNvSpPr txBox="1"/>
-          <p:nvPr/>
-        </p:nvSpPr>
-        <p:spPr>
-          <a:xfrm>
-            <a:off x="7845552" y="6620256"/>
+          <p:cNvPr id="40" name="Text 38"/>
+          <p:cNvSpPr txBox="1"/>
+          <p:nvPr/>
+        </p:nvSpPr>
+        <p:spPr>
+          <a:xfrm>
+            <a:off x="7845552" y="6629400"/>
             <a:ext cx="964692" cy="173736"/>
           </a:xfrm>
           <a:prstGeom prst="rect">
@@ -22312,13 +22627,13 @@
       </p:sp>
       <p:sp>
         <p:nvSpPr>
-          <p:cNvPr id="40" name="Shape 38"/>
+          <p:cNvPr id="41" name="Shape 39"/>
           <p:cNvSpPr/>
           <p:nvPr/>
         </p:nvSpPr>
         <p:spPr>
           <a:xfrm>
-            <a:off x="9219438" y="6464808"/>
+            <a:off x="9219438" y="6473952"/>
             <a:ext cx="146304" cy="146304"/>
           </a:xfrm>
           <a:prstGeom prst="ellipse">
@@ -22337,13 +22652,13 @@
       </p:sp>
       <p:sp>
         <p:nvSpPr>
-          <p:cNvPr id="41" name="Text 39"/>
-          <p:cNvSpPr txBox="1"/>
-          <p:nvPr/>
-        </p:nvSpPr>
-        <p:spPr>
-          <a:xfrm>
-            <a:off x="8810244" y="6620256"/>
+          <p:cNvPr id="42" name="Text 40"/>
+          <p:cNvSpPr txBox="1"/>
+          <p:nvPr/>
+        </p:nvSpPr>
+        <p:spPr>
+          <a:xfrm>
+            <a:off x="8810244" y="6629400"/>
             <a:ext cx="964692" cy="173736"/>
           </a:xfrm>
           <a:prstGeom prst="rect">
@@ -22376,13 +22691,13 @@
       </p:sp>
       <p:sp>
         <p:nvSpPr>
-          <p:cNvPr id="42" name="Shape 40"/>
+          <p:cNvPr id="43" name="Shape 41"/>
           <p:cNvSpPr/>
           <p:nvPr/>
         </p:nvSpPr>
         <p:spPr>
           <a:xfrm>
-            <a:off x="10184130" y="6464808"/>
+            <a:off x="10184130" y="6473952"/>
             <a:ext cx="146304" cy="146304"/>
           </a:xfrm>
           <a:prstGeom prst="ellipse">
@@ -22401,13 +22716,13 @@
       </p:sp>
       <p:sp>
         <p:nvSpPr>
-          <p:cNvPr id="43" name="Text 41"/>
-          <p:cNvSpPr txBox="1"/>
-          <p:nvPr/>
-        </p:nvSpPr>
-        <p:spPr>
-          <a:xfrm>
-            <a:off x="9774936" y="6620256"/>
+          <p:cNvPr id="44" name="Text 42"/>
+          <p:cNvSpPr txBox="1"/>
+          <p:nvPr/>
+        </p:nvSpPr>
+        <p:spPr>
+          <a:xfrm>
+            <a:off x="9774936" y="6629400"/>
             <a:ext cx="964692" cy="173736"/>
           </a:xfrm>
           <a:prstGeom prst="rect">
@@ -22440,13 +22755,13 @@
       </p:sp>
       <p:sp>
         <p:nvSpPr>
-          <p:cNvPr id="44" name="Shape 42"/>
+          <p:cNvPr id="45" name="Shape 43"/>
           <p:cNvSpPr/>
           <p:nvPr/>
         </p:nvSpPr>
         <p:spPr>
           <a:xfrm>
-            <a:off x="11148822" y="6464808"/>
+            <a:off x="11148822" y="6473952"/>
             <a:ext cx="146304" cy="146304"/>
           </a:xfrm>
           <a:prstGeom prst="ellipse">
@@ -22465,13 +22780,13 @@
       </p:sp>
       <p:sp>
         <p:nvSpPr>
-          <p:cNvPr id="45" name="Text 43"/>
-          <p:cNvSpPr txBox="1"/>
-          <p:nvPr/>
-        </p:nvSpPr>
-        <p:spPr>
-          <a:xfrm>
-            <a:off x="10739628" y="6620256"/>
+          <p:cNvPr id="46" name="Text 44"/>
+          <p:cNvSpPr txBox="1"/>
+          <p:nvPr/>
+        </p:nvSpPr>
+        <p:spPr>
+          <a:xfrm>
+            <a:off x="10739628" y="6629400"/>
             <a:ext cx="964692" cy="173736"/>
           </a:xfrm>
           <a:prstGeom prst="rect">
@@ -30244,7 +30559,70 @@
       </p:sp>
       <p:sp>
         <p:nvSpPr>
-          <p:cNvPr id="22" name="Shape 20"/>
+          <p:cNvPr id="22" name="Text 20"/>
+          <p:cNvSpPr txBox="1"/>
+          <p:nvPr/>
+        </p:nvSpPr>
+        <p:spPr>
+          <a:xfrm>
+            <a:off x="502920" y="3703320"/>
+            <a:ext cx="11201400" cy="502920"/>
+          </a:xfrm>
+          <a:prstGeom prst="rect">
+            <a:avLst/>
+          </a:prstGeom>
+          <a:noFill/>
+          <a:ln/>
+        </p:spPr>
+        <p:txBody>
+          <a:bodyPr wrap="square" lIns="0" tIns="0" rIns="0" bIns="0" rtlCol="0" anchor="ctr"/>
+          <a:lstStyle/>
+          <a:p>
+            <a:pPr indent="0" marL="0">
+              <a:lnSpc>
+                <a:spcPct val="120000"/>
+              </a:lnSpc>
+              <a:buNone/>
+            </a:pPr>
+            <a:r>
+              <a:rPr lang="en-US" sz="850" b="1" dirty="0">
+                <a:solidFill>
+                  <a:srgbClr val="8A8A8A"/>
+                </a:solidFill>
+                <a:latin typeface="Consolas" pitchFamily="34" charset="0"/>
+                <a:ea typeface="Consolas" pitchFamily="34" charset="-122"/>
+                <a:cs typeface="Consolas" pitchFamily="34" charset="-120"/>
+              </a:rPr>
+              <a:t>具体例
+</a:t>
+            </a:r>
+            <a:endParaRPr lang="en-US" sz="850" dirty="0"/>
+          </a:p>
+          <a:p>
+            <a:pPr indent="0" marL="0">
+              <a:lnSpc>
+                <a:spcPct val="120000"/>
+              </a:lnSpc>
+              <a:buNone/>
+            </a:pPr>
+            <a:r>
+              <a:rPr lang="en-US" sz="1050" dirty="0">
+                <a:solidFill>
+                  <a:srgbClr val="171717"/>
+                </a:solidFill>
+                <a:latin typeface="Yu Gothic" pitchFamily="34" charset="0"/>
+                <a:ea typeface="Yu Gothic" pitchFamily="34" charset="-122"/>
+                <a:cs typeface="Yu Gothic" pitchFamily="34" charset="-120"/>
+              </a:rPr>
+              <a:t>製造業A社の基幹システムのディスクをRAID5構成（4台）にしたところ、1台が故障しても生産ラインの稼働記録を止めずに済み、交換後は自動的にデータが復旧した。</a:t>
+            </a:r>
+            <a:endParaRPr lang="en-US" sz="850" dirty="0"/>
+          </a:p>
+        </p:txBody>
+      </p:sp>
+      <p:sp>
+        <p:nvSpPr>
+          <p:cNvPr id="23" name="Shape 21"/>
           <p:cNvSpPr/>
           <p:nvPr/>
         </p:nvSpPr>
@@ -30267,7 +30645,7 @@
       </p:sp>
       <p:sp>
         <p:nvSpPr>
-          <p:cNvPr id="23" name="Shape 21"/>
+          <p:cNvPr id="24" name="Shape 22"/>
           <p:cNvSpPr/>
           <p:nvPr/>
         </p:nvSpPr>
@@ -30287,7 +30665,7 @@
       </p:sp>
       <p:sp>
         <p:nvSpPr>
-          <p:cNvPr id="24" name="Text 22"/>
+          <p:cNvPr id="25" name="Text 23"/>
           <p:cNvSpPr txBox="1"/>
           <p:nvPr/>
         </p:nvSpPr>
@@ -30326,7 +30704,7 @@
       </p:sp>
       <p:sp>
         <p:nvSpPr>
-          <p:cNvPr id="25" name="Text 23"/>
+          <p:cNvPr id="26" name="Text 24"/>
           <p:cNvSpPr txBox="1"/>
           <p:nvPr/>
         </p:nvSpPr>
@@ -30365,7 +30743,7 @@
       </p:sp>
       <p:sp>
         <p:nvSpPr>
-          <p:cNvPr id="26" name="Shape 24"/>
+          <p:cNvPr id="27" name="Shape 25"/>
           <p:cNvSpPr/>
           <p:nvPr/>
         </p:nvSpPr>
@@ -30388,7 +30766,7 @@
       </p:sp>
       <p:sp>
         <p:nvSpPr>
-          <p:cNvPr id="27" name="Text 25"/>
+          <p:cNvPr id="28" name="Text 26"/>
           <p:cNvSpPr txBox="1"/>
           <p:nvPr/>
         </p:nvSpPr>
@@ -30427,7 +30805,7 @@
       </p:sp>
       <p:sp>
         <p:nvSpPr>
-          <p:cNvPr id="28" name="Text 26"/>
+          <p:cNvPr id="29" name="Text 27"/>
           <p:cNvSpPr txBox="1"/>
           <p:nvPr/>
         </p:nvSpPr>
@@ -30466,7 +30844,7 @@
       </p:sp>
       <p:sp>
         <p:nvSpPr>
-          <p:cNvPr id="29" name="Shape 27"/>
+          <p:cNvPr id="30" name="Shape 28"/>
           <p:cNvSpPr/>
           <p:nvPr/>
         </p:nvSpPr>
@@ -30491,7 +30869,7 @@
       </p:sp>
       <p:sp>
         <p:nvSpPr>
-          <p:cNvPr id="30" name="Text 28"/>
+          <p:cNvPr id="31" name="Text 29"/>
           <p:cNvSpPr txBox="1"/>
           <p:nvPr/>
         </p:nvSpPr>
@@ -30530,7 +30908,7 @@
       </p:sp>
       <p:sp>
         <p:nvSpPr>
-          <p:cNvPr id="31" name="Shape 29"/>
+          <p:cNvPr id="32" name="Shape 30"/>
           <p:cNvSpPr/>
           <p:nvPr/>
         </p:nvSpPr>
@@ -30555,7 +30933,7 @@
       </p:sp>
       <p:sp>
         <p:nvSpPr>
-          <p:cNvPr id="32" name="Text 30"/>
+          <p:cNvPr id="33" name="Text 31"/>
           <p:cNvSpPr txBox="1"/>
           <p:nvPr/>
         </p:nvSpPr>
@@ -30594,7 +30972,7 @@
       </p:sp>
       <p:sp>
         <p:nvSpPr>
-          <p:cNvPr id="33" name="Shape 31"/>
+          <p:cNvPr id="34" name="Shape 32"/>
           <p:cNvSpPr/>
           <p:nvPr/>
         </p:nvSpPr>
@@ -30619,7 +30997,7 @@
       </p:sp>
       <p:sp>
         <p:nvSpPr>
-          <p:cNvPr id="34" name="Text 32"/>
+          <p:cNvPr id="35" name="Text 33"/>
           <p:cNvSpPr txBox="1"/>
           <p:nvPr/>
         </p:nvSpPr>
@@ -30658,7 +31036,7 @@
       </p:sp>
       <p:sp>
         <p:nvSpPr>
-          <p:cNvPr id="35" name="Shape 33"/>
+          <p:cNvPr id="36" name="Shape 34"/>
           <p:cNvSpPr/>
           <p:nvPr/>
         </p:nvSpPr>
@@ -30683,7 +31061,7 @@
       </p:sp>
       <p:sp>
         <p:nvSpPr>
-          <p:cNvPr id="36" name="Text 34"/>
+          <p:cNvPr id="37" name="Text 35"/>
           <p:cNvSpPr txBox="1"/>
           <p:nvPr/>
         </p:nvSpPr>
@@ -30722,7 +31100,7 @@
       </p:sp>
       <p:sp>
         <p:nvSpPr>
-          <p:cNvPr id="37" name="Shape 35"/>
+          <p:cNvPr id="38" name="Shape 36"/>
           <p:cNvSpPr/>
           <p:nvPr/>
         </p:nvSpPr>
@@ -30747,7 +31125,7 @@
       </p:sp>
       <p:sp>
         <p:nvSpPr>
-          <p:cNvPr id="38" name="Text 36"/>
+          <p:cNvPr id="39" name="Text 37"/>
           <p:cNvSpPr txBox="1"/>
           <p:nvPr/>
         </p:nvSpPr>
@@ -30786,7 +31164,7 @@
       </p:sp>
       <p:sp>
         <p:nvSpPr>
-          <p:cNvPr id="39" name="Shape 37"/>
+          <p:cNvPr id="40" name="Shape 38"/>
           <p:cNvSpPr/>
           <p:nvPr/>
         </p:nvSpPr>
@@ -30811,7 +31189,7 @@
       </p:sp>
       <p:sp>
         <p:nvSpPr>
-          <p:cNvPr id="40" name="Text 38"/>
+          <p:cNvPr id="41" name="Text 39"/>
           <p:cNvSpPr txBox="1"/>
           <p:nvPr/>
         </p:nvSpPr>
@@ -30850,7 +31228,7 @@
       </p:sp>
       <p:sp>
         <p:nvSpPr>
-          <p:cNvPr id="41" name="Shape 39"/>
+          <p:cNvPr id="42" name="Shape 40"/>
           <p:cNvSpPr/>
           <p:nvPr/>
         </p:nvSpPr>
@@ -30875,7 +31253,7 @@
       </p:sp>
       <p:sp>
         <p:nvSpPr>
-          <p:cNvPr id="42" name="Text 40"/>
+          <p:cNvPr id="43" name="Text 41"/>
           <p:cNvSpPr txBox="1"/>
           <p:nvPr/>
         </p:nvSpPr>
@@ -30914,7 +31292,7 @@
       </p:sp>
       <p:sp>
         <p:nvSpPr>
-          <p:cNvPr id="43" name="Shape 41"/>
+          <p:cNvPr id="44" name="Shape 42"/>
           <p:cNvSpPr/>
           <p:nvPr/>
         </p:nvSpPr>
@@ -30939,7 +31317,7 @@
       </p:sp>
       <p:sp>
         <p:nvSpPr>
-          <p:cNvPr id="44" name="Text 42"/>
+          <p:cNvPr id="45" name="Text 43"/>
           <p:cNvSpPr txBox="1"/>
           <p:nvPr/>
         </p:nvSpPr>
@@ -30978,7 +31356,7 @@
       </p:sp>
       <p:sp>
         <p:nvSpPr>
-          <p:cNvPr id="45" name="Shape 43"/>
+          <p:cNvPr id="46" name="Shape 44"/>
           <p:cNvSpPr/>
           <p:nvPr/>
         </p:nvSpPr>
@@ -31003,7 +31381,7 @@
       </p:sp>
       <p:sp>
         <p:nvSpPr>
-          <p:cNvPr id="46" name="Text 44"/>
+          <p:cNvPr id="47" name="Text 45"/>
           <p:cNvSpPr txBox="1"/>
           <p:nvPr/>
         </p:nvSpPr>
@@ -31042,7 +31420,7 @@
       </p:sp>
       <p:sp>
         <p:nvSpPr>
-          <p:cNvPr id="47" name="Shape 45"/>
+          <p:cNvPr id="48" name="Shape 46"/>
           <p:cNvSpPr/>
           <p:nvPr/>
         </p:nvSpPr>
@@ -31067,7 +31445,7 @@
       </p:sp>
       <p:sp>
         <p:nvSpPr>
-          <p:cNvPr id="48" name="Text 46"/>
+          <p:cNvPr id="49" name="Text 47"/>
           <p:cNvSpPr txBox="1"/>
           <p:nvPr/>
         </p:nvSpPr>
@@ -33290,7 +33668,70 @@
       </p:sp>
       <p:sp>
         <p:nvSpPr>
-          <p:cNvPr id="22" name="Shape 20"/>
+          <p:cNvPr id="22" name="Text 20"/>
+          <p:cNvSpPr txBox="1"/>
+          <p:nvPr/>
+        </p:nvSpPr>
+        <p:spPr>
+          <a:xfrm>
+            <a:off x="502920" y="3703320"/>
+            <a:ext cx="11201400" cy="685800"/>
+          </a:xfrm>
+          <a:prstGeom prst="rect">
+            <a:avLst/>
+          </a:prstGeom>
+          <a:noFill/>
+          <a:ln/>
+        </p:spPr>
+        <p:txBody>
+          <a:bodyPr wrap="square" lIns="0" tIns="0" rIns="0" bIns="0" rtlCol="0" anchor="ctr"/>
+          <a:lstStyle/>
+          <a:p>
+            <a:pPr indent="0" marL="0">
+              <a:lnSpc>
+                <a:spcPct val="120000"/>
+              </a:lnSpc>
+              <a:buNone/>
+            </a:pPr>
+            <a:r>
+              <a:rPr lang="en-US" sz="850" b="1" dirty="0">
+                <a:solidFill>
+                  <a:srgbClr val="8A8A8A"/>
+                </a:solidFill>
+                <a:latin typeface="Consolas" pitchFamily="34" charset="0"/>
+                <a:ea typeface="Consolas" pitchFamily="34" charset="-122"/>
+                <a:cs typeface="Consolas" pitchFamily="34" charset="-120"/>
+              </a:rPr>
+              <a:t>具体例
+</a:t>
+            </a:r>
+            <a:endParaRPr lang="en-US" sz="850" dirty="0"/>
+          </a:p>
+          <a:p>
+            <a:pPr indent="0" marL="0">
+              <a:lnSpc>
+                <a:spcPct val="120000"/>
+              </a:lnSpc>
+              <a:buNone/>
+            </a:pPr>
+            <a:r>
+              <a:rPr lang="en-US" sz="1050" dirty="0">
+                <a:solidFill>
+                  <a:srgbClr val="171717"/>
+                </a:solidFill>
+                <a:latin typeface="Yu Gothic" pitchFamily="34" charset="0"/>
+                <a:ea typeface="Yu Gothic" pitchFamily="34" charset="-122"/>
+                <a:cs typeface="Yu Gothic" pitchFamily="34" charset="-120"/>
+              </a:rPr>
+              <a:t>顧客データベースへのアクセスを担当者のみに限定するのは機密性の確保、不正な書き換えを検知する仕組みは完全性の確保、災害時にも止まらないようサーバを複数拠点に分散するのは可用性の確保にそれぞれ当たる。</a:t>
+            </a:r>
+            <a:endParaRPr lang="en-US" sz="850" dirty="0"/>
+          </a:p>
+        </p:txBody>
+      </p:sp>
+      <p:sp>
+        <p:nvSpPr>
+          <p:cNvPr id="23" name="Shape 21"/>
           <p:cNvSpPr/>
           <p:nvPr/>
         </p:nvSpPr>
@@ -33313,7 +33754,7 @@
       </p:sp>
       <p:sp>
         <p:nvSpPr>
-          <p:cNvPr id="23" name="Shape 21"/>
+          <p:cNvPr id="24" name="Shape 22"/>
           <p:cNvSpPr/>
           <p:nvPr/>
         </p:nvSpPr>
@@ -33333,7 +33774,7 @@
       </p:sp>
       <p:sp>
         <p:nvSpPr>
-          <p:cNvPr id="24" name="Text 22"/>
+          <p:cNvPr id="25" name="Text 23"/>
           <p:cNvSpPr txBox="1"/>
           <p:nvPr/>
         </p:nvSpPr>
@@ -33372,7 +33813,7 @@
       </p:sp>
       <p:sp>
         <p:nvSpPr>
-          <p:cNvPr id="25" name="Text 23"/>
+          <p:cNvPr id="26" name="Text 24"/>
           <p:cNvSpPr txBox="1"/>
           <p:nvPr/>
         </p:nvSpPr>
@@ -33411,7 +33852,7 @@
       </p:sp>
       <p:sp>
         <p:nvSpPr>
-          <p:cNvPr id="26" name="Shape 24"/>
+          <p:cNvPr id="27" name="Shape 25"/>
           <p:cNvSpPr/>
           <p:nvPr/>
         </p:nvSpPr>
@@ -33434,7 +33875,7 @@
       </p:sp>
       <p:sp>
         <p:nvSpPr>
-          <p:cNvPr id="27" name="Text 25"/>
+          <p:cNvPr id="28" name="Text 26"/>
           <p:cNvSpPr txBox="1"/>
           <p:nvPr/>
         </p:nvSpPr>
@@ -33473,7 +33914,7 @@
       </p:sp>
       <p:sp>
         <p:nvSpPr>
-          <p:cNvPr id="28" name="Text 26"/>
+          <p:cNvPr id="29" name="Text 27"/>
           <p:cNvSpPr txBox="1"/>
           <p:nvPr/>
         </p:nvSpPr>
@@ -33512,7 +33953,7 @@
       </p:sp>
       <p:sp>
         <p:nvSpPr>
-          <p:cNvPr id="29" name="Shape 27"/>
+          <p:cNvPr id="30" name="Shape 28"/>
           <p:cNvSpPr/>
           <p:nvPr/>
         </p:nvSpPr>
@@ -33537,7 +33978,7 @@
       </p:sp>
       <p:sp>
         <p:nvSpPr>
-          <p:cNvPr id="30" name="Text 28"/>
+          <p:cNvPr id="31" name="Text 29"/>
           <p:cNvSpPr txBox="1"/>
           <p:nvPr/>
         </p:nvSpPr>
@@ -33576,7 +34017,7 @@
       </p:sp>
       <p:sp>
         <p:nvSpPr>
-          <p:cNvPr id="31" name="Shape 29"/>
+          <p:cNvPr id="32" name="Shape 30"/>
           <p:cNvSpPr/>
           <p:nvPr/>
         </p:nvSpPr>
@@ -33601,7 +34042,7 @@
       </p:sp>
       <p:sp>
         <p:nvSpPr>
-          <p:cNvPr id="32" name="Text 30"/>
+          <p:cNvPr id="33" name="Text 31"/>
           <p:cNvSpPr txBox="1"/>
           <p:nvPr/>
         </p:nvSpPr>
@@ -33640,7 +34081,7 @@
       </p:sp>
       <p:sp>
         <p:nvSpPr>
-          <p:cNvPr id="33" name="Shape 31"/>
+          <p:cNvPr id="34" name="Shape 32"/>
           <p:cNvSpPr/>
           <p:nvPr/>
         </p:nvSpPr>
@@ -33665,7 +34106,7 @@
       </p:sp>
       <p:sp>
         <p:nvSpPr>
-          <p:cNvPr id="34" name="Text 32"/>
+          <p:cNvPr id="35" name="Text 33"/>
           <p:cNvSpPr txBox="1"/>
           <p:nvPr/>
         </p:nvSpPr>
@@ -33704,7 +34145,7 @@
       </p:sp>
       <p:sp>
         <p:nvSpPr>
-          <p:cNvPr id="35" name="Shape 33"/>
+          <p:cNvPr id="36" name="Shape 34"/>
           <p:cNvSpPr/>
           <p:nvPr/>
         </p:nvSpPr>
@@ -33729,7 +34170,7 @@
       </p:sp>
       <p:sp>
         <p:nvSpPr>
-          <p:cNvPr id="36" name="Text 34"/>
+          <p:cNvPr id="37" name="Text 35"/>
           <p:cNvSpPr txBox="1"/>
           <p:nvPr/>
         </p:nvSpPr>
@@ -33768,7 +34209,7 @@
       </p:sp>
       <p:sp>
         <p:nvSpPr>
-          <p:cNvPr id="37" name="Shape 35"/>
+          <p:cNvPr id="38" name="Shape 36"/>
           <p:cNvSpPr/>
           <p:nvPr/>
         </p:nvSpPr>
@@ -33793,7 +34234,7 @@
       </p:sp>
       <p:sp>
         <p:nvSpPr>
-          <p:cNvPr id="38" name="Text 36"/>
+          <p:cNvPr id="39" name="Text 37"/>
           <p:cNvSpPr txBox="1"/>
           <p:nvPr/>
         </p:nvSpPr>
@@ -33832,7 +34273,7 @@
       </p:sp>
       <p:sp>
         <p:nvSpPr>
-          <p:cNvPr id="39" name="Shape 37"/>
+          <p:cNvPr id="40" name="Shape 38"/>
           <p:cNvSpPr/>
           <p:nvPr/>
         </p:nvSpPr>
@@ -33857,7 +34298,7 @@
       </p:sp>
       <p:sp>
         <p:nvSpPr>
-          <p:cNvPr id="40" name="Text 38"/>
+          <p:cNvPr id="41" name="Text 39"/>
           <p:cNvSpPr txBox="1"/>
           <p:nvPr/>
         </p:nvSpPr>
@@ -33896,7 +34337,7 @@
       </p:sp>
       <p:sp>
         <p:nvSpPr>
-          <p:cNvPr id="41" name="Shape 39"/>
+          <p:cNvPr id="42" name="Shape 40"/>
           <p:cNvSpPr/>
           <p:nvPr/>
         </p:nvSpPr>
@@ -33921,7 +34362,7 @@
       </p:sp>
       <p:sp>
         <p:nvSpPr>
-          <p:cNvPr id="42" name="Text 40"/>
+          <p:cNvPr id="43" name="Text 41"/>
           <p:cNvSpPr txBox="1"/>
           <p:nvPr/>
         </p:nvSpPr>
@@ -33960,7 +34401,7 @@
       </p:sp>
       <p:sp>
         <p:nvSpPr>
-          <p:cNvPr id="43" name="Shape 41"/>
+          <p:cNvPr id="44" name="Shape 42"/>
           <p:cNvSpPr/>
           <p:nvPr/>
         </p:nvSpPr>
@@ -33985,7 +34426,7 @@
       </p:sp>
       <p:sp>
         <p:nvSpPr>
-          <p:cNvPr id="44" name="Text 42"/>
+          <p:cNvPr id="45" name="Text 43"/>
           <p:cNvSpPr txBox="1"/>
           <p:nvPr/>
         </p:nvSpPr>
@@ -34024,7 +34465,7 @@
       </p:sp>
       <p:sp>
         <p:nvSpPr>
-          <p:cNvPr id="45" name="Shape 43"/>
+          <p:cNvPr id="46" name="Shape 44"/>
           <p:cNvSpPr/>
           <p:nvPr/>
         </p:nvSpPr>
@@ -34049,7 +34490,7 @@
       </p:sp>
       <p:sp>
         <p:nvSpPr>
-          <p:cNvPr id="46" name="Text 44"/>
+          <p:cNvPr id="47" name="Text 45"/>
           <p:cNvSpPr txBox="1"/>
           <p:nvPr/>
         </p:nvSpPr>
@@ -34088,7 +34529,7 @@
       </p:sp>
       <p:sp>
         <p:nvSpPr>
-          <p:cNvPr id="47" name="Shape 45"/>
+          <p:cNvPr id="48" name="Shape 46"/>
           <p:cNvSpPr/>
           <p:nvPr/>
         </p:nvSpPr>
@@ -34113,7 +34554,7 @@
       </p:sp>
       <p:sp>
         <p:nvSpPr>
-          <p:cNvPr id="48" name="Text 46"/>
+          <p:cNvPr id="49" name="Text 47"/>
           <p:cNvSpPr txBox="1"/>
           <p:nvPr/>
         </p:nvSpPr>
@@ -37848,7 +38289,70 @@
       </p:sp>
       <p:sp>
         <p:nvSpPr>
-          <p:cNvPr id="19" name="Shape 17"/>
+          <p:cNvPr id="19" name="Text 17"/>
+          <p:cNvSpPr txBox="1"/>
+          <p:nvPr/>
+        </p:nvSpPr>
+        <p:spPr>
+          <a:xfrm>
+            <a:off x="502920" y="3639312"/>
+            <a:ext cx="11201400" cy="685800"/>
+          </a:xfrm>
+          <a:prstGeom prst="rect">
+            <a:avLst/>
+          </a:prstGeom>
+          <a:noFill/>
+          <a:ln/>
+        </p:spPr>
+        <p:txBody>
+          <a:bodyPr wrap="square" lIns="0" tIns="0" rIns="0" bIns="0" rtlCol="0" anchor="ctr"/>
+          <a:lstStyle/>
+          <a:p>
+            <a:pPr indent="0" marL="0">
+              <a:lnSpc>
+                <a:spcPct val="120000"/>
+              </a:lnSpc>
+              <a:buNone/>
+            </a:pPr>
+            <a:r>
+              <a:rPr lang="en-US" sz="850" b="1" dirty="0">
+                <a:solidFill>
+                  <a:srgbClr val="8A8A8A"/>
+                </a:solidFill>
+                <a:latin typeface="Consolas" pitchFamily="34" charset="0"/>
+                <a:ea typeface="Consolas" pitchFamily="34" charset="-122"/>
+                <a:cs typeface="Consolas" pitchFamily="34" charset="-120"/>
+              </a:rPr>
+              <a:t>具体例
+</a:t>
+            </a:r>
+            <a:endParaRPr lang="en-US" sz="850" dirty="0"/>
+          </a:p>
+          <a:p>
+            <a:pPr indent="0" marL="0">
+              <a:lnSpc>
+                <a:spcPct val="120000"/>
+              </a:lnSpc>
+              <a:buNone/>
+            </a:pPr>
+            <a:r>
+              <a:rPr lang="en-US" sz="1050" dirty="0">
+                <a:solidFill>
+                  <a:srgbClr val="171717"/>
+                </a:solidFill>
+                <a:latin typeface="Yu Gothic" pitchFamily="34" charset="0"/>
+                <a:ea typeface="Yu Gothic" pitchFamily="34" charset="-122"/>
+                <a:cs typeface="Yu Gothic" pitchFamily="34" charset="-120"/>
+              </a:rPr>
+              <a:t>小売チェーンのB社は新しい在庫管理システムの導入後、「入力ミスが減ったか」（機能性）「現場が迷わず操作できるか」（使用性）という品質面と、「削減できた在庫ロス額に対する導入費用」（ROI）という経済面の両方で効果を検証した。</a:t>
+            </a:r>
+            <a:endParaRPr lang="en-US" sz="850" dirty="0"/>
+          </a:p>
+        </p:txBody>
+      </p:sp>
+      <p:sp>
+        <p:nvSpPr>
+          <p:cNvPr id="20" name="Shape 18"/>
           <p:cNvSpPr/>
           <p:nvPr/>
         </p:nvSpPr>
@@ -37871,7 +38375,7 @@
       </p:sp>
       <p:sp>
         <p:nvSpPr>
-          <p:cNvPr id="20" name="Shape 18"/>
+          <p:cNvPr id="21" name="Shape 19"/>
           <p:cNvSpPr/>
           <p:nvPr/>
         </p:nvSpPr>
@@ -37891,7 +38395,7 @@
       </p:sp>
       <p:sp>
         <p:nvSpPr>
-          <p:cNvPr id="21" name="Text 19"/>
+          <p:cNvPr id="22" name="Text 20"/>
           <p:cNvSpPr txBox="1"/>
           <p:nvPr/>
         </p:nvSpPr>
@@ -37930,7 +38434,7 @@
       </p:sp>
       <p:sp>
         <p:nvSpPr>
-          <p:cNvPr id="22" name="Text 20"/>
+          <p:cNvPr id="23" name="Text 21"/>
           <p:cNvSpPr txBox="1"/>
           <p:nvPr/>
         </p:nvSpPr>
@@ -37969,7 +38473,7 @@
       </p:sp>
       <p:sp>
         <p:nvSpPr>
-          <p:cNvPr id="23" name="Shape 21"/>
+          <p:cNvPr id="24" name="Shape 22"/>
           <p:cNvSpPr/>
           <p:nvPr/>
         </p:nvSpPr>
@@ -37992,7 +38496,7 @@
       </p:sp>
       <p:sp>
         <p:nvSpPr>
-          <p:cNvPr id="24" name="Text 22"/>
+          <p:cNvPr id="25" name="Text 23"/>
           <p:cNvSpPr txBox="1"/>
           <p:nvPr/>
         </p:nvSpPr>
@@ -38031,7 +38535,7 @@
       </p:sp>
       <p:sp>
         <p:nvSpPr>
-          <p:cNvPr id="25" name="Text 23"/>
+          <p:cNvPr id="26" name="Text 24"/>
           <p:cNvSpPr txBox="1"/>
           <p:nvPr/>
         </p:nvSpPr>
@@ -38070,7 +38574,7 @@
       </p:sp>
       <p:sp>
         <p:nvSpPr>
-          <p:cNvPr id="26" name="Shape 24"/>
+          <p:cNvPr id="27" name="Shape 25"/>
           <p:cNvSpPr/>
           <p:nvPr/>
         </p:nvSpPr>
@@ -38095,7 +38599,7 @@
       </p:sp>
       <p:sp>
         <p:nvSpPr>
-          <p:cNvPr id="27" name="Text 25"/>
+          <p:cNvPr id="28" name="Text 26"/>
           <p:cNvSpPr txBox="1"/>
           <p:nvPr/>
         </p:nvSpPr>
@@ -38134,7 +38638,7 @@
       </p:sp>
       <p:sp>
         <p:nvSpPr>
-          <p:cNvPr id="28" name="Shape 26"/>
+          <p:cNvPr id="29" name="Shape 27"/>
           <p:cNvSpPr/>
           <p:nvPr/>
         </p:nvSpPr>
@@ -38159,7 +38663,7 @@
       </p:sp>
       <p:sp>
         <p:nvSpPr>
-          <p:cNvPr id="29" name="Text 27"/>
+          <p:cNvPr id="30" name="Text 28"/>
           <p:cNvSpPr txBox="1"/>
           <p:nvPr/>
         </p:nvSpPr>
@@ -38198,7 +38702,7 @@
       </p:sp>
       <p:sp>
         <p:nvSpPr>
-          <p:cNvPr id="30" name="Shape 28"/>
+          <p:cNvPr id="31" name="Shape 29"/>
           <p:cNvSpPr/>
           <p:nvPr/>
         </p:nvSpPr>
@@ -38223,7 +38727,7 @@
       </p:sp>
       <p:sp>
         <p:nvSpPr>
-          <p:cNvPr id="31" name="Text 29"/>
+          <p:cNvPr id="32" name="Text 30"/>
           <p:cNvSpPr txBox="1"/>
           <p:nvPr/>
         </p:nvSpPr>
@@ -38262,7 +38766,7 @@
       </p:sp>
       <p:sp>
         <p:nvSpPr>
-          <p:cNvPr id="32" name="Shape 30"/>
+          <p:cNvPr id="33" name="Shape 31"/>
           <p:cNvSpPr/>
           <p:nvPr/>
         </p:nvSpPr>
@@ -38287,7 +38791,7 @@
       </p:sp>
       <p:sp>
         <p:nvSpPr>
-          <p:cNvPr id="33" name="Text 31"/>
+          <p:cNvPr id="34" name="Text 32"/>
           <p:cNvSpPr txBox="1"/>
           <p:nvPr/>
         </p:nvSpPr>
@@ -38326,7 +38830,7 @@
       </p:sp>
       <p:sp>
         <p:nvSpPr>
-          <p:cNvPr id="34" name="Shape 32"/>
+          <p:cNvPr id="35" name="Shape 33"/>
           <p:cNvSpPr/>
           <p:nvPr/>
         </p:nvSpPr>
@@ -38351,7 +38855,7 @@
       </p:sp>
       <p:sp>
         <p:nvSpPr>
-          <p:cNvPr id="35" name="Text 33"/>
+          <p:cNvPr id="36" name="Text 34"/>
           <p:cNvSpPr txBox="1"/>
           <p:nvPr/>
         </p:nvSpPr>
@@ -38390,7 +38894,7 @@
       </p:sp>
       <p:sp>
         <p:nvSpPr>
-          <p:cNvPr id="36" name="Shape 34"/>
+          <p:cNvPr id="37" name="Shape 35"/>
           <p:cNvSpPr/>
           <p:nvPr/>
         </p:nvSpPr>
@@ -38415,7 +38919,7 @@
       </p:sp>
       <p:sp>
         <p:nvSpPr>
-          <p:cNvPr id="37" name="Text 35"/>
+          <p:cNvPr id="38" name="Text 36"/>
           <p:cNvSpPr txBox="1"/>
           <p:nvPr/>
         </p:nvSpPr>
@@ -38454,7 +38958,7 @@
       </p:sp>
       <p:sp>
         <p:nvSpPr>
-          <p:cNvPr id="38" name="Shape 36"/>
+          <p:cNvPr id="39" name="Shape 37"/>
           <p:cNvSpPr/>
           <p:nvPr/>
         </p:nvSpPr>
@@ -38479,7 +38983,7 @@
       </p:sp>
       <p:sp>
         <p:nvSpPr>
-          <p:cNvPr id="39" name="Text 37"/>
+          <p:cNvPr id="40" name="Text 38"/>
           <p:cNvSpPr txBox="1"/>
           <p:nvPr/>
         </p:nvSpPr>
@@ -38518,7 +39022,7 @@
       </p:sp>
       <p:sp>
         <p:nvSpPr>
-          <p:cNvPr id="40" name="Shape 38"/>
+          <p:cNvPr id="41" name="Shape 39"/>
           <p:cNvSpPr/>
           <p:nvPr/>
         </p:nvSpPr>
@@ -38543,7 +39047,7 @@
       </p:sp>
       <p:sp>
         <p:nvSpPr>
-          <p:cNvPr id="41" name="Text 39"/>
+          <p:cNvPr id="42" name="Text 40"/>
           <p:cNvSpPr txBox="1"/>
           <p:nvPr/>
         </p:nvSpPr>
@@ -38582,7 +39086,7 @@
       </p:sp>
       <p:sp>
         <p:nvSpPr>
-          <p:cNvPr id="42" name="Shape 40"/>
+          <p:cNvPr id="43" name="Shape 41"/>
           <p:cNvSpPr/>
           <p:nvPr/>
         </p:nvSpPr>
@@ -38607,7 +39111,7 @@
       </p:sp>
       <p:sp>
         <p:nvSpPr>
-          <p:cNvPr id="43" name="Text 41"/>
+          <p:cNvPr id="44" name="Text 42"/>
           <p:cNvSpPr txBox="1"/>
           <p:nvPr/>
         </p:nvSpPr>
@@ -38646,7 +39150,7 @@
       </p:sp>
       <p:sp>
         <p:nvSpPr>
-          <p:cNvPr id="44" name="Shape 42"/>
+          <p:cNvPr id="45" name="Shape 43"/>
           <p:cNvSpPr/>
           <p:nvPr/>
         </p:nvSpPr>
@@ -38671,7 +39175,7 @@
       </p:sp>
       <p:sp>
         <p:nvSpPr>
-          <p:cNvPr id="45" name="Text 43"/>
+          <p:cNvPr id="46" name="Text 44"/>
           <p:cNvSpPr txBox="1"/>
           <p:nvPr/>
         </p:nvSpPr>
@@ -39326,7 +39830,70 @@
       </p:sp>
       <p:sp>
         <p:nvSpPr>
-          <p:cNvPr id="19" name="Shape 17"/>
+          <p:cNvPr id="19" name="Text 17"/>
+          <p:cNvSpPr txBox="1"/>
+          <p:nvPr/>
+        </p:nvSpPr>
+        <p:spPr>
+          <a:xfrm>
+            <a:off x="502920" y="3639312"/>
+            <a:ext cx="11201400" cy="685800"/>
+          </a:xfrm>
+          <a:prstGeom prst="rect">
+            <a:avLst/>
+          </a:prstGeom>
+          <a:noFill/>
+          <a:ln/>
+        </p:spPr>
+        <p:txBody>
+          <a:bodyPr wrap="square" lIns="0" tIns="0" rIns="0" bIns="0" rtlCol="0" anchor="ctr"/>
+          <a:lstStyle/>
+          <a:p>
+            <a:pPr indent="0" marL="0">
+              <a:lnSpc>
+                <a:spcPct val="120000"/>
+              </a:lnSpc>
+              <a:buNone/>
+            </a:pPr>
+            <a:r>
+              <a:rPr lang="en-US" sz="850" b="1" dirty="0">
+                <a:solidFill>
+                  <a:srgbClr val="8A8A8A"/>
+                </a:solidFill>
+                <a:latin typeface="Consolas" pitchFamily="34" charset="0"/>
+                <a:ea typeface="Consolas" pitchFamily="34" charset="-122"/>
+                <a:cs typeface="Consolas" pitchFamily="34" charset="-120"/>
+              </a:rPr>
+              <a:t>具体例
+</a:t>
+            </a:r>
+            <a:endParaRPr lang="en-US" sz="850" dirty="0"/>
+          </a:p>
+          <a:p>
+            <a:pPr indent="0" marL="0">
+              <a:lnSpc>
+                <a:spcPct val="120000"/>
+              </a:lnSpc>
+              <a:buNone/>
+            </a:pPr>
+            <a:r>
+              <a:rPr lang="en-US" sz="1050" dirty="0">
+                <a:solidFill>
+                  <a:srgbClr val="171717"/>
+                </a:solidFill>
+                <a:latin typeface="Yu Gothic" pitchFamily="34" charset="0"/>
+                <a:ea typeface="Yu Gothic" pitchFamily="34" charset="-122"/>
+                <a:cs typeface="Yu Gothic" pitchFamily="34" charset="-120"/>
+              </a:rPr>
+              <a:t>町工場E社は2種類の製品の原材料在庫という制約条件のもとで利益を最大化する生産量の組み合わせを線形計画法で求め、新製品開発の可否は市場の好不調とその発生確率をデシジョンツリーに整理して期待値で判断した。</a:t>
+            </a:r>
+            <a:endParaRPr lang="en-US" sz="850" dirty="0"/>
+          </a:p>
+        </p:txBody>
+      </p:sp>
+      <p:sp>
+        <p:nvSpPr>
+          <p:cNvPr id="20" name="Shape 18"/>
           <p:cNvSpPr/>
           <p:nvPr/>
         </p:nvSpPr>
@@ -39349,7 +39916,7 @@
       </p:sp>
       <p:sp>
         <p:nvSpPr>
-          <p:cNvPr id="20" name="Shape 18"/>
+          <p:cNvPr id="21" name="Shape 19"/>
           <p:cNvSpPr/>
           <p:nvPr/>
         </p:nvSpPr>
@@ -39369,7 +39936,7 @@
       </p:sp>
       <p:sp>
         <p:nvSpPr>
-          <p:cNvPr id="21" name="Text 19"/>
+          <p:cNvPr id="22" name="Text 20"/>
           <p:cNvSpPr txBox="1"/>
           <p:nvPr/>
         </p:nvSpPr>
@@ -39408,7 +39975,7 @@
       </p:sp>
       <p:sp>
         <p:nvSpPr>
-          <p:cNvPr id="22" name="Text 20"/>
+          <p:cNvPr id="23" name="Text 21"/>
           <p:cNvSpPr txBox="1"/>
           <p:nvPr/>
         </p:nvSpPr>
@@ -39447,7 +40014,7 @@
       </p:sp>
       <p:sp>
         <p:nvSpPr>
-          <p:cNvPr id="23" name="Shape 21"/>
+          <p:cNvPr id="24" name="Shape 22"/>
           <p:cNvSpPr/>
           <p:nvPr/>
         </p:nvSpPr>
@@ -39470,7 +40037,7 @@
       </p:sp>
       <p:sp>
         <p:nvSpPr>
-          <p:cNvPr id="24" name="Text 22"/>
+          <p:cNvPr id="25" name="Text 23"/>
           <p:cNvSpPr txBox="1"/>
           <p:nvPr/>
         </p:nvSpPr>
@@ -39509,7 +40076,7 @@
       </p:sp>
       <p:sp>
         <p:nvSpPr>
-          <p:cNvPr id="25" name="Text 23"/>
+          <p:cNvPr id="26" name="Text 24"/>
           <p:cNvSpPr txBox="1"/>
           <p:nvPr/>
         </p:nvSpPr>
@@ -39548,7 +40115,7 @@
       </p:sp>
       <p:sp>
         <p:nvSpPr>
-          <p:cNvPr id="26" name="Shape 24"/>
+          <p:cNvPr id="27" name="Shape 25"/>
           <p:cNvSpPr/>
           <p:nvPr/>
         </p:nvSpPr>
@@ -39573,7 +40140,7 @@
       </p:sp>
       <p:sp>
         <p:nvSpPr>
-          <p:cNvPr id="27" name="Text 25"/>
+          <p:cNvPr id="28" name="Text 26"/>
           <p:cNvSpPr txBox="1"/>
           <p:nvPr/>
         </p:nvSpPr>
@@ -39612,7 +40179,7 @@
       </p:sp>
       <p:sp>
         <p:nvSpPr>
-          <p:cNvPr id="28" name="Shape 26"/>
+          <p:cNvPr id="29" name="Shape 27"/>
           <p:cNvSpPr/>
           <p:nvPr/>
         </p:nvSpPr>
@@ -39637,7 +40204,7 @@
       </p:sp>
       <p:sp>
         <p:nvSpPr>
-          <p:cNvPr id="29" name="Text 27"/>
+          <p:cNvPr id="30" name="Text 28"/>
           <p:cNvSpPr txBox="1"/>
           <p:nvPr/>
         </p:nvSpPr>
@@ -39676,7 +40243,7 @@
       </p:sp>
       <p:sp>
         <p:nvSpPr>
-          <p:cNvPr id="30" name="Shape 28"/>
+          <p:cNvPr id="31" name="Shape 29"/>
           <p:cNvSpPr/>
           <p:nvPr/>
         </p:nvSpPr>
@@ -39701,7 +40268,7 @@
       </p:sp>
       <p:sp>
         <p:nvSpPr>
-          <p:cNvPr id="31" name="Text 29"/>
+          <p:cNvPr id="32" name="Text 30"/>
           <p:cNvSpPr txBox="1"/>
           <p:nvPr/>
         </p:nvSpPr>
@@ -39740,7 +40307,7 @@
       </p:sp>
       <p:sp>
         <p:nvSpPr>
-          <p:cNvPr id="32" name="Shape 30"/>
+          <p:cNvPr id="33" name="Shape 31"/>
           <p:cNvSpPr/>
           <p:nvPr/>
         </p:nvSpPr>
@@ -39765,7 +40332,7 @@
       </p:sp>
       <p:sp>
         <p:nvSpPr>
-          <p:cNvPr id="33" name="Text 31"/>
+          <p:cNvPr id="34" name="Text 32"/>
           <p:cNvSpPr txBox="1"/>
           <p:nvPr/>
         </p:nvSpPr>
@@ -39804,7 +40371,7 @@
       </p:sp>
       <p:sp>
         <p:nvSpPr>
-          <p:cNvPr id="34" name="Shape 32"/>
+          <p:cNvPr id="35" name="Shape 33"/>
           <p:cNvSpPr/>
           <p:nvPr/>
         </p:nvSpPr>
@@ -39829,7 +40396,7 @@
       </p:sp>
       <p:sp>
         <p:nvSpPr>
-          <p:cNvPr id="35" name="Text 33"/>
+          <p:cNvPr id="36" name="Text 34"/>
           <p:cNvSpPr txBox="1"/>
           <p:nvPr/>
         </p:nvSpPr>
@@ -39868,7 +40435,7 @@
       </p:sp>
       <p:sp>
         <p:nvSpPr>
-          <p:cNvPr id="36" name="Shape 34"/>
+          <p:cNvPr id="37" name="Shape 35"/>
           <p:cNvSpPr/>
           <p:nvPr/>
         </p:nvSpPr>
@@ -39893,7 +40460,7 @@
       </p:sp>
       <p:sp>
         <p:nvSpPr>
-          <p:cNvPr id="37" name="Text 35"/>
+          <p:cNvPr id="38" name="Text 36"/>
           <p:cNvSpPr txBox="1"/>
           <p:nvPr/>
         </p:nvSpPr>
@@ -39932,7 +40499,7 @@
       </p:sp>
       <p:sp>
         <p:nvSpPr>
-          <p:cNvPr id="38" name="Shape 36"/>
+          <p:cNvPr id="39" name="Shape 37"/>
           <p:cNvSpPr/>
           <p:nvPr/>
         </p:nvSpPr>
@@ -39957,7 +40524,7 @@
       </p:sp>
       <p:sp>
         <p:nvSpPr>
-          <p:cNvPr id="39" name="Text 37"/>
+          <p:cNvPr id="40" name="Text 38"/>
           <p:cNvSpPr txBox="1"/>
           <p:nvPr/>
         </p:nvSpPr>
@@ -39996,7 +40563,7 @@
       </p:sp>
       <p:sp>
         <p:nvSpPr>
-          <p:cNvPr id="40" name="Shape 38"/>
+          <p:cNvPr id="41" name="Shape 39"/>
           <p:cNvSpPr/>
           <p:nvPr/>
         </p:nvSpPr>
@@ -40021,7 +40588,7 @@
       </p:sp>
       <p:sp>
         <p:nvSpPr>
-          <p:cNvPr id="41" name="Text 39"/>
+          <p:cNvPr id="42" name="Text 40"/>
           <p:cNvSpPr txBox="1"/>
           <p:nvPr/>
         </p:nvSpPr>
@@ -40060,7 +40627,7 @@
       </p:sp>
       <p:sp>
         <p:nvSpPr>
-          <p:cNvPr id="42" name="Shape 40"/>
+          <p:cNvPr id="43" name="Shape 41"/>
           <p:cNvSpPr/>
           <p:nvPr/>
         </p:nvSpPr>
@@ -40085,7 +40652,7 @@
       </p:sp>
       <p:sp>
         <p:nvSpPr>
-          <p:cNvPr id="43" name="Text 41"/>
+          <p:cNvPr id="44" name="Text 42"/>
           <p:cNvSpPr txBox="1"/>
           <p:nvPr/>
         </p:nvSpPr>
@@ -40124,7 +40691,7 @@
       </p:sp>
       <p:sp>
         <p:nvSpPr>
-          <p:cNvPr id="44" name="Shape 42"/>
+          <p:cNvPr id="45" name="Shape 43"/>
           <p:cNvSpPr/>
           <p:nvPr/>
         </p:nvSpPr>
@@ -40149,7 +40716,7 @@
       </p:sp>
       <p:sp>
         <p:nvSpPr>
-          <p:cNvPr id="45" name="Text 43"/>
+          <p:cNvPr id="46" name="Text 44"/>
           <p:cNvSpPr txBox="1"/>
           <p:nvPr/>
         </p:nvSpPr>
@@ -40905,7 +41472,70 @@
       </p:sp>
       <p:sp>
         <p:nvSpPr>
-          <p:cNvPr id="22" name="Shape 20"/>
+          <p:cNvPr id="22" name="Text 20"/>
+          <p:cNvSpPr txBox="1"/>
+          <p:nvPr/>
+        </p:nvSpPr>
+        <p:spPr>
+          <a:xfrm>
+            <a:off x="502920" y="3703320"/>
+            <a:ext cx="11201400" cy="685800"/>
+          </a:xfrm>
+          <a:prstGeom prst="rect">
+            <a:avLst/>
+          </a:prstGeom>
+          <a:noFill/>
+          <a:ln/>
+        </p:spPr>
+        <p:txBody>
+          <a:bodyPr wrap="square" lIns="0" tIns="0" rIns="0" bIns="0" rtlCol="0" anchor="ctr"/>
+          <a:lstStyle/>
+          <a:p>
+            <a:pPr indent="0" marL="0">
+              <a:lnSpc>
+                <a:spcPct val="120000"/>
+              </a:lnSpc>
+              <a:buNone/>
+            </a:pPr>
+            <a:r>
+              <a:rPr lang="en-US" sz="850" b="1" dirty="0">
+                <a:solidFill>
+                  <a:srgbClr val="8A8A8A"/>
+                </a:solidFill>
+                <a:latin typeface="Consolas" pitchFamily="34" charset="0"/>
+                <a:ea typeface="Consolas" pitchFamily="34" charset="-122"/>
+                <a:cs typeface="Consolas" pitchFamily="34" charset="-120"/>
+              </a:rPr>
+              <a:t>具体例
+</a:t>
+            </a:r>
+            <a:endParaRPr lang="en-US" sz="850" dirty="0"/>
+          </a:p>
+          <a:p>
+            <a:pPr indent="0" marL="0">
+              <a:lnSpc>
+                <a:spcPct val="120000"/>
+              </a:lnSpc>
+              <a:buNone/>
+            </a:pPr>
+            <a:r>
+              <a:rPr lang="en-US" sz="1050" dirty="0">
+                <a:solidFill>
+                  <a:srgbClr val="171717"/>
+                </a:solidFill>
+                <a:latin typeface="Yu Gothic" pitchFamily="34" charset="0"/>
+                <a:ea typeface="Yu Gothic" pitchFamily="34" charset="-122"/>
+                <a:cs typeface="Yu Gothic" pitchFamily="34" charset="-120"/>
+              </a:rPr>
+              <a:t>小売チェーンのB社は来店客数と気温のデータから回帰分析で関係式を求める一方、購買データをクラスター分析でいくつかの顧客グループに分類し、その結果をBIツールでダッシュボード化して経営者に提示している。</a:t>
+            </a:r>
+            <a:endParaRPr lang="en-US" sz="850" dirty="0"/>
+          </a:p>
+        </p:txBody>
+      </p:sp>
+      <p:sp>
+        <p:nvSpPr>
+          <p:cNvPr id="23" name="Shape 21"/>
           <p:cNvSpPr/>
           <p:nvPr/>
         </p:nvSpPr>
@@ -40928,7 +41558,7 @@
       </p:sp>
       <p:sp>
         <p:nvSpPr>
-          <p:cNvPr id="23" name="Shape 21"/>
+          <p:cNvPr id="24" name="Shape 22"/>
           <p:cNvSpPr/>
           <p:nvPr/>
         </p:nvSpPr>
@@ -40948,7 +41578,7 @@
       </p:sp>
       <p:sp>
         <p:nvSpPr>
-          <p:cNvPr id="24" name="Text 22"/>
+          <p:cNvPr id="25" name="Text 23"/>
           <p:cNvSpPr txBox="1"/>
           <p:nvPr/>
         </p:nvSpPr>
@@ -40987,7 +41617,7 @@
       </p:sp>
       <p:sp>
         <p:nvSpPr>
-          <p:cNvPr id="25" name="Text 23"/>
+          <p:cNvPr id="26" name="Text 24"/>
           <p:cNvSpPr txBox="1"/>
           <p:nvPr/>
         </p:nvSpPr>
@@ -41026,7 +41656,7 @@
       </p:sp>
       <p:sp>
         <p:nvSpPr>
-          <p:cNvPr id="26" name="Shape 24"/>
+          <p:cNvPr id="27" name="Shape 25"/>
           <p:cNvSpPr/>
           <p:nvPr/>
         </p:nvSpPr>
@@ -41049,7 +41679,7 @@
       </p:sp>
       <p:sp>
         <p:nvSpPr>
-          <p:cNvPr id="27" name="Text 25"/>
+          <p:cNvPr id="28" name="Text 26"/>
           <p:cNvSpPr txBox="1"/>
           <p:nvPr/>
         </p:nvSpPr>
@@ -41088,7 +41718,7 @@
       </p:sp>
       <p:sp>
         <p:nvSpPr>
-          <p:cNvPr id="28" name="Text 26"/>
+          <p:cNvPr id="29" name="Text 27"/>
           <p:cNvSpPr txBox="1"/>
           <p:nvPr/>
         </p:nvSpPr>
@@ -41127,7 +41757,7 @@
       </p:sp>
       <p:sp>
         <p:nvSpPr>
-          <p:cNvPr id="29" name="Shape 27"/>
+          <p:cNvPr id="30" name="Shape 28"/>
           <p:cNvSpPr/>
           <p:nvPr/>
         </p:nvSpPr>
@@ -41152,7 +41782,7 @@
       </p:sp>
       <p:sp>
         <p:nvSpPr>
-          <p:cNvPr id="30" name="Text 28"/>
+          <p:cNvPr id="31" name="Text 29"/>
           <p:cNvSpPr txBox="1"/>
           <p:nvPr/>
         </p:nvSpPr>
@@ -41191,7 +41821,7 @@
       </p:sp>
       <p:sp>
         <p:nvSpPr>
-          <p:cNvPr id="31" name="Shape 29"/>
+          <p:cNvPr id="32" name="Shape 30"/>
           <p:cNvSpPr/>
           <p:nvPr/>
         </p:nvSpPr>
@@ -41216,7 +41846,7 @@
       </p:sp>
       <p:sp>
         <p:nvSpPr>
-          <p:cNvPr id="32" name="Text 30"/>
+          <p:cNvPr id="33" name="Text 31"/>
           <p:cNvSpPr txBox="1"/>
           <p:nvPr/>
         </p:nvSpPr>
@@ -41255,7 +41885,7 @@
       </p:sp>
       <p:sp>
         <p:nvSpPr>
-          <p:cNvPr id="33" name="Shape 31"/>
+          <p:cNvPr id="34" name="Shape 32"/>
           <p:cNvSpPr/>
           <p:nvPr/>
         </p:nvSpPr>
@@ -41280,7 +41910,7 @@
       </p:sp>
       <p:sp>
         <p:nvSpPr>
-          <p:cNvPr id="34" name="Text 32"/>
+          <p:cNvPr id="35" name="Text 33"/>
           <p:cNvSpPr txBox="1"/>
           <p:nvPr/>
         </p:nvSpPr>
@@ -41319,7 +41949,7 @@
       </p:sp>
       <p:sp>
         <p:nvSpPr>
-          <p:cNvPr id="35" name="Shape 33"/>
+          <p:cNvPr id="36" name="Shape 34"/>
           <p:cNvSpPr/>
           <p:nvPr/>
         </p:nvSpPr>
@@ -41344,7 +41974,7 @@
       </p:sp>
       <p:sp>
         <p:nvSpPr>
-          <p:cNvPr id="36" name="Text 34"/>
+          <p:cNvPr id="37" name="Text 35"/>
           <p:cNvSpPr txBox="1"/>
           <p:nvPr/>
         </p:nvSpPr>
@@ -41383,7 +42013,7 @@
       </p:sp>
       <p:sp>
         <p:nvSpPr>
-          <p:cNvPr id="37" name="Shape 35"/>
+          <p:cNvPr id="38" name="Shape 36"/>
           <p:cNvSpPr/>
           <p:nvPr/>
         </p:nvSpPr>
@@ -41408,7 +42038,7 @@
       </p:sp>
       <p:sp>
         <p:nvSpPr>
-          <p:cNvPr id="38" name="Text 36"/>
+          <p:cNvPr id="39" name="Text 37"/>
           <p:cNvSpPr txBox="1"/>
           <p:nvPr/>
         </p:nvSpPr>
@@ -41447,7 +42077,7 @@
       </p:sp>
       <p:sp>
         <p:nvSpPr>
-          <p:cNvPr id="39" name="Shape 37"/>
+          <p:cNvPr id="40" name="Shape 38"/>
           <p:cNvSpPr/>
           <p:nvPr/>
         </p:nvSpPr>
@@ -41472,7 +42102,7 @@
       </p:sp>
       <p:sp>
         <p:nvSpPr>
-          <p:cNvPr id="40" name="Text 38"/>
+          <p:cNvPr id="41" name="Text 39"/>
           <p:cNvSpPr txBox="1"/>
           <p:nvPr/>
         </p:nvSpPr>
@@ -41511,7 +42141,7 @@
       </p:sp>
       <p:sp>
         <p:nvSpPr>
-          <p:cNvPr id="41" name="Shape 39"/>
+          <p:cNvPr id="42" name="Shape 40"/>
           <p:cNvSpPr/>
           <p:nvPr/>
         </p:nvSpPr>
@@ -41536,7 +42166,7 @@
       </p:sp>
       <p:sp>
         <p:nvSpPr>
-          <p:cNvPr id="42" name="Text 40"/>
+          <p:cNvPr id="43" name="Text 41"/>
           <p:cNvSpPr txBox="1"/>
           <p:nvPr/>
         </p:nvSpPr>
@@ -41575,7 +42205,7 @@
       </p:sp>
       <p:sp>
         <p:nvSpPr>
-          <p:cNvPr id="43" name="Shape 41"/>
+          <p:cNvPr id="44" name="Shape 42"/>
           <p:cNvSpPr/>
           <p:nvPr/>
         </p:nvSpPr>
@@ -41600,7 +42230,7 @@
       </p:sp>
       <p:sp>
         <p:nvSpPr>
-          <p:cNvPr id="44" name="Text 42"/>
+          <p:cNvPr id="45" name="Text 43"/>
           <p:cNvSpPr txBox="1"/>
           <p:nvPr/>
         </p:nvSpPr>
@@ -41639,7 +42269,7 @@
       </p:sp>
       <p:sp>
         <p:nvSpPr>
-          <p:cNvPr id="45" name="Shape 43"/>
+          <p:cNvPr id="46" name="Shape 44"/>
           <p:cNvSpPr/>
           <p:nvPr/>
         </p:nvSpPr>
@@ -41664,7 +42294,7 @@
       </p:sp>
       <p:sp>
         <p:nvSpPr>
-          <p:cNvPr id="46" name="Text 44"/>
+          <p:cNvPr id="47" name="Text 45"/>
           <p:cNvSpPr txBox="1"/>
           <p:nvPr/>
         </p:nvSpPr>
@@ -41703,7 +42333,7 @@
       </p:sp>
       <p:sp>
         <p:nvSpPr>
-          <p:cNvPr id="47" name="Shape 45"/>
+          <p:cNvPr id="48" name="Shape 46"/>
           <p:cNvSpPr/>
           <p:nvPr/>
         </p:nvSpPr>
@@ -41728,7 +42358,7 @@
       </p:sp>
       <p:sp>
         <p:nvSpPr>
-          <p:cNvPr id="48" name="Text 46"/>
+          <p:cNvPr id="49" name="Text 47"/>
           <p:cNvSpPr txBox="1"/>
           <p:nvPr/>
         </p:nvSpPr>
@@ -42484,7 +43114,70 @@
       </p:sp>
       <p:sp>
         <p:nvSpPr>
-          <p:cNvPr id="22" name="Shape 20"/>
+          <p:cNvPr id="22" name="Text 20"/>
+          <p:cNvSpPr txBox="1"/>
+          <p:nvPr/>
+        </p:nvSpPr>
+        <p:spPr>
+          <a:xfrm>
+            <a:off x="502920" y="3703320"/>
+            <a:ext cx="11201400" cy="868680"/>
+          </a:xfrm>
+          <a:prstGeom prst="rect">
+            <a:avLst/>
+          </a:prstGeom>
+          <a:noFill/>
+          <a:ln/>
+        </p:spPr>
+        <p:txBody>
+          <a:bodyPr wrap="square" lIns="0" tIns="0" rIns="0" bIns="0" rtlCol="0" anchor="ctr"/>
+          <a:lstStyle/>
+          <a:p>
+            <a:pPr indent="0" marL="0">
+              <a:lnSpc>
+                <a:spcPct val="120000"/>
+              </a:lnSpc>
+              <a:buNone/>
+            </a:pPr>
+            <a:r>
+              <a:rPr lang="en-US" sz="850" b="1" dirty="0">
+                <a:solidFill>
+                  <a:srgbClr val="8A8A8A"/>
+                </a:solidFill>
+                <a:latin typeface="Consolas" pitchFamily="34" charset="0"/>
+                <a:ea typeface="Consolas" pitchFamily="34" charset="-122"/>
+                <a:cs typeface="Consolas" pitchFamily="34" charset="-120"/>
+              </a:rPr>
+              <a:t>具体例
+</a:t>
+            </a:r>
+            <a:endParaRPr lang="en-US" sz="850" dirty="0"/>
+          </a:p>
+          <a:p>
+            <a:pPr indent="0" marL="0">
+              <a:lnSpc>
+                <a:spcPct val="120000"/>
+              </a:lnSpc>
+              <a:buNone/>
+            </a:pPr>
+            <a:r>
+              <a:rPr lang="en-US" sz="1050" dirty="0">
+                <a:solidFill>
+                  <a:srgbClr val="171717"/>
+                </a:solidFill>
+                <a:latin typeface="Yu Gothic" pitchFamily="34" charset="0"/>
+                <a:ea typeface="Yu Gothic" pitchFamily="34" charset="-122"/>
+                <a:cs typeface="Yu Gothic" pitchFamily="34" charset="-120"/>
+              </a:rPr>
+              <a:t>金融機関F社は過去の融資先データ（返済できたか）を使い新規申込者の延滞リスクを予測する教師あり学習モデルを構築する一方、生成AIチャットボットに自社製品を質問すると実在しない機能をもっともらしく回答したため、回答内容は必ず事実確認する運用にしている。</a:t>
+            </a:r>
+            <a:endParaRPr lang="en-US" sz="850" dirty="0"/>
+          </a:p>
+        </p:txBody>
+      </p:sp>
+      <p:sp>
+        <p:nvSpPr>
+          <p:cNvPr id="23" name="Shape 21"/>
           <p:cNvSpPr/>
           <p:nvPr/>
         </p:nvSpPr>
@@ -42507,7 +43200,7 @@
       </p:sp>
       <p:sp>
         <p:nvSpPr>
-          <p:cNvPr id="23" name="Shape 21"/>
+          <p:cNvPr id="24" name="Shape 22"/>
           <p:cNvSpPr/>
           <p:nvPr/>
         </p:nvSpPr>
@@ -42527,7 +43220,7 @@
       </p:sp>
       <p:sp>
         <p:nvSpPr>
-          <p:cNvPr id="24" name="Text 22"/>
+          <p:cNvPr id="25" name="Text 23"/>
           <p:cNvSpPr txBox="1"/>
           <p:nvPr/>
         </p:nvSpPr>
@@ -42566,7 +43259,7 @@
       </p:sp>
       <p:sp>
         <p:nvSpPr>
-          <p:cNvPr id="25" name="Text 23"/>
+          <p:cNvPr id="26" name="Text 24"/>
           <p:cNvSpPr txBox="1"/>
           <p:nvPr/>
         </p:nvSpPr>
@@ -42605,7 +43298,7 @@
       </p:sp>
       <p:sp>
         <p:nvSpPr>
-          <p:cNvPr id="26" name="Shape 24"/>
+          <p:cNvPr id="27" name="Shape 25"/>
           <p:cNvSpPr/>
           <p:nvPr/>
         </p:nvSpPr>
@@ -42628,7 +43321,7 @@
       </p:sp>
       <p:sp>
         <p:nvSpPr>
-          <p:cNvPr id="27" name="Text 25"/>
+          <p:cNvPr id="28" name="Text 26"/>
           <p:cNvSpPr txBox="1"/>
           <p:nvPr/>
         </p:nvSpPr>
@@ -42667,7 +43360,7 @@
       </p:sp>
       <p:sp>
         <p:nvSpPr>
-          <p:cNvPr id="28" name="Text 26"/>
+          <p:cNvPr id="29" name="Text 27"/>
           <p:cNvSpPr txBox="1"/>
           <p:nvPr/>
         </p:nvSpPr>
@@ -42706,7 +43399,7 @@
       </p:sp>
       <p:sp>
         <p:nvSpPr>
-          <p:cNvPr id="29" name="Shape 27"/>
+          <p:cNvPr id="30" name="Shape 28"/>
           <p:cNvSpPr/>
           <p:nvPr/>
         </p:nvSpPr>
@@ -42731,7 +43424,7 @@
       </p:sp>
       <p:sp>
         <p:nvSpPr>
-          <p:cNvPr id="30" name="Text 28"/>
+          <p:cNvPr id="31" name="Text 29"/>
           <p:cNvSpPr txBox="1"/>
           <p:nvPr/>
         </p:nvSpPr>
@@ -42770,7 +43463,7 @@
       </p:sp>
       <p:sp>
         <p:nvSpPr>
-          <p:cNvPr id="31" name="Shape 29"/>
+          <p:cNvPr id="32" name="Shape 30"/>
           <p:cNvSpPr/>
           <p:nvPr/>
         </p:nvSpPr>
@@ -42795,7 +43488,7 @@
       </p:sp>
       <p:sp>
         <p:nvSpPr>
-          <p:cNvPr id="32" name="Text 30"/>
+          <p:cNvPr id="33" name="Text 31"/>
           <p:cNvSpPr txBox="1"/>
           <p:nvPr/>
         </p:nvSpPr>
@@ -42834,7 +43527,7 @@
       </p:sp>
       <p:sp>
         <p:nvSpPr>
-          <p:cNvPr id="33" name="Shape 31"/>
+          <p:cNvPr id="34" name="Shape 32"/>
           <p:cNvSpPr/>
           <p:nvPr/>
         </p:nvSpPr>
@@ -42859,7 +43552,7 @@
       </p:sp>
       <p:sp>
         <p:nvSpPr>
-          <p:cNvPr id="34" name="Text 32"/>
+          <p:cNvPr id="35" name="Text 33"/>
           <p:cNvSpPr txBox="1"/>
           <p:nvPr/>
         </p:nvSpPr>
@@ -42898,7 +43591,7 @@
       </p:sp>
       <p:sp>
         <p:nvSpPr>
-          <p:cNvPr id="35" name="Shape 33"/>
+          <p:cNvPr id="36" name="Shape 34"/>
           <p:cNvSpPr/>
           <p:nvPr/>
         </p:nvSpPr>
@@ -42923,7 +43616,7 @@
       </p:sp>
       <p:sp>
         <p:nvSpPr>
-          <p:cNvPr id="36" name="Text 34"/>
+          <p:cNvPr id="37" name="Text 35"/>
           <p:cNvSpPr txBox="1"/>
           <p:nvPr/>
         </p:nvSpPr>
@@ -42962,7 +43655,7 @@
       </p:sp>
       <p:sp>
         <p:nvSpPr>
-          <p:cNvPr id="37" name="Shape 35"/>
+          <p:cNvPr id="38" name="Shape 36"/>
           <p:cNvSpPr/>
           <p:nvPr/>
         </p:nvSpPr>
@@ -42987,7 +43680,7 @@
       </p:sp>
       <p:sp>
         <p:nvSpPr>
-          <p:cNvPr id="38" name="Text 36"/>
+          <p:cNvPr id="39" name="Text 37"/>
           <p:cNvSpPr txBox="1"/>
           <p:nvPr/>
         </p:nvSpPr>
@@ -43026,7 +43719,7 @@
       </p:sp>
       <p:sp>
         <p:nvSpPr>
-          <p:cNvPr id="39" name="Shape 37"/>
+          <p:cNvPr id="40" name="Shape 38"/>
           <p:cNvSpPr/>
           <p:nvPr/>
         </p:nvSpPr>
@@ -43051,7 +43744,7 @@
       </p:sp>
       <p:sp>
         <p:nvSpPr>
-          <p:cNvPr id="40" name="Text 38"/>
+          <p:cNvPr id="41" name="Text 39"/>
           <p:cNvSpPr txBox="1"/>
           <p:nvPr/>
         </p:nvSpPr>
@@ -43090,7 +43783,7 @@
       </p:sp>
       <p:sp>
         <p:nvSpPr>
-          <p:cNvPr id="41" name="Shape 39"/>
+          <p:cNvPr id="42" name="Shape 40"/>
           <p:cNvSpPr/>
           <p:nvPr/>
         </p:nvSpPr>
@@ -43115,7 +43808,7 @@
       </p:sp>
       <p:sp>
         <p:nvSpPr>
-          <p:cNvPr id="42" name="Text 40"/>
+          <p:cNvPr id="43" name="Text 41"/>
           <p:cNvSpPr txBox="1"/>
           <p:nvPr/>
         </p:nvSpPr>
@@ -43154,7 +43847,7 @@
       </p:sp>
       <p:sp>
         <p:nvSpPr>
-          <p:cNvPr id="43" name="Shape 41"/>
+          <p:cNvPr id="44" name="Shape 42"/>
           <p:cNvSpPr/>
           <p:nvPr/>
         </p:nvSpPr>
@@ -43179,7 +43872,7 @@
       </p:sp>
       <p:sp>
         <p:nvSpPr>
-          <p:cNvPr id="44" name="Text 42"/>
+          <p:cNvPr id="45" name="Text 43"/>
           <p:cNvSpPr txBox="1"/>
           <p:nvPr/>
         </p:nvSpPr>
@@ -43218,7 +43911,7 @@
       </p:sp>
       <p:sp>
         <p:nvSpPr>
-          <p:cNvPr id="45" name="Shape 43"/>
+          <p:cNvPr id="46" name="Shape 44"/>
           <p:cNvSpPr/>
           <p:nvPr/>
         </p:nvSpPr>
@@ -43243,7 +43936,7 @@
       </p:sp>
       <p:sp>
         <p:nvSpPr>
-          <p:cNvPr id="46" name="Text 44"/>
+          <p:cNvPr id="47" name="Text 45"/>
           <p:cNvSpPr txBox="1"/>
           <p:nvPr/>
         </p:nvSpPr>
@@ -43282,7 +43975,7 @@
       </p:sp>
       <p:sp>
         <p:nvSpPr>
-          <p:cNvPr id="47" name="Shape 45"/>
+          <p:cNvPr id="48" name="Shape 46"/>
           <p:cNvSpPr/>
           <p:nvPr/>
         </p:nvSpPr>
@@ -43307,7 +44000,7 @@
       </p:sp>
       <p:sp>
         <p:nvSpPr>
-          <p:cNvPr id="48" name="Text 46"/>
+          <p:cNvPr id="49" name="Text 47"/>
           <p:cNvSpPr txBox="1"/>
           <p:nvPr/>
         </p:nvSpPr>
@@ -43962,7 +44655,70 @@
       </p:sp>
       <p:sp>
         <p:nvSpPr>
-          <p:cNvPr id="19" name="Shape 17"/>
+          <p:cNvPr id="19" name="Text 17"/>
+          <p:cNvSpPr txBox="1"/>
+          <p:nvPr/>
+        </p:nvSpPr>
+        <p:spPr>
+          <a:xfrm>
+            <a:off x="502920" y="3557016"/>
+            <a:ext cx="11201400" cy="685800"/>
+          </a:xfrm>
+          <a:prstGeom prst="rect">
+            <a:avLst/>
+          </a:prstGeom>
+          <a:noFill/>
+          <a:ln/>
+        </p:spPr>
+        <p:txBody>
+          <a:bodyPr wrap="square" lIns="0" tIns="0" rIns="0" bIns="0" rtlCol="0" anchor="ctr"/>
+          <a:lstStyle/>
+          <a:p>
+            <a:pPr indent="0" marL="0">
+              <a:lnSpc>
+                <a:spcPct val="120000"/>
+              </a:lnSpc>
+              <a:buNone/>
+            </a:pPr>
+            <a:r>
+              <a:rPr lang="en-US" sz="850" b="1" dirty="0">
+                <a:solidFill>
+                  <a:srgbClr val="8A8A8A"/>
+                </a:solidFill>
+                <a:latin typeface="Consolas" pitchFamily="34" charset="0"/>
+                <a:ea typeface="Consolas" pitchFamily="34" charset="-122"/>
+                <a:cs typeface="Consolas" pitchFamily="34" charset="-120"/>
+              </a:rPr>
+              <a:t>具体例
+</a:t>
+            </a:r>
+            <a:endParaRPr lang="en-US" sz="850" dirty="0"/>
+          </a:p>
+          <a:p>
+            <a:pPr indent="0" marL="0">
+              <a:lnSpc>
+                <a:spcPct val="120000"/>
+              </a:lnSpc>
+              <a:buNone/>
+            </a:pPr>
+            <a:r>
+              <a:rPr lang="en-US" sz="1050" dirty="0">
+                <a:solidFill>
+                  <a:srgbClr val="171717"/>
+                </a:solidFill>
+                <a:latin typeface="Yu Gothic" pitchFamily="34" charset="0"/>
+                <a:ea typeface="Yu Gothic" pitchFamily="34" charset="-122"/>
+                <a:cs typeface="Yu Gothic" pitchFamily="34" charset="-120"/>
+              </a:rPr>
+              <a:t>社内システム部門が会計システムを刷新した際、土台となるOS（Windows Server）はそのまま維持し、共通機能を提供するミドルウェア（DBMS）だけを入れ替え、その上で稼働する会計パッケージソフトを導入した。</a:t>
+            </a:r>
+            <a:endParaRPr lang="en-US" sz="850" dirty="0"/>
+          </a:p>
+        </p:txBody>
+      </p:sp>
+      <p:sp>
+        <p:nvSpPr>
+          <p:cNvPr id="20" name="Shape 18"/>
           <p:cNvSpPr/>
           <p:nvPr/>
         </p:nvSpPr>
@@ -43985,7 +44741,7 @@
       </p:sp>
       <p:sp>
         <p:nvSpPr>
-          <p:cNvPr id="20" name="Shape 18"/>
+          <p:cNvPr id="21" name="Shape 19"/>
           <p:cNvSpPr/>
           <p:nvPr/>
         </p:nvSpPr>
@@ -44005,7 +44761,7 @@
       </p:sp>
       <p:sp>
         <p:nvSpPr>
-          <p:cNvPr id="21" name="Text 19"/>
+          <p:cNvPr id="22" name="Text 20"/>
           <p:cNvSpPr txBox="1"/>
           <p:nvPr/>
         </p:nvSpPr>
@@ -44044,7 +44800,7 @@
       </p:sp>
       <p:sp>
         <p:nvSpPr>
-          <p:cNvPr id="22" name="Text 20"/>
+          <p:cNvPr id="23" name="Text 21"/>
           <p:cNvSpPr txBox="1"/>
           <p:nvPr/>
         </p:nvSpPr>
@@ -44083,7 +44839,7 @@
       </p:sp>
       <p:sp>
         <p:nvSpPr>
-          <p:cNvPr id="23" name="Shape 21"/>
+          <p:cNvPr id="24" name="Shape 22"/>
           <p:cNvSpPr/>
           <p:nvPr/>
         </p:nvSpPr>
@@ -44106,7 +44862,7 @@
       </p:sp>
       <p:sp>
         <p:nvSpPr>
-          <p:cNvPr id="24" name="Text 22"/>
+          <p:cNvPr id="25" name="Text 23"/>
           <p:cNvSpPr txBox="1"/>
           <p:nvPr/>
         </p:nvSpPr>
@@ -44145,7 +44901,7 @@
       </p:sp>
       <p:sp>
         <p:nvSpPr>
-          <p:cNvPr id="25" name="Text 23"/>
+          <p:cNvPr id="26" name="Text 24"/>
           <p:cNvSpPr txBox="1"/>
           <p:nvPr/>
         </p:nvSpPr>
@@ -44184,7 +44940,7 @@
       </p:sp>
       <p:sp>
         <p:nvSpPr>
-          <p:cNvPr id="26" name="Shape 24"/>
+          <p:cNvPr id="27" name="Shape 25"/>
           <p:cNvSpPr/>
           <p:nvPr/>
         </p:nvSpPr>
@@ -44209,7 +44965,7 @@
       </p:sp>
       <p:sp>
         <p:nvSpPr>
-          <p:cNvPr id="27" name="Text 25"/>
+          <p:cNvPr id="28" name="Text 26"/>
           <p:cNvSpPr txBox="1"/>
           <p:nvPr/>
         </p:nvSpPr>
@@ -44248,7 +45004,7 @@
       </p:sp>
       <p:sp>
         <p:nvSpPr>
-          <p:cNvPr id="28" name="Shape 26"/>
+          <p:cNvPr id="29" name="Shape 27"/>
           <p:cNvSpPr/>
           <p:nvPr/>
         </p:nvSpPr>
@@ -44273,7 +45029,7 @@
       </p:sp>
       <p:sp>
         <p:nvSpPr>
-          <p:cNvPr id="29" name="Text 27"/>
+          <p:cNvPr id="30" name="Text 28"/>
           <p:cNvSpPr txBox="1"/>
           <p:nvPr/>
         </p:nvSpPr>
@@ -44312,7 +45068,7 @@
       </p:sp>
       <p:sp>
         <p:nvSpPr>
-          <p:cNvPr id="30" name="Shape 28"/>
+          <p:cNvPr id="31" name="Shape 29"/>
           <p:cNvSpPr/>
           <p:nvPr/>
         </p:nvSpPr>
@@ -44337,7 +45093,7 @@
       </p:sp>
       <p:sp>
         <p:nvSpPr>
-          <p:cNvPr id="31" name="Text 29"/>
+          <p:cNvPr id="32" name="Text 30"/>
           <p:cNvSpPr txBox="1"/>
           <p:nvPr/>
         </p:nvSpPr>
@@ -44376,7 +45132,7 @@
       </p:sp>
       <p:sp>
         <p:nvSpPr>
-          <p:cNvPr id="32" name="Shape 30"/>
+          <p:cNvPr id="33" name="Shape 31"/>
           <p:cNvSpPr/>
           <p:nvPr/>
         </p:nvSpPr>
@@ -44401,7 +45157,7 @@
       </p:sp>
       <p:sp>
         <p:nvSpPr>
-          <p:cNvPr id="33" name="Text 31"/>
+          <p:cNvPr id="34" name="Text 32"/>
           <p:cNvSpPr txBox="1"/>
           <p:nvPr/>
         </p:nvSpPr>
@@ -44440,7 +45196,7 @@
       </p:sp>
       <p:sp>
         <p:nvSpPr>
-          <p:cNvPr id="34" name="Shape 32"/>
+          <p:cNvPr id="35" name="Shape 33"/>
           <p:cNvSpPr/>
           <p:nvPr/>
         </p:nvSpPr>
@@ -44465,7 +45221,7 @@
       </p:sp>
       <p:sp>
         <p:nvSpPr>
-          <p:cNvPr id="35" name="Text 33"/>
+          <p:cNvPr id="36" name="Text 34"/>
           <p:cNvSpPr txBox="1"/>
           <p:nvPr/>
         </p:nvSpPr>
@@ -44504,7 +45260,7 @@
       </p:sp>
       <p:sp>
         <p:nvSpPr>
-          <p:cNvPr id="36" name="Shape 34"/>
+          <p:cNvPr id="37" name="Shape 35"/>
           <p:cNvSpPr/>
           <p:nvPr/>
         </p:nvSpPr>
@@ -44529,7 +45285,7 @@
       </p:sp>
       <p:sp>
         <p:nvSpPr>
-          <p:cNvPr id="37" name="Text 35"/>
+          <p:cNvPr id="38" name="Text 36"/>
           <p:cNvSpPr txBox="1"/>
           <p:nvPr/>
         </p:nvSpPr>
@@ -44568,7 +45324,7 @@
       </p:sp>
       <p:sp>
         <p:nvSpPr>
-          <p:cNvPr id="38" name="Shape 36"/>
+          <p:cNvPr id="39" name="Shape 37"/>
           <p:cNvSpPr/>
           <p:nvPr/>
         </p:nvSpPr>
@@ -44593,7 +45349,7 @@
       </p:sp>
       <p:sp>
         <p:nvSpPr>
-          <p:cNvPr id="39" name="Text 37"/>
+          <p:cNvPr id="40" name="Text 38"/>
           <p:cNvSpPr txBox="1"/>
           <p:nvPr/>
         </p:nvSpPr>
@@ -44632,7 +45388,7 @@
       </p:sp>
       <p:sp>
         <p:nvSpPr>
-          <p:cNvPr id="40" name="Shape 38"/>
+          <p:cNvPr id="41" name="Shape 39"/>
           <p:cNvSpPr/>
           <p:nvPr/>
         </p:nvSpPr>
@@ -44657,7 +45413,7 @@
       </p:sp>
       <p:sp>
         <p:nvSpPr>
-          <p:cNvPr id="41" name="Text 39"/>
+          <p:cNvPr id="42" name="Text 40"/>
           <p:cNvSpPr txBox="1"/>
           <p:nvPr/>
         </p:nvSpPr>
@@ -44696,7 +45452,7 @@
       </p:sp>
       <p:sp>
         <p:nvSpPr>
-          <p:cNvPr id="42" name="Shape 40"/>
+          <p:cNvPr id="43" name="Shape 41"/>
           <p:cNvSpPr/>
           <p:nvPr/>
         </p:nvSpPr>
@@ -44721,7 +45477,7 @@
       </p:sp>
       <p:sp>
         <p:nvSpPr>
-          <p:cNvPr id="43" name="Text 41"/>
+          <p:cNvPr id="44" name="Text 42"/>
           <p:cNvSpPr txBox="1"/>
           <p:nvPr/>
         </p:nvSpPr>
@@ -44760,7 +45516,7 @@
       </p:sp>
       <p:sp>
         <p:nvSpPr>
-          <p:cNvPr id="44" name="Shape 42"/>
+          <p:cNvPr id="45" name="Shape 43"/>
           <p:cNvSpPr/>
           <p:nvPr/>
         </p:nvSpPr>
@@ -44785,7 +45541,7 @@
       </p:sp>
       <p:sp>
         <p:nvSpPr>
-          <p:cNvPr id="45" name="Text 43"/>
+          <p:cNvPr id="46" name="Text 44"/>
           <p:cNvSpPr txBox="1"/>
           <p:nvPr/>
         </p:nvSpPr>
@@ -45565,13 +46321,76 @@
       </p:sp>
       <p:sp>
         <p:nvSpPr>
-          <p:cNvPr id="22" name="Shape 20"/>
+          <p:cNvPr id="22" name="Text 20"/>
+          <p:cNvSpPr txBox="1"/>
+          <p:nvPr/>
+        </p:nvSpPr>
+        <p:spPr>
+          <a:xfrm>
+            <a:off x="502920" y="5148072"/>
+            <a:ext cx="11201400" cy="685800"/>
+          </a:xfrm>
+          <a:prstGeom prst="rect">
+            <a:avLst/>
+          </a:prstGeom>
+          <a:noFill/>
+          <a:ln/>
+        </p:spPr>
+        <p:txBody>
+          <a:bodyPr wrap="square" lIns="0" tIns="0" rIns="0" bIns="0" rtlCol="0" anchor="ctr"/>
+          <a:lstStyle/>
+          <a:p>
+            <a:pPr indent="0" marL="0">
+              <a:lnSpc>
+                <a:spcPct val="120000"/>
+              </a:lnSpc>
+              <a:buNone/>
+            </a:pPr>
+            <a:r>
+              <a:rPr lang="en-US" sz="850" b="1" dirty="0">
+                <a:solidFill>
+                  <a:srgbClr val="8A8A8A"/>
+                </a:solidFill>
+                <a:latin typeface="Consolas" pitchFamily="34" charset="0"/>
+                <a:ea typeface="Consolas" pitchFamily="34" charset="-122"/>
+                <a:cs typeface="Consolas" pitchFamily="34" charset="-120"/>
+              </a:rPr>
+              <a:t>具体例
+</a:t>
+            </a:r>
+            <a:endParaRPr lang="en-US" sz="850" dirty="0"/>
+          </a:p>
+          <a:p>
+            <a:pPr indent="0" marL="0">
+              <a:lnSpc>
+                <a:spcPct val="120000"/>
+              </a:lnSpc>
+              <a:buNone/>
+            </a:pPr>
+            <a:r>
+              <a:rPr lang="en-US" sz="1050" dirty="0">
+                <a:solidFill>
+                  <a:srgbClr val="171717"/>
+                </a:solidFill>
+                <a:latin typeface="Yu Gothic" pitchFamily="34" charset="0"/>
+                <a:ea typeface="Yu Gothic" pitchFamily="34" charset="-122"/>
+                <a:cs typeface="Yu Gothic" pitchFamily="34" charset="-120"/>
+              </a:rPr>
+              <a:t>小売チェーンのB社の在庫照会システムは、商品コードで五十音順に並んだ在庫データから二分探索で瞬時に目的の商品を探し出す一方、直近の操作履歴は「元に戻す」機能のためスタック（LIFO）で保持している。</a:t>
+            </a:r>
+            <a:endParaRPr lang="en-US" sz="850" dirty="0"/>
+          </a:p>
+        </p:txBody>
+      </p:sp>
+      <p:sp>
+        <p:nvSpPr>
+          <p:cNvPr id="23" name="Shape 21"/>
           <p:cNvSpPr/>
           <p:nvPr/>
         </p:nvSpPr>
         <p:spPr>
           <a:xfrm>
-            <a:off x="502920" y="5989320"/>
+            <a:off x="502920" y="5998464"/>
             <a:ext cx="11201400" cy="0"/>
           </a:xfrm>
           <a:prstGeom prst="line">
@@ -45588,13 +46407,13 @@
       </p:sp>
       <p:sp>
         <p:nvSpPr>
-          <p:cNvPr id="23" name="Shape 21"/>
+          <p:cNvPr id="24" name="Shape 22"/>
           <p:cNvSpPr/>
           <p:nvPr/>
         </p:nvSpPr>
         <p:spPr>
           <a:xfrm>
-            <a:off x="502920" y="6062472"/>
+            <a:off x="502920" y="6071616"/>
             <a:ext cx="329184" cy="329184"/>
           </a:xfrm>
           <a:prstGeom prst="ellipse">
@@ -45608,13 +46427,13 @@
       </p:sp>
       <p:sp>
         <p:nvSpPr>
-          <p:cNvPr id="24" name="Text 22"/>
-          <p:cNvSpPr txBox="1"/>
-          <p:nvPr/>
-        </p:nvSpPr>
-        <p:spPr>
-          <a:xfrm>
-            <a:off x="502920" y="6062472"/>
+          <p:cNvPr id="25" name="Text 23"/>
+          <p:cNvSpPr txBox="1"/>
+          <p:nvPr/>
+        </p:nvSpPr>
+        <p:spPr>
+          <a:xfrm>
+            <a:off x="502920" y="6071616"/>
             <a:ext cx="329184" cy="329184"/>
           </a:xfrm>
           <a:prstGeom prst="rect">
@@ -45647,13 +46466,13 @@
       </p:sp>
       <p:sp>
         <p:nvSpPr>
-          <p:cNvPr id="25" name="Text 23"/>
-          <p:cNvSpPr txBox="1"/>
-          <p:nvPr/>
-        </p:nvSpPr>
-        <p:spPr>
-          <a:xfrm>
-            <a:off x="914400" y="6062472"/>
+          <p:cNvPr id="26" name="Text 24"/>
+          <p:cNvSpPr txBox="1"/>
+          <p:nvPr/>
+        </p:nvSpPr>
+        <p:spPr>
+          <a:xfrm>
+            <a:off x="914400" y="6071616"/>
             <a:ext cx="1371600" cy="329184"/>
           </a:xfrm>
           <a:prstGeom prst="rect">
@@ -45686,13 +46505,13 @@
       </p:sp>
       <p:sp>
         <p:nvSpPr>
-          <p:cNvPr id="26" name="Shape 24"/>
+          <p:cNvPr id="27" name="Shape 25"/>
           <p:cNvSpPr/>
           <p:nvPr/>
         </p:nvSpPr>
         <p:spPr>
           <a:xfrm>
-            <a:off x="2331720" y="6062472"/>
+            <a:off x="2331720" y="6071616"/>
             <a:ext cx="0" cy="329184"/>
           </a:xfrm>
           <a:prstGeom prst="line">
@@ -45709,13 +46528,13 @@
       </p:sp>
       <p:sp>
         <p:nvSpPr>
-          <p:cNvPr id="27" name="Text 25"/>
-          <p:cNvSpPr txBox="1"/>
-          <p:nvPr/>
-        </p:nvSpPr>
-        <p:spPr>
-          <a:xfrm>
-            <a:off x="2514600" y="6044184"/>
+          <p:cNvPr id="28" name="Text 26"/>
+          <p:cNvSpPr txBox="1"/>
+          <p:nvPr/>
+        </p:nvSpPr>
+        <p:spPr>
+          <a:xfrm>
+            <a:off x="2514600" y="6053328"/>
             <a:ext cx="9189720" cy="365760"/>
           </a:xfrm>
           <a:prstGeom prst="rect">
@@ -45748,13 +46567,13 @@
       </p:sp>
       <p:sp>
         <p:nvSpPr>
-          <p:cNvPr id="28" name="Text 26"/>
-          <p:cNvSpPr txBox="1"/>
-          <p:nvPr/>
-        </p:nvSpPr>
-        <p:spPr>
-          <a:xfrm>
-            <a:off x="502920" y="6464808"/>
+          <p:cNvPr id="29" name="Text 27"/>
+          <p:cNvSpPr txBox="1"/>
+          <p:nvPr/>
+        </p:nvSpPr>
+        <p:spPr>
+          <a:xfrm>
+            <a:off x="502920" y="6473952"/>
             <a:ext cx="1417320" cy="219456"/>
           </a:xfrm>
           <a:prstGeom prst="rect">
@@ -45787,13 +46606,13 @@
       </p:sp>
       <p:sp>
         <p:nvSpPr>
-          <p:cNvPr id="29" name="Shape 27"/>
+          <p:cNvPr id="30" name="Shape 28"/>
           <p:cNvSpPr/>
           <p:nvPr/>
         </p:nvSpPr>
         <p:spPr>
           <a:xfrm>
-            <a:off x="2466594" y="6464808"/>
+            <a:off x="2466594" y="6473952"/>
             <a:ext cx="146304" cy="146304"/>
           </a:xfrm>
           <a:prstGeom prst="ellipse">
@@ -45812,13 +46631,13 @@
       </p:sp>
       <p:sp>
         <p:nvSpPr>
-          <p:cNvPr id="30" name="Text 28"/>
-          <p:cNvSpPr txBox="1"/>
-          <p:nvPr/>
-        </p:nvSpPr>
-        <p:spPr>
-          <a:xfrm>
-            <a:off x="2057400" y="6620256"/>
+          <p:cNvPr id="31" name="Text 29"/>
+          <p:cNvSpPr txBox="1"/>
+          <p:nvPr/>
+        </p:nvSpPr>
+        <p:spPr>
+          <a:xfrm>
+            <a:off x="2057400" y="6629400"/>
             <a:ext cx="964692" cy="173736"/>
           </a:xfrm>
           <a:prstGeom prst="rect">
@@ -45851,13 +46670,13 @@
       </p:sp>
       <p:sp>
         <p:nvSpPr>
-          <p:cNvPr id="31" name="Shape 29"/>
+          <p:cNvPr id="32" name="Shape 30"/>
           <p:cNvSpPr/>
           <p:nvPr/>
         </p:nvSpPr>
         <p:spPr>
           <a:xfrm>
-            <a:off x="3431286" y="6464808"/>
+            <a:off x="3431286" y="6473952"/>
             <a:ext cx="146304" cy="146304"/>
           </a:xfrm>
           <a:prstGeom prst="ellipse">
@@ -45876,13 +46695,13 @@
       </p:sp>
       <p:sp>
         <p:nvSpPr>
-          <p:cNvPr id="32" name="Text 30"/>
-          <p:cNvSpPr txBox="1"/>
-          <p:nvPr/>
-        </p:nvSpPr>
-        <p:spPr>
-          <a:xfrm>
-            <a:off x="3022092" y="6620256"/>
+          <p:cNvPr id="33" name="Text 31"/>
+          <p:cNvSpPr txBox="1"/>
+          <p:nvPr/>
+        </p:nvSpPr>
+        <p:spPr>
+          <a:xfrm>
+            <a:off x="3022092" y="6629400"/>
             <a:ext cx="964692" cy="173736"/>
           </a:xfrm>
           <a:prstGeom prst="rect">
@@ -45915,13 +46734,13 @@
       </p:sp>
       <p:sp>
         <p:nvSpPr>
-          <p:cNvPr id="33" name="Shape 31"/>
+          <p:cNvPr id="34" name="Shape 32"/>
           <p:cNvSpPr/>
           <p:nvPr/>
         </p:nvSpPr>
         <p:spPr>
           <a:xfrm>
-            <a:off x="4395978" y="6464808"/>
+            <a:off x="4395978" y="6473952"/>
             <a:ext cx="146304" cy="146304"/>
           </a:xfrm>
           <a:prstGeom prst="ellipse">
@@ -45940,13 +46759,13 @@
       </p:sp>
       <p:sp>
         <p:nvSpPr>
-          <p:cNvPr id="34" name="Text 32"/>
-          <p:cNvSpPr txBox="1"/>
-          <p:nvPr/>
-        </p:nvSpPr>
-        <p:spPr>
-          <a:xfrm>
-            <a:off x="3986784" y="6620256"/>
+          <p:cNvPr id="35" name="Text 33"/>
+          <p:cNvSpPr txBox="1"/>
+          <p:nvPr/>
+        </p:nvSpPr>
+        <p:spPr>
+          <a:xfrm>
+            <a:off x="3986784" y="6629400"/>
             <a:ext cx="964692" cy="173736"/>
           </a:xfrm>
           <a:prstGeom prst="rect">
@@ -45979,13 +46798,13 @@
       </p:sp>
       <p:sp>
         <p:nvSpPr>
-          <p:cNvPr id="35" name="Shape 33"/>
+          <p:cNvPr id="36" name="Shape 34"/>
           <p:cNvSpPr/>
           <p:nvPr/>
         </p:nvSpPr>
         <p:spPr>
           <a:xfrm>
-            <a:off x="5360670" y="6464808"/>
+            <a:off x="5360670" y="6473952"/>
             <a:ext cx="146304" cy="146304"/>
           </a:xfrm>
           <a:prstGeom prst="ellipse">
@@ -46004,13 +46823,13 @@
       </p:sp>
       <p:sp>
         <p:nvSpPr>
-          <p:cNvPr id="36" name="Text 34"/>
-          <p:cNvSpPr txBox="1"/>
-          <p:nvPr/>
-        </p:nvSpPr>
-        <p:spPr>
-          <a:xfrm>
-            <a:off x="4951476" y="6620256"/>
+          <p:cNvPr id="37" name="Text 35"/>
+          <p:cNvSpPr txBox="1"/>
+          <p:nvPr/>
+        </p:nvSpPr>
+        <p:spPr>
+          <a:xfrm>
+            <a:off x="4951476" y="6629400"/>
             <a:ext cx="964692" cy="173736"/>
           </a:xfrm>
           <a:prstGeom prst="rect">
@@ -46043,13 +46862,13 @@
       </p:sp>
       <p:sp>
         <p:nvSpPr>
-          <p:cNvPr id="37" name="Shape 35"/>
+          <p:cNvPr id="38" name="Shape 36"/>
           <p:cNvSpPr/>
           <p:nvPr/>
         </p:nvSpPr>
         <p:spPr>
           <a:xfrm>
-            <a:off x="6325362" y="6464808"/>
+            <a:off x="6325362" y="6473952"/>
             <a:ext cx="146304" cy="146304"/>
           </a:xfrm>
           <a:prstGeom prst="ellipse">
@@ -46068,13 +46887,13 @@
       </p:sp>
       <p:sp>
         <p:nvSpPr>
-          <p:cNvPr id="38" name="Text 36"/>
-          <p:cNvSpPr txBox="1"/>
-          <p:nvPr/>
-        </p:nvSpPr>
-        <p:spPr>
-          <a:xfrm>
-            <a:off x="5916168" y="6620256"/>
+          <p:cNvPr id="39" name="Text 37"/>
+          <p:cNvSpPr txBox="1"/>
+          <p:nvPr/>
+        </p:nvSpPr>
+        <p:spPr>
+          <a:xfrm>
+            <a:off x="5916168" y="6629400"/>
             <a:ext cx="964692" cy="173736"/>
           </a:xfrm>
           <a:prstGeom prst="rect">
@@ -46107,13 +46926,13 @@
       </p:sp>
       <p:sp>
         <p:nvSpPr>
-          <p:cNvPr id="39" name="Shape 37"/>
+          <p:cNvPr id="40" name="Shape 38"/>
           <p:cNvSpPr/>
           <p:nvPr/>
         </p:nvSpPr>
         <p:spPr>
           <a:xfrm>
-            <a:off x="7290054" y="6464808"/>
+            <a:off x="7290054" y="6473952"/>
             <a:ext cx="146304" cy="146304"/>
           </a:xfrm>
           <a:prstGeom prst="ellipse">
@@ -46132,13 +46951,13 @@
       </p:sp>
       <p:sp>
         <p:nvSpPr>
-          <p:cNvPr id="40" name="Text 38"/>
-          <p:cNvSpPr txBox="1"/>
-          <p:nvPr/>
-        </p:nvSpPr>
-        <p:spPr>
-          <a:xfrm>
-            <a:off x="6880860" y="6620256"/>
+          <p:cNvPr id="41" name="Text 39"/>
+          <p:cNvSpPr txBox="1"/>
+          <p:nvPr/>
+        </p:nvSpPr>
+        <p:spPr>
+          <a:xfrm>
+            <a:off x="6880860" y="6629400"/>
             <a:ext cx="964692" cy="173736"/>
           </a:xfrm>
           <a:prstGeom prst="rect">
@@ -46171,13 +46990,13 @@
       </p:sp>
       <p:sp>
         <p:nvSpPr>
-          <p:cNvPr id="41" name="Shape 39"/>
+          <p:cNvPr id="42" name="Shape 40"/>
           <p:cNvSpPr/>
           <p:nvPr/>
         </p:nvSpPr>
         <p:spPr>
           <a:xfrm>
-            <a:off x="8254746" y="6464808"/>
+            <a:off x="8254746" y="6473952"/>
             <a:ext cx="146304" cy="146304"/>
           </a:xfrm>
           <a:prstGeom prst="ellipse">
@@ -46196,13 +47015,13 @@
       </p:sp>
       <p:sp>
         <p:nvSpPr>
-          <p:cNvPr id="42" name="Text 40"/>
-          <p:cNvSpPr txBox="1"/>
-          <p:nvPr/>
-        </p:nvSpPr>
-        <p:spPr>
-          <a:xfrm>
-            <a:off x="7845552" y="6620256"/>
+          <p:cNvPr id="43" name="Text 41"/>
+          <p:cNvSpPr txBox="1"/>
+          <p:nvPr/>
+        </p:nvSpPr>
+        <p:spPr>
+          <a:xfrm>
+            <a:off x="7845552" y="6629400"/>
             <a:ext cx="964692" cy="173736"/>
           </a:xfrm>
           <a:prstGeom prst="rect">
@@ -46235,13 +47054,13 @@
       </p:sp>
       <p:sp>
         <p:nvSpPr>
-          <p:cNvPr id="43" name="Shape 41"/>
+          <p:cNvPr id="44" name="Shape 42"/>
           <p:cNvSpPr/>
           <p:nvPr/>
         </p:nvSpPr>
         <p:spPr>
           <a:xfrm>
-            <a:off x="9219438" y="6464808"/>
+            <a:off x="9219438" y="6473952"/>
             <a:ext cx="146304" cy="146304"/>
           </a:xfrm>
           <a:prstGeom prst="ellipse">
@@ -46260,13 +47079,13 @@
       </p:sp>
       <p:sp>
         <p:nvSpPr>
-          <p:cNvPr id="44" name="Text 42"/>
-          <p:cNvSpPr txBox="1"/>
-          <p:nvPr/>
-        </p:nvSpPr>
-        <p:spPr>
-          <a:xfrm>
-            <a:off x="8810244" y="6620256"/>
+          <p:cNvPr id="45" name="Text 43"/>
+          <p:cNvSpPr txBox="1"/>
+          <p:nvPr/>
+        </p:nvSpPr>
+        <p:spPr>
+          <a:xfrm>
+            <a:off x="8810244" y="6629400"/>
             <a:ext cx="964692" cy="173736"/>
           </a:xfrm>
           <a:prstGeom prst="rect">
@@ -46299,13 +47118,13 @@
       </p:sp>
       <p:sp>
         <p:nvSpPr>
-          <p:cNvPr id="45" name="Shape 43"/>
+          <p:cNvPr id="46" name="Shape 44"/>
           <p:cNvSpPr/>
           <p:nvPr/>
         </p:nvSpPr>
         <p:spPr>
           <a:xfrm>
-            <a:off x="10184130" y="6464808"/>
+            <a:off x="10184130" y="6473952"/>
             <a:ext cx="146304" cy="146304"/>
           </a:xfrm>
           <a:prstGeom prst="ellipse">
@@ -46324,13 +47143,13 @@
       </p:sp>
       <p:sp>
         <p:nvSpPr>
-          <p:cNvPr id="46" name="Text 44"/>
-          <p:cNvSpPr txBox="1"/>
-          <p:nvPr/>
-        </p:nvSpPr>
-        <p:spPr>
-          <a:xfrm>
-            <a:off x="9774936" y="6620256"/>
+          <p:cNvPr id="47" name="Text 45"/>
+          <p:cNvSpPr txBox="1"/>
+          <p:nvPr/>
+        </p:nvSpPr>
+        <p:spPr>
+          <a:xfrm>
+            <a:off x="9774936" y="6629400"/>
             <a:ext cx="964692" cy="173736"/>
           </a:xfrm>
           <a:prstGeom prst="rect">
@@ -46363,13 +47182,13 @@
       </p:sp>
       <p:sp>
         <p:nvSpPr>
-          <p:cNvPr id="47" name="Shape 45"/>
+          <p:cNvPr id="48" name="Shape 46"/>
           <p:cNvSpPr/>
           <p:nvPr/>
         </p:nvSpPr>
         <p:spPr>
           <a:xfrm>
-            <a:off x="11148822" y="6464808"/>
+            <a:off x="11148822" y="6473952"/>
             <a:ext cx="146304" cy="146304"/>
           </a:xfrm>
           <a:prstGeom prst="ellipse">
@@ -46388,13 +47207,13 @@
       </p:sp>
       <p:sp>
         <p:nvSpPr>
-          <p:cNvPr id="48" name="Text 46"/>
-          <p:cNvSpPr txBox="1"/>
-          <p:nvPr/>
-        </p:nvSpPr>
-        <p:spPr>
-          <a:xfrm>
-            <a:off x="10739628" y="6620256"/>
+          <p:cNvPr id="49" name="Text 47"/>
+          <p:cNvSpPr txBox="1"/>
+          <p:nvPr/>
+        </p:nvSpPr>
+        <p:spPr>
+          <a:xfrm>
+            <a:off x="10739628" y="6629400"/>
             <a:ext cx="964692" cy="173736"/>
           </a:xfrm>
           <a:prstGeom prst="rect">
@@ -47144,7 +47963,70 @@
       </p:sp>
       <p:sp>
         <p:nvSpPr>
-          <p:cNvPr id="22" name="Shape 20"/>
+          <p:cNvPr id="22" name="Text 20"/>
+          <p:cNvSpPr txBox="1"/>
+          <p:nvPr/>
+        </p:nvSpPr>
+        <p:spPr>
+          <a:xfrm>
+            <a:off x="502920" y="3703320"/>
+            <a:ext cx="11201400" cy="685800"/>
+          </a:xfrm>
+          <a:prstGeom prst="rect">
+            <a:avLst/>
+          </a:prstGeom>
+          <a:noFill/>
+          <a:ln/>
+        </p:spPr>
+        <p:txBody>
+          <a:bodyPr wrap="square" lIns="0" tIns="0" rIns="0" bIns="0" rtlCol="0" anchor="ctr"/>
+          <a:lstStyle/>
+          <a:p>
+            <a:pPr indent="0" marL="0">
+              <a:lnSpc>
+                <a:spcPct val="120000"/>
+              </a:lnSpc>
+              <a:buNone/>
+            </a:pPr>
+            <a:r>
+              <a:rPr lang="en-US" sz="850" b="1" dirty="0">
+                <a:solidFill>
+                  <a:srgbClr val="8A8A8A"/>
+                </a:solidFill>
+                <a:latin typeface="Consolas" pitchFamily="34" charset="0"/>
+                <a:ea typeface="Consolas" pitchFamily="34" charset="-122"/>
+                <a:cs typeface="Consolas" pitchFamily="34" charset="-120"/>
+              </a:rPr>
+              <a:t>具体例
+</a:t>
+            </a:r>
+            <a:endParaRPr lang="en-US" sz="850" dirty="0"/>
+          </a:p>
+          <a:p>
+            <a:pPr indent="0" marL="0">
+              <a:lnSpc>
+                <a:spcPct val="120000"/>
+              </a:lnSpc>
+              <a:buNone/>
+            </a:pPr>
+            <a:r>
+              <a:rPr lang="en-US" sz="1050" dirty="0">
+                <a:solidFill>
+                  <a:srgbClr val="171717"/>
+                </a:solidFill>
+                <a:latin typeface="Yu Gothic" pitchFamily="34" charset="0"/>
+                <a:ea typeface="Yu Gothic" pitchFamily="34" charset="-122"/>
+                <a:cs typeface="Yu Gothic" pitchFamily="34" charset="-120"/>
+              </a:rPr>
+              <a:t>受注管理システムを開発するシステム会社が、「受注」クラスに共通処理（在庫確認・金額計算）をまとめ、これを継承した「特急受注」クラスに納期短縮処理だけを追加し、開発工数を抑えつつ機能を拡張した。</a:t>
+            </a:r>
+            <a:endParaRPr lang="en-US" sz="850" dirty="0"/>
+          </a:p>
+        </p:txBody>
+      </p:sp>
+      <p:sp>
+        <p:nvSpPr>
+          <p:cNvPr id="23" name="Shape 21"/>
           <p:cNvSpPr/>
           <p:nvPr/>
         </p:nvSpPr>
@@ -47167,7 +48049,7 @@
       </p:sp>
       <p:sp>
         <p:nvSpPr>
-          <p:cNvPr id="23" name="Shape 21"/>
+          <p:cNvPr id="24" name="Shape 22"/>
           <p:cNvSpPr/>
           <p:nvPr/>
         </p:nvSpPr>
@@ -47187,7 +48069,7 @@
       </p:sp>
       <p:sp>
         <p:nvSpPr>
-          <p:cNvPr id="24" name="Text 22"/>
+          <p:cNvPr id="25" name="Text 23"/>
           <p:cNvSpPr txBox="1"/>
           <p:nvPr/>
         </p:nvSpPr>
@@ -47226,7 +48108,7 @@
       </p:sp>
       <p:sp>
         <p:nvSpPr>
-          <p:cNvPr id="25" name="Text 23"/>
+          <p:cNvPr id="26" name="Text 24"/>
           <p:cNvSpPr txBox="1"/>
           <p:nvPr/>
         </p:nvSpPr>
@@ -47265,7 +48147,7 @@
       </p:sp>
       <p:sp>
         <p:nvSpPr>
-          <p:cNvPr id="26" name="Shape 24"/>
+          <p:cNvPr id="27" name="Shape 25"/>
           <p:cNvSpPr/>
           <p:nvPr/>
         </p:nvSpPr>
@@ -47288,7 +48170,7 @@
       </p:sp>
       <p:sp>
         <p:nvSpPr>
-          <p:cNvPr id="27" name="Text 25"/>
+          <p:cNvPr id="28" name="Text 26"/>
           <p:cNvSpPr txBox="1"/>
           <p:nvPr/>
         </p:nvSpPr>
@@ -47327,7 +48209,7 @@
       </p:sp>
       <p:sp>
         <p:nvSpPr>
-          <p:cNvPr id="28" name="Text 26"/>
+          <p:cNvPr id="29" name="Text 27"/>
           <p:cNvSpPr txBox="1"/>
           <p:nvPr/>
         </p:nvSpPr>
@@ -47366,7 +48248,7 @@
       </p:sp>
       <p:sp>
         <p:nvSpPr>
-          <p:cNvPr id="29" name="Shape 27"/>
+          <p:cNvPr id="30" name="Shape 28"/>
           <p:cNvSpPr/>
           <p:nvPr/>
         </p:nvSpPr>
@@ -47391,7 +48273,7 @@
       </p:sp>
       <p:sp>
         <p:nvSpPr>
-          <p:cNvPr id="30" name="Text 28"/>
+          <p:cNvPr id="31" name="Text 29"/>
           <p:cNvSpPr txBox="1"/>
           <p:nvPr/>
         </p:nvSpPr>
@@ -47430,7 +48312,7 @@
       </p:sp>
       <p:sp>
         <p:nvSpPr>
-          <p:cNvPr id="31" name="Shape 29"/>
+          <p:cNvPr id="32" name="Shape 30"/>
           <p:cNvSpPr/>
           <p:nvPr/>
         </p:nvSpPr>
@@ -47455,7 +48337,7 @@
       </p:sp>
       <p:sp>
         <p:nvSpPr>
-          <p:cNvPr id="32" name="Text 30"/>
+          <p:cNvPr id="33" name="Text 31"/>
           <p:cNvSpPr txBox="1"/>
           <p:nvPr/>
         </p:nvSpPr>
@@ -47494,7 +48376,7 @@
       </p:sp>
       <p:sp>
         <p:nvSpPr>
-          <p:cNvPr id="33" name="Shape 31"/>
+          <p:cNvPr id="34" name="Shape 32"/>
           <p:cNvSpPr/>
           <p:nvPr/>
         </p:nvSpPr>
@@ -47519,7 +48401,7 @@
       </p:sp>
       <p:sp>
         <p:nvSpPr>
-          <p:cNvPr id="34" name="Text 32"/>
+          <p:cNvPr id="35" name="Text 33"/>
           <p:cNvSpPr txBox="1"/>
           <p:nvPr/>
         </p:nvSpPr>
@@ -47558,7 +48440,7 @@
       </p:sp>
       <p:sp>
         <p:nvSpPr>
-          <p:cNvPr id="35" name="Shape 33"/>
+          <p:cNvPr id="36" name="Shape 34"/>
           <p:cNvSpPr/>
           <p:nvPr/>
         </p:nvSpPr>
@@ -47583,7 +48465,7 @@
       </p:sp>
       <p:sp>
         <p:nvSpPr>
-          <p:cNvPr id="36" name="Text 34"/>
+          <p:cNvPr id="37" name="Text 35"/>
           <p:cNvSpPr txBox="1"/>
           <p:nvPr/>
         </p:nvSpPr>
@@ -47622,7 +48504,7 @@
       </p:sp>
       <p:sp>
         <p:nvSpPr>
-          <p:cNvPr id="37" name="Shape 35"/>
+          <p:cNvPr id="38" name="Shape 36"/>
           <p:cNvSpPr/>
           <p:nvPr/>
         </p:nvSpPr>
@@ -47647,7 +48529,7 @@
       </p:sp>
       <p:sp>
         <p:nvSpPr>
-          <p:cNvPr id="38" name="Text 36"/>
+          <p:cNvPr id="39" name="Text 37"/>
           <p:cNvSpPr txBox="1"/>
           <p:nvPr/>
         </p:nvSpPr>
@@ -47686,7 +48568,7 @@
       </p:sp>
       <p:sp>
         <p:nvSpPr>
-          <p:cNvPr id="39" name="Shape 37"/>
+          <p:cNvPr id="40" name="Shape 38"/>
           <p:cNvSpPr/>
           <p:nvPr/>
         </p:nvSpPr>
@@ -47711,7 +48593,7 @@
       </p:sp>
       <p:sp>
         <p:nvSpPr>
-          <p:cNvPr id="40" name="Text 38"/>
+          <p:cNvPr id="41" name="Text 39"/>
           <p:cNvSpPr txBox="1"/>
           <p:nvPr/>
         </p:nvSpPr>
@@ -47750,7 +48632,7 @@
       </p:sp>
       <p:sp>
         <p:nvSpPr>
-          <p:cNvPr id="41" name="Shape 39"/>
+          <p:cNvPr id="42" name="Shape 40"/>
           <p:cNvSpPr/>
           <p:nvPr/>
         </p:nvSpPr>
@@ -47775,7 +48657,7 @@
       </p:sp>
       <p:sp>
         <p:nvSpPr>
-          <p:cNvPr id="42" name="Text 40"/>
+          <p:cNvPr id="43" name="Text 41"/>
           <p:cNvSpPr txBox="1"/>
           <p:nvPr/>
         </p:nvSpPr>
@@ -47814,7 +48696,7 @@
       </p:sp>
       <p:sp>
         <p:nvSpPr>
-          <p:cNvPr id="43" name="Shape 41"/>
+          <p:cNvPr id="44" name="Shape 42"/>
           <p:cNvSpPr/>
           <p:nvPr/>
         </p:nvSpPr>
@@ -47839,7 +48721,7 @@
       </p:sp>
       <p:sp>
         <p:nvSpPr>
-          <p:cNvPr id="44" name="Text 42"/>
+          <p:cNvPr id="45" name="Text 43"/>
           <p:cNvSpPr txBox="1"/>
           <p:nvPr/>
         </p:nvSpPr>
@@ -47878,7 +48760,7 @@
       </p:sp>
       <p:sp>
         <p:nvSpPr>
-          <p:cNvPr id="45" name="Shape 43"/>
+          <p:cNvPr id="46" name="Shape 44"/>
           <p:cNvSpPr/>
           <p:nvPr/>
         </p:nvSpPr>
@@ -47903,7 +48785,7 @@
       </p:sp>
       <p:sp>
         <p:nvSpPr>
-          <p:cNvPr id="46" name="Text 44"/>
+          <p:cNvPr id="47" name="Text 45"/>
           <p:cNvSpPr txBox="1"/>
           <p:nvPr/>
         </p:nvSpPr>
@@ -47942,7 +48824,7 @@
       </p:sp>
       <p:sp>
         <p:nvSpPr>
-          <p:cNvPr id="47" name="Shape 45"/>
+          <p:cNvPr id="48" name="Shape 46"/>
           <p:cNvSpPr/>
           <p:nvPr/>
         </p:nvSpPr>
@@ -47967,7 +48849,7 @@
       </p:sp>
       <p:sp>
         <p:nvSpPr>
-          <p:cNvPr id="48" name="Text 46"/>
+          <p:cNvPr id="49" name="Text 47"/>
           <p:cNvSpPr txBox="1"/>
           <p:nvPr/>
         </p:nvSpPr>
@@ -48723,7 +49605,70 @@
       </p:sp>
       <p:sp>
         <p:nvSpPr>
-          <p:cNvPr id="22" name="Shape 20"/>
+          <p:cNvPr id="22" name="Text 20"/>
+          <p:cNvSpPr txBox="1"/>
+          <p:nvPr/>
+        </p:nvSpPr>
+        <p:spPr>
+          <a:xfrm>
+            <a:off x="502920" y="3703320"/>
+            <a:ext cx="11201400" cy="502920"/>
+          </a:xfrm>
+          <a:prstGeom prst="rect">
+            <a:avLst/>
+          </a:prstGeom>
+          <a:noFill/>
+          <a:ln/>
+        </p:spPr>
+        <p:txBody>
+          <a:bodyPr wrap="square" lIns="0" tIns="0" rIns="0" bIns="0" rtlCol="0" anchor="ctr"/>
+          <a:lstStyle/>
+          <a:p>
+            <a:pPr indent="0" marL="0">
+              <a:lnSpc>
+                <a:spcPct val="120000"/>
+              </a:lnSpc>
+              <a:buNone/>
+            </a:pPr>
+            <a:r>
+              <a:rPr lang="en-US" sz="850" b="1" dirty="0">
+                <a:solidFill>
+                  <a:srgbClr val="8A8A8A"/>
+                </a:solidFill>
+                <a:latin typeface="Consolas" pitchFamily="34" charset="0"/>
+                <a:ea typeface="Consolas" pitchFamily="34" charset="-122"/>
+                <a:cs typeface="Consolas" pitchFamily="34" charset="-120"/>
+              </a:rPr>
+              <a:t>具体例
+</a:t>
+            </a:r>
+            <a:endParaRPr lang="en-US" sz="850" dirty="0"/>
+          </a:p>
+          <a:p>
+            <a:pPr indent="0" marL="0">
+              <a:lnSpc>
+                <a:spcPct val="120000"/>
+              </a:lnSpc>
+              <a:buNone/>
+            </a:pPr>
+            <a:r>
+              <a:rPr lang="en-US" sz="1050" dirty="0">
+                <a:solidFill>
+                  <a:srgbClr val="171717"/>
+                </a:solidFill>
+                <a:latin typeface="Yu Gothic" pitchFamily="34" charset="0"/>
+                <a:ea typeface="Yu Gothic" pitchFamily="34" charset="-122"/>
+                <a:cs typeface="Yu Gothic" pitchFamily="34" charset="-120"/>
+              </a:rPr>
+              <a:t>製造業A社は自社データセンターの1台の物理サーバを仮想化し、生産管理用と人事管理用の仮想サーバを同時に稼働させることで、ハードウェアの導入台数を抑えている。</a:t>
+            </a:r>
+            <a:endParaRPr lang="en-US" sz="850" dirty="0"/>
+          </a:p>
+        </p:txBody>
+      </p:sp>
+      <p:sp>
+        <p:nvSpPr>
+          <p:cNvPr id="23" name="Shape 21"/>
           <p:cNvSpPr/>
           <p:nvPr/>
         </p:nvSpPr>
@@ -48746,7 +49691,7 @@
       </p:sp>
       <p:sp>
         <p:nvSpPr>
-          <p:cNvPr id="23" name="Shape 21"/>
+          <p:cNvPr id="24" name="Shape 22"/>
           <p:cNvSpPr/>
           <p:nvPr/>
         </p:nvSpPr>
@@ -48766,7 +49711,7 @@
       </p:sp>
       <p:sp>
         <p:nvSpPr>
-          <p:cNvPr id="24" name="Text 22"/>
+          <p:cNvPr id="25" name="Text 23"/>
           <p:cNvSpPr txBox="1"/>
           <p:nvPr/>
         </p:nvSpPr>
@@ -48805,7 +49750,7 @@
       </p:sp>
       <p:sp>
         <p:nvSpPr>
-          <p:cNvPr id="25" name="Text 23"/>
+          <p:cNvPr id="26" name="Text 24"/>
           <p:cNvSpPr txBox="1"/>
           <p:nvPr/>
         </p:nvSpPr>
@@ -48844,7 +49789,7 @@
       </p:sp>
       <p:sp>
         <p:nvSpPr>
-          <p:cNvPr id="26" name="Shape 24"/>
+          <p:cNvPr id="27" name="Shape 25"/>
           <p:cNvSpPr/>
           <p:nvPr/>
         </p:nvSpPr>
@@ -48867,7 +49812,7 @@
       </p:sp>
       <p:sp>
         <p:nvSpPr>
-          <p:cNvPr id="27" name="Text 25"/>
+          <p:cNvPr id="28" name="Text 26"/>
           <p:cNvSpPr txBox="1"/>
           <p:nvPr/>
         </p:nvSpPr>
@@ -48906,7 +49851,7 @@
       </p:sp>
       <p:sp>
         <p:nvSpPr>
-          <p:cNvPr id="28" name="Text 26"/>
+          <p:cNvPr id="29" name="Text 27"/>
           <p:cNvSpPr txBox="1"/>
           <p:nvPr/>
         </p:nvSpPr>
@@ -48945,7 +49890,7 @@
       </p:sp>
       <p:sp>
         <p:nvSpPr>
-          <p:cNvPr id="29" name="Shape 27"/>
+          <p:cNvPr id="30" name="Shape 28"/>
           <p:cNvSpPr/>
           <p:nvPr/>
         </p:nvSpPr>
@@ -48970,7 +49915,7 @@
       </p:sp>
       <p:sp>
         <p:nvSpPr>
-          <p:cNvPr id="30" name="Text 28"/>
+          <p:cNvPr id="31" name="Text 29"/>
           <p:cNvSpPr txBox="1"/>
           <p:nvPr/>
         </p:nvSpPr>
@@ -49009,7 +49954,7 @@
       </p:sp>
       <p:sp>
         <p:nvSpPr>
-          <p:cNvPr id="31" name="Shape 29"/>
+          <p:cNvPr id="32" name="Shape 30"/>
           <p:cNvSpPr/>
           <p:nvPr/>
         </p:nvSpPr>
@@ -49034,7 +49979,7 @@
       </p:sp>
       <p:sp>
         <p:nvSpPr>
-          <p:cNvPr id="32" name="Text 30"/>
+          <p:cNvPr id="33" name="Text 31"/>
           <p:cNvSpPr txBox="1"/>
           <p:nvPr/>
         </p:nvSpPr>
@@ -49073,7 +50018,7 @@
       </p:sp>
       <p:sp>
         <p:nvSpPr>
-          <p:cNvPr id="33" name="Shape 31"/>
+          <p:cNvPr id="34" name="Shape 32"/>
           <p:cNvSpPr/>
           <p:nvPr/>
         </p:nvSpPr>
@@ -49098,7 +50043,7 @@
       </p:sp>
       <p:sp>
         <p:nvSpPr>
-          <p:cNvPr id="34" name="Text 32"/>
+          <p:cNvPr id="35" name="Text 33"/>
           <p:cNvSpPr txBox="1"/>
           <p:nvPr/>
         </p:nvSpPr>
@@ -49137,7 +50082,7 @@
       </p:sp>
       <p:sp>
         <p:nvSpPr>
-          <p:cNvPr id="35" name="Shape 33"/>
+          <p:cNvPr id="36" name="Shape 34"/>
           <p:cNvSpPr/>
           <p:nvPr/>
         </p:nvSpPr>
@@ -49162,7 +50107,7 @@
       </p:sp>
       <p:sp>
         <p:nvSpPr>
-          <p:cNvPr id="36" name="Text 34"/>
+          <p:cNvPr id="37" name="Text 35"/>
           <p:cNvSpPr txBox="1"/>
           <p:nvPr/>
         </p:nvSpPr>
@@ -49201,7 +50146,7 @@
       </p:sp>
       <p:sp>
         <p:nvSpPr>
-          <p:cNvPr id="37" name="Shape 35"/>
+          <p:cNvPr id="38" name="Shape 36"/>
           <p:cNvSpPr/>
           <p:nvPr/>
         </p:nvSpPr>
@@ -49226,7 +50171,7 @@
       </p:sp>
       <p:sp>
         <p:nvSpPr>
-          <p:cNvPr id="38" name="Text 36"/>
+          <p:cNvPr id="39" name="Text 37"/>
           <p:cNvSpPr txBox="1"/>
           <p:nvPr/>
         </p:nvSpPr>
@@ -49265,7 +50210,7 @@
       </p:sp>
       <p:sp>
         <p:nvSpPr>
-          <p:cNvPr id="39" name="Shape 37"/>
+          <p:cNvPr id="40" name="Shape 38"/>
           <p:cNvSpPr/>
           <p:nvPr/>
         </p:nvSpPr>
@@ -49290,7 +50235,7 @@
       </p:sp>
       <p:sp>
         <p:nvSpPr>
-          <p:cNvPr id="40" name="Text 38"/>
+          <p:cNvPr id="41" name="Text 39"/>
           <p:cNvSpPr txBox="1"/>
           <p:nvPr/>
         </p:nvSpPr>
@@ -49329,7 +50274,7 @@
       </p:sp>
       <p:sp>
         <p:nvSpPr>
-          <p:cNvPr id="41" name="Shape 39"/>
+          <p:cNvPr id="42" name="Shape 40"/>
           <p:cNvSpPr/>
           <p:nvPr/>
         </p:nvSpPr>
@@ -49354,7 +50299,7 @@
       </p:sp>
       <p:sp>
         <p:nvSpPr>
-          <p:cNvPr id="42" name="Text 40"/>
+          <p:cNvPr id="43" name="Text 41"/>
           <p:cNvSpPr txBox="1"/>
           <p:nvPr/>
         </p:nvSpPr>
@@ -49393,7 +50338,7 @@
       </p:sp>
       <p:sp>
         <p:nvSpPr>
-          <p:cNvPr id="43" name="Shape 41"/>
+          <p:cNvPr id="44" name="Shape 42"/>
           <p:cNvSpPr/>
           <p:nvPr/>
         </p:nvSpPr>
@@ -49418,7 +50363,7 @@
       </p:sp>
       <p:sp>
         <p:nvSpPr>
-          <p:cNvPr id="44" name="Text 42"/>
+          <p:cNvPr id="45" name="Text 43"/>
           <p:cNvSpPr txBox="1"/>
           <p:nvPr/>
         </p:nvSpPr>
@@ -49457,7 +50402,7 @@
       </p:sp>
       <p:sp>
         <p:nvSpPr>
-          <p:cNvPr id="45" name="Shape 43"/>
+          <p:cNvPr id="46" name="Shape 44"/>
           <p:cNvSpPr/>
           <p:nvPr/>
         </p:nvSpPr>
@@ -49482,7 +50427,7 @@
       </p:sp>
       <p:sp>
         <p:nvSpPr>
-          <p:cNvPr id="46" name="Text 44"/>
+          <p:cNvPr id="47" name="Text 45"/>
           <p:cNvSpPr txBox="1"/>
           <p:nvPr/>
         </p:nvSpPr>
@@ -49521,7 +50466,7 @@
       </p:sp>
       <p:sp>
         <p:nvSpPr>
-          <p:cNvPr id="47" name="Shape 45"/>
+          <p:cNvPr id="48" name="Shape 46"/>
           <p:cNvSpPr/>
           <p:nvPr/>
         </p:nvSpPr>
@@ -49546,7 +50491,7 @@
       </p:sp>
       <p:sp>
         <p:nvSpPr>
-          <p:cNvPr id="48" name="Text 46"/>
+          <p:cNvPr id="49" name="Text 47"/>
           <p:cNvSpPr txBox="1"/>
           <p:nvPr/>
         </p:nvSpPr>
@@ -50302,7 +51247,70 @@
       </p:sp>
       <p:sp>
         <p:nvSpPr>
-          <p:cNvPr id="22" name="Shape 20"/>
+          <p:cNvPr id="22" name="Text 20"/>
+          <p:cNvSpPr txBox="1"/>
+          <p:nvPr/>
+        </p:nvSpPr>
+        <p:spPr>
+          <a:xfrm>
+            <a:off x="502920" y="3703320"/>
+            <a:ext cx="11201400" cy="685800"/>
+          </a:xfrm>
+          <a:prstGeom prst="rect">
+            <a:avLst/>
+          </a:prstGeom>
+          <a:noFill/>
+          <a:ln/>
+        </p:spPr>
+        <p:txBody>
+          <a:bodyPr wrap="square" lIns="0" tIns="0" rIns="0" bIns="0" rtlCol="0" anchor="ctr"/>
+          <a:lstStyle/>
+          <a:p>
+            <a:pPr indent="0" marL="0">
+              <a:lnSpc>
+                <a:spcPct val="120000"/>
+              </a:lnSpc>
+              <a:buNone/>
+            </a:pPr>
+            <a:r>
+              <a:rPr lang="en-US" sz="850" b="1" dirty="0">
+                <a:solidFill>
+                  <a:srgbClr val="8A8A8A"/>
+                </a:solidFill>
+                <a:latin typeface="Consolas" pitchFamily="34" charset="0"/>
+                <a:ea typeface="Consolas" pitchFamily="34" charset="-122"/>
+                <a:cs typeface="Consolas" pitchFamily="34" charset="-120"/>
+              </a:rPr>
+              <a:t>具体例
+</a:t>
+            </a:r>
+            <a:endParaRPr lang="en-US" sz="850" dirty="0"/>
+          </a:p>
+          <a:p>
+            <a:pPr indent="0" marL="0">
+              <a:lnSpc>
+                <a:spcPct val="120000"/>
+              </a:lnSpc>
+              <a:buNone/>
+            </a:pPr>
+            <a:r>
+              <a:rPr lang="en-US" sz="1050" dirty="0">
+                <a:solidFill>
+                  <a:srgbClr val="171717"/>
+                </a:solidFill>
+                <a:latin typeface="Yu Gothic" pitchFamily="34" charset="0"/>
+                <a:ea typeface="Yu Gothic" pitchFamily="34" charset="-122"/>
+                <a:cs typeface="Yu Gothic" pitchFamily="34" charset="-120"/>
+              </a:rPr>
+              <a:t>小売チェーンのB社のPOSレジは会計のたびに即座に在庫を更新するリアルタイム処理だが、月末の売上集計や仕入先への支払データ作成は夜間にまとめて処理するバッチ処理としている。</a:t>
+            </a:r>
+            <a:endParaRPr lang="en-US" sz="850" dirty="0"/>
+          </a:p>
+        </p:txBody>
+      </p:sp>
+      <p:sp>
+        <p:nvSpPr>
+          <p:cNvPr id="23" name="Shape 21"/>
           <p:cNvSpPr/>
           <p:nvPr/>
         </p:nvSpPr>
@@ -50325,7 +51333,7 @@
       </p:sp>
       <p:sp>
         <p:nvSpPr>
-          <p:cNvPr id="23" name="Shape 21"/>
+          <p:cNvPr id="24" name="Shape 22"/>
           <p:cNvSpPr/>
           <p:nvPr/>
         </p:nvSpPr>
@@ -50345,7 +51353,7 @@
       </p:sp>
       <p:sp>
         <p:nvSpPr>
-          <p:cNvPr id="24" name="Text 22"/>
+          <p:cNvPr id="25" name="Text 23"/>
           <p:cNvSpPr txBox="1"/>
           <p:nvPr/>
         </p:nvSpPr>
@@ -50384,7 +51392,7 @@
       </p:sp>
       <p:sp>
         <p:nvSpPr>
-          <p:cNvPr id="25" name="Text 23"/>
+          <p:cNvPr id="26" name="Text 24"/>
           <p:cNvSpPr txBox="1"/>
           <p:nvPr/>
         </p:nvSpPr>
@@ -50423,7 +51431,7 @@
       </p:sp>
       <p:sp>
         <p:nvSpPr>
-          <p:cNvPr id="26" name="Shape 24"/>
+          <p:cNvPr id="27" name="Shape 25"/>
           <p:cNvSpPr/>
           <p:nvPr/>
         </p:nvSpPr>
@@ -50446,7 +51454,7 @@
       </p:sp>
       <p:sp>
         <p:nvSpPr>
-          <p:cNvPr id="27" name="Text 25"/>
+          <p:cNvPr id="28" name="Text 26"/>
           <p:cNvSpPr txBox="1"/>
           <p:nvPr/>
         </p:nvSpPr>
@@ -50485,7 +51493,7 @@
       </p:sp>
       <p:sp>
         <p:nvSpPr>
-          <p:cNvPr id="28" name="Text 26"/>
+          <p:cNvPr id="29" name="Text 27"/>
           <p:cNvSpPr txBox="1"/>
           <p:nvPr/>
         </p:nvSpPr>
@@ -50524,7 +51532,7 @@
       </p:sp>
       <p:sp>
         <p:nvSpPr>
-          <p:cNvPr id="29" name="Shape 27"/>
+          <p:cNvPr id="30" name="Shape 28"/>
           <p:cNvSpPr/>
           <p:nvPr/>
         </p:nvSpPr>
@@ -50549,7 +51557,7 @@
       </p:sp>
       <p:sp>
         <p:nvSpPr>
-          <p:cNvPr id="30" name="Text 28"/>
+          <p:cNvPr id="31" name="Text 29"/>
           <p:cNvSpPr txBox="1"/>
           <p:nvPr/>
         </p:nvSpPr>
@@ -50588,7 +51596,7 @@
       </p:sp>
       <p:sp>
         <p:nvSpPr>
-          <p:cNvPr id="31" name="Shape 29"/>
+          <p:cNvPr id="32" name="Shape 30"/>
           <p:cNvSpPr/>
           <p:nvPr/>
         </p:nvSpPr>
@@ -50613,7 +51621,7 @@
       </p:sp>
       <p:sp>
         <p:nvSpPr>
-          <p:cNvPr id="32" name="Text 30"/>
+          <p:cNvPr id="33" name="Text 31"/>
           <p:cNvSpPr txBox="1"/>
           <p:nvPr/>
         </p:nvSpPr>
@@ -50652,7 +51660,7 @@
       </p:sp>
       <p:sp>
         <p:nvSpPr>
-          <p:cNvPr id="33" name="Shape 31"/>
+          <p:cNvPr id="34" name="Shape 32"/>
           <p:cNvSpPr/>
           <p:nvPr/>
         </p:nvSpPr>
@@ -50677,7 +51685,7 @@
       </p:sp>
       <p:sp>
         <p:nvSpPr>
-          <p:cNvPr id="34" name="Text 32"/>
+          <p:cNvPr id="35" name="Text 33"/>
           <p:cNvSpPr txBox="1"/>
           <p:nvPr/>
         </p:nvSpPr>
@@ -50716,7 +51724,7 @@
       </p:sp>
       <p:sp>
         <p:nvSpPr>
-          <p:cNvPr id="35" name="Shape 33"/>
+          <p:cNvPr id="36" name="Shape 34"/>
           <p:cNvSpPr/>
           <p:nvPr/>
         </p:nvSpPr>
@@ -50741,7 +51749,7 @@
       </p:sp>
       <p:sp>
         <p:nvSpPr>
-          <p:cNvPr id="36" name="Text 34"/>
+          <p:cNvPr id="37" name="Text 35"/>
           <p:cNvSpPr txBox="1"/>
           <p:nvPr/>
         </p:nvSpPr>
@@ -50780,7 +51788,7 @@
       </p:sp>
       <p:sp>
         <p:nvSpPr>
-          <p:cNvPr id="37" name="Shape 35"/>
+          <p:cNvPr id="38" name="Shape 36"/>
           <p:cNvSpPr/>
           <p:nvPr/>
         </p:nvSpPr>
@@ -50805,7 +51813,7 @@
       </p:sp>
       <p:sp>
         <p:nvSpPr>
-          <p:cNvPr id="38" name="Text 36"/>
+          <p:cNvPr id="39" name="Text 37"/>
           <p:cNvSpPr txBox="1"/>
           <p:nvPr/>
         </p:nvSpPr>
@@ -50844,7 +51852,7 @@
       </p:sp>
       <p:sp>
         <p:nvSpPr>
-          <p:cNvPr id="39" name="Shape 37"/>
+          <p:cNvPr id="40" name="Shape 38"/>
           <p:cNvSpPr/>
           <p:nvPr/>
         </p:nvSpPr>
@@ -50869,7 +51877,7 @@
       </p:sp>
       <p:sp>
         <p:nvSpPr>
-          <p:cNvPr id="40" name="Text 38"/>
+          <p:cNvPr id="41" name="Text 39"/>
           <p:cNvSpPr txBox="1"/>
           <p:nvPr/>
         </p:nvSpPr>
@@ -50908,7 +51916,7 @@
       </p:sp>
       <p:sp>
         <p:nvSpPr>
-          <p:cNvPr id="41" name="Shape 39"/>
+          <p:cNvPr id="42" name="Shape 40"/>
           <p:cNvSpPr/>
           <p:nvPr/>
         </p:nvSpPr>
@@ -50933,7 +51941,7 @@
       </p:sp>
       <p:sp>
         <p:nvSpPr>
-          <p:cNvPr id="42" name="Text 40"/>
+          <p:cNvPr id="43" name="Text 41"/>
           <p:cNvSpPr txBox="1"/>
           <p:nvPr/>
         </p:nvSpPr>
@@ -50972,7 +51980,7 @@
       </p:sp>
       <p:sp>
         <p:nvSpPr>
-          <p:cNvPr id="43" name="Shape 41"/>
+          <p:cNvPr id="44" name="Shape 42"/>
           <p:cNvSpPr/>
           <p:nvPr/>
         </p:nvSpPr>
@@ -50997,7 +52005,7 @@
       </p:sp>
       <p:sp>
         <p:nvSpPr>
-          <p:cNvPr id="44" name="Text 42"/>
+          <p:cNvPr id="45" name="Text 43"/>
           <p:cNvSpPr txBox="1"/>
           <p:nvPr/>
         </p:nvSpPr>
@@ -51036,7 +52044,7 @@
       </p:sp>
       <p:sp>
         <p:nvSpPr>
-          <p:cNvPr id="45" name="Shape 43"/>
+          <p:cNvPr id="46" name="Shape 44"/>
           <p:cNvSpPr/>
           <p:nvPr/>
         </p:nvSpPr>
@@ -51061,7 +52069,7 @@
       </p:sp>
       <p:sp>
         <p:nvSpPr>
-          <p:cNvPr id="46" name="Text 44"/>
+          <p:cNvPr id="47" name="Text 45"/>
           <p:cNvSpPr txBox="1"/>
           <p:nvPr/>
         </p:nvSpPr>
@@ -51100,7 +52108,7 @@
       </p:sp>
       <p:sp>
         <p:nvSpPr>
-          <p:cNvPr id="47" name="Shape 45"/>
+          <p:cNvPr id="48" name="Shape 46"/>
           <p:cNvSpPr/>
           <p:nvPr/>
         </p:nvSpPr>
@@ -51125,7 +52133,7 @@
       </p:sp>
       <p:sp>
         <p:nvSpPr>
-          <p:cNvPr id="48" name="Text 46"/>
+          <p:cNvPr id="49" name="Text 47"/>
           <p:cNvSpPr txBox="1"/>
           <p:nvPr/>
         </p:nvSpPr>
@@ -51881,7 +52889,70 @@
       </p:sp>
       <p:sp>
         <p:nvSpPr>
-          <p:cNvPr id="22" name="Shape 20"/>
+          <p:cNvPr id="22" name="Text 20"/>
+          <p:cNvSpPr txBox="1"/>
+          <p:nvPr/>
+        </p:nvSpPr>
+        <p:spPr>
+          <a:xfrm>
+            <a:off x="502920" y="3703320"/>
+            <a:ext cx="11201400" cy="685800"/>
+          </a:xfrm>
+          <a:prstGeom prst="rect">
+            <a:avLst/>
+          </a:prstGeom>
+          <a:noFill/>
+          <a:ln/>
+        </p:spPr>
+        <p:txBody>
+          <a:bodyPr wrap="square" lIns="0" tIns="0" rIns="0" bIns="0" rtlCol="0" anchor="ctr"/>
+          <a:lstStyle/>
+          <a:p>
+            <a:pPr indent="0" marL="0">
+              <a:lnSpc>
+                <a:spcPct val="120000"/>
+              </a:lnSpc>
+              <a:buNone/>
+            </a:pPr>
+            <a:r>
+              <a:rPr lang="en-US" sz="850" b="1" dirty="0">
+                <a:solidFill>
+                  <a:srgbClr val="8A8A8A"/>
+                </a:solidFill>
+                <a:latin typeface="Consolas" pitchFamily="34" charset="0"/>
+                <a:ea typeface="Consolas" pitchFamily="34" charset="-122"/>
+                <a:cs typeface="Consolas" pitchFamily="34" charset="-120"/>
+              </a:rPr>
+              <a:t>具体例
+</a:t>
+            </a:r>
+            <a:endParaRPr lang="en-US" sz="850" dirty="0"/>
+          </a:p>
+          <a:p>
+            <a:pPr indent="0" marL="0">
+              <a:lnSpc>
+                <a:spcPct val="120000"/>
+              </a:lnSpc>
+              <a:buNone/>
+            </a:pPr>
+            <a:r>
+              <a:rPr lang="en-US" sz="1050" dirty="0">
+                <a:solidFill>
+                  <a:srgbClr val="171717"/>
+                </a:solidFill>
+                <a:latin typeface="Yu Gothic" pitchFamily="34" charset="0"/>
+                <a:ea typeface="Yu Gothic" pitchFamily="34" charset="-122"/>
+                <a:cs typeface="Yu Gothic" pitchFamily="34" charset="-120"/>
+              </a:rPr>
+              <a:t>通販サイトを運営するC社は商品写真をJPEG形式（非可逆圧縮）で軽量化しつつ、視覚に障がいのある利用者のために画像へ代替テキストを設定し、ユーザビリティとアクセシビリティの両方に配慮している。</a:t>
+            </a:r>
+            <a:endParaRPr lang="en-US" sz="850" dirty="0"/>
+          </a:p>
+        </p:txBody>
+      </p:sp>
+      <p:sp>
+        <p:nvSpPr>
+          <p:cNvPr id="23" name="Shape 21"/>
           <p:cNvSpPr/>
           <p:nvPr/>
         </p:nvSpPr>
@@ -51904,7 +52975,7 @@
       </p:sp>
       <p:sp>
         <p:nvSpPr>
-          <p:cNvPr id="23" name="Shape 21"/>
+          <p:cNvPr id="24" name="Shape 22"/>
           <p:cNvSpPr/>
           <p:nvPr/>
         </p:nvSpPr>
@@ -51924,7 +52995,7 @@
       </p:sp>
       <p:sp>
         <p:nvSpPr>
-          <p:cNvPr id="24" name="Text 22"/>
+          <p:cNvPr id="25" name="Text 23"/>
           <p:cNvSpPr txBox="1"/>
           <p:nvPr/>
         </p:nvSpPr>
@@ -51963,7 +53034,7 @@
       </p:sp>
       <p:sp>
         <p:nvSpPr>
-          <p:cNvPr id="25" name="Text 23"/>
+          <p:cNvPr id="26" name="Text 24"/>
           <p:cNvSpPr txBox="1"/>
           <p:nvPr/>
         </p:nvSpPr>
@@ -52002,7 +53073,7 @@
       </p:sp>
       <p:sp>
         <p:nvSpPr>
-          <p:cNvPr id="26" name="Shape 24"/>
+          <p:cNvPr id="27" name="Shape 25"/>
           <p:cNvSpPr/>
           <p:nvPr/>
         </p:nvSpPr>
@@ -52025,7 +53096,7 @@
       </p:sp>
       <p:sp>
         <p:nvSpPr>
-          <p:cNvPr id="27" name="Text 25"/>
+          <p:cNvPr id="28" name="Text 26"/>
           <p:cNvSpPr txBox="1"/>
           <p:nvPr/>
         </p:nvSpPr>
@@ -52064,7 +53135,7 @@
       </p:sp>
       <p:sp>
         <p:nvSpPr>
-          <p:cNvPr id="28" name="Text 26"/>
+          <p:cNvPr id="29" name="Text 27"/>
           <p:cNvSpPr txBox="1"/>
           <p:nvPr/>
         </p:nvSpPr>
@@ -52103,7 +53174,7 @@
       </p:sp>
       <p:sp>
         <p:nvSpPr>
-          <p:cNvPr id="29" name="Shape 27"/>
+          <p:cNvPr id="30" name="Shape 28"/>
           <p:cNvSpPr/>
           <p:nvPr/>
         </p:nvSpPr>
@@ -52128,7 +53199,7 @@
       </p:sp>
       <p:sp>
         <p:nvSpPr>
-          <p:cNvPr id="30" name="Text 28"/>
+          <p:cNvPr id="31" name="Text 29"/>
           <p:cNvSpPr txBox="1"/>
           <p:nvPr/>
         </p:nvSpPr>
@@ -52167,7 +53238,7 @@
       </p:sp>
       <p:sp>
         <p:nvSpPr>
-          <p:cNvPr id="31" name="Shape 29"/>
+          <p:cNvPr id="32" name="Shape 30"/>
           <p:cNvSpPr/>
           <p:nvPr/>
         </p:nvSpPr>
@@ -52192,7 +53263,7 @@
       </p:sp>
       <p:sp>
         <p:nvSpPr>
-          <p:cNvPr id="32" name="Text 30"/>
+          <p:cNvPr id="33" name="Text 31"/>
           <p:cNvSpPr txBox="1"/>
           <p:nvPr/>
         </p:nvSpPr>
@@ -52231,7 +53302,7 @@
       </p:sp>
       <p:sp>
         <p:nvSpPr>
-          <p:cNvPr id="33" name="Shape 31"/>
+          <p:cNvPr id="34" name="Shape 32"/>
           <p:cNvSpPr/>
           <p:nvPr/>
         </p:nvSpPr>
@@ -52256,7 +53327,7 @@
       </p:sp>
       <p:sp>
         <p:nvSpPr>
-          <p:cNvPr id="34" name="Text 32"/>
+          <p:cNvPr id="35" name="Text 33"/>
           <p:cNvSpPr txBox="1"/>
           <p:nvPr/>
         </p:nvSpPr>
@@ -52295,7 +53366,7 @@
       </p:sp>
       <p:sp>
         <p:nvSpPr>
-          <p:cNvPr id="35" name="Shape 33"/>
+          <p:cNvPr id="36" name="Shape 34"/>
           <p:cNvSpPr/>
           <p:nvPr/>
         </p:nvSpPr>
@@ -52320,7 +53391,7 @@
       </p:sp>
       <p:sp>
         <p:nvSpPr>
-          <p:cNvPr id="36" name="Text 34"/>
+          <p:cNvPr id="37" name="Text 35"/>
           <p:cNvSpPr txBox="1"/>
           <p:nvPr/>
         </p:nvSpPr>
@@ -52359,7 +53430,7 @@
       </p:sp>
       <p:sp>
         <p:nvSpPr>
-          <p:cNvPr id="37" name="Shape 35"/>
+          <p:cNvPr id="38" name="Shape 36"/>
           <p:cNvSpPr/>
           <p:nvPr/>
         </p:nvSpPr>
@@ -52384,7 +53455,7 @@
       </p:sp>
       <p:sp>
         <p:nvSpPr>
-          <p:cNvPr id="38" name="Text 36"/>
+          <p:cNvPr id="39" name="Text 37"/>
           <p:cNvSpPr txBox="1"/>
           <p:nvPr/>
         </p:nvSpPr>
@@ -52423,7 +53494,7 @@
       </p:sp>
       <p:sp>
         <p:nvSpPr>
-          <p:cNvPr id="39" name="Shape 37"/>
+          <p:cNvPr id="40" name="Shape 38"/>
           <p:cNvSpPr/>
           <p:nvPr/>
         </p:nvSpPr>
@@ -52448,7 +53519,7 @@
       </p:sp>
       <p:sp>
         <p:nvSpPr>
-          <p:cNvPr id="40" name="Text 38"/>
+          <p:cNvPr id="41" name="Text 39"/>
           <p:cNvSpPr txBox="1"/>
           <p:nvPr/>
         </p:nvSpPr>
@@ -52487,7 +53558,7 @@
       </p:sp>
       <p:sp>
         <p:nvSpPr>
-          <p:cNvPr id="41" name="Shape 39"/>
+          <p:cNvPr id="42" name="Shape 40"/>
           <p:cNvSpPr/>
           <p:nvPr/>
         </p:nvSpPr>
@@ -52512,7 +53583,7 @@
       </p:sp>
       <p:sp>
         <p:nvSpPr>
-          <p:cNvPr id="42" name="Text 40"/>
+          <p:cNvPr id="43" name="Text 41"/>
           <p:cNvSpPr txBox="1"/>
           <p:nvPr/>
         </p:nvSpPr>
@@ -52551,7 +53622,7 @@
       </p:sp>
       <p:sp>
         <p:nvSpPr>
-          <p:cNvPr id="43" name="Shape 41"/>
+          <p:cNvPr id="44" name="Shape 42"/>
           <p:cNvSpPr/>
           <p:nvPr/>
         </p:nvSpPr>
@@ -52576,7 +53647,7 @@
       </p:sp>
       <p:sp>
         <p:nvSpPr>
-          <p:cNvPr id="44" name="Text 42"/>
+          <p:cNvPr id="45" name="Text 43"/>
           <p:cNvSpPr txBox="1"/>
           <p:nvPr/>
         </p:nvSpPr>
@@ -52615,7 +53686,7 @@
       </p:sp>
       <p:sp>
         <p:nvSpPr>
-          <p:cNvPr id="45" name="Shape 43"/>
+          <p:cNvPr id="46" name="Shape 44"/>
           <p:cNvSpPr/>
           <p:nvPr/>
         </p:nvSpPr>
@@ -52640,7 +53711,7 @@
       </p:sp>
       <p:sp>
         <p:nvSpPr>
-          <p:cNvPr id="46" name="Text 44"/>
+          <p:cNvPr id="47" name="Text 45"/>
           <p:cNvSpPr txBox="1"/>
           <p:nvPr/>
         </p:nvSpPr>
@@ -52679,7 +53750,7 @@
       </p:sp>
       <p:sp>
         <p:nvSpPr>
-          <p:cNvPr id="47" name="Shape 45"/>
+          <p:cNvPr id="48" name="Shape 46"/>
           <p:cNvSpPr/>
           <p:nvPr/>
         </p:nvSpPr>
@@ -52704,7 +53775,7 @@
       </p:sp>
       <p:sp>
         <p:nvSpPr>
-          <p:cNvPr id="48" name="Text 46"/>
+          <p:cNvPr id="49" name="Text 47"/>
           <p:cNvSpPr txBox="1"/>
           <p:nvPr/>
         </p:nvSpPr>
